--- a/images_with_layers.pptx
+++ b/images_with_layers.pptx
@@ -5,12 +5,13 @@
     <p:sldMasterId id="2147483648" r:id="rId1"/>
   </p:sldMasterIdLst>
   <p:notesMasterIdLst>
-    <p:notesMasterId r:id="rId5"/>
+    <p:notesMasterId r:id="rId6"/>
   </p:notesMasterIdLst>
   <p:sldIdLst>
     <p:sldId id="256" r:id="rId2"/>
     <p:sldId id="257" r:id="rId3"/>
     <p:sldId id="259" r:id="rId4"/>
+    <p:sldId id="260" r:id="rId5"/>
   </p:sldIdLst>
   <p:sldSz cx="12192000" cy="6858000"/>
   <p:notesSz cx="6858000" cy="9144000"/>
@@ -117,9 +118,13 @@
             <p14:sldId id="256"/>
             <p14:sldId id="257"/>
             <p14:sldId id="259"/>
+            <p14:sldId id="260"/>
           </p14:sldIdLst>
         </p14:section>
       </p14:sectionLst>
+    </p:ext>
+    <p:ext uri="{EFAFB233-063F-42B5-8137-9DF3F51BA10A}">
+      <p15:sldGuideLst xmlns:p15="http://schemas.microsoft.com/office/powerpoint/2012/main"/>
     </p:ext>
   </p:extLst>
 </p:presentation>
@@ -617,7 +622,7 @@
           <a:p>
             <a:fld id="{E487E608-D9C6-4B3C-A9A4-BEAD08ECA06D}" type="datetimeFigureOut">
               <a:rPr lang="en-US" smtClean="0"/>
-              <a:t>9/15/2025</a:t>
+              <a:t>9/16/2025</a:t>
             </a:fld>
             <a:endParaRPr lang="en-US"/>
           </a:p>
@@ -1483,7 +1488,7 @@
           <a:p>
             <a:fld id="{D241CDF3-A1FB-4215-9C3B-B36887AAFAD2}" type="datetimeFigureOut">
               <a:rPr lang="en-US" smtClean="0"/>
-              <a:t>9/15/2025</a:t>
+              <a:t>9/16/2025</a:t>
             </a:fld>
             <a:endParaRPr lang="en-US"/>
           </a:p>
@@ -1681,7 +1686,7 @@
           <a:p>
             <a:fld id="{D241CDF3-A1FB-4215-9C3B-B36887AAFAD2}" type="datetimeFigureOut">
               <a:rPr lang="en-US" smtClean="0"/>
-              <a:t>9/15/2025</a:t>
+              <a:t>9/16/2025</a:t>
             </a:fld>
             <a:endParaRPr lang="en-US"/>
           </a:p>
@@ -1889,7 +1894,7 @@
           <a:p>
             <a:fld id="{D241CDF3-A1FB-4215-9C3B-B36887AAFAD2}" type="datetimeFigureOut">
               <a:rPr lang="en-US" smtClean="0"/>
-              <a:t>9/15/2025</a:t>
+              <a:t>9/16/2025</a:t>
             </a:fld>
             <a:endParaRPr lang="en-US"/>
           </a:p>
@@ -2087,7 +2092,7 @@
           <a:p>
             <a:fld id="{D241CDF3-A1FB-4215-9C3B-B36887AAFAD2}" type="datetimeFigureOut">
               <a:rPr lang="en-US" smtClean="0"/>
-              <a:t>9/15/2025</a:t>
+              <a:t>9/16/2025</a:t>
             </a:fld>
             <a:endParaRPr lang="en-US"/>
           </a:p>
@@ -2362,7 +2367,7 @@
           <a:p>
             <a:fld id="{D241CDF3-A1FB-4215-9C3B-B36887AAFAD2}" type="datetimeFigureOut">
               <a:rPr lang="en-US" smtClean="0"/>
-              <a:t>9/15/2025</a:t>
+              <a:t>9/16/2025</a:t>
             </a:fld>
             <a:endParaRPr lang="en-US"/>
           </a:p>
@@ -2627,7 +2632,7 @@
           <a:p>
             <a:fld id="{D241CDF3-A1FB-4215-9C3B-B36887AAFAD2}" type="datetimeFigureOut">
               <a:rPr lang="en-US" smtClean="0"/>
-              <a:t>9/15/2025</a:t>
+              <a:t>9/16/2025</a:t>
             </a:fld>
             <a:endParaRPr lang="en-US"/>
           </a:p>
@@ -3039,7 +3044,7 @@
           <a:p>
             <a:fld id="{D241CDF3-A1FB-4215-9C3B-B36887AAFAD2}" type="datetimeFigureOut">
               <a:rPr lang="en-US" smtClean="0"/>
-              <a:t>9/15/2025</a:t>
+              <a:t>9/16/2025</a:t>
             </a:fld>
             <a:endParaRPr lang="en-US"/>
           </a:p>
@@ -3180,7 +3185,7 @@
           <a:p>
             <a:fld id="{D241CDF3-A1FB-4215-9C3B-B36887AAFAD2}" type="datetimeFigureOut">
               <a:rPr lang="en-US" smtClean="0"/>
-              <a:t>9/15/2025</a:t>
+              <a:t>9/16/2025</a:t>
             </a:fld>
             <a:endParaRPr lang="en-US"/>
           </a:p>
@@ -3293,7 +3298,7 @@
           <a:p>
             <a:fld id="{D241CDF3-A1FB-4215-9C3B-B36887AAFAD2}" type="datetimeFigureOut">
               <a:rPr lang="en-US" smtClean="0"/>
-              <a:t>9/15/2025</a:t>
+              <a:t>9/16/2025</a:t>
             </a:fld>
             <a:endParaRPr lang="en-US"/>
           </a:p>
@@ -3604,7 +3609,7 @@
           <a:p>
             <a:fld id="{D241CDF3-A1FB-4215-9C3B-B36887AAFAD2}" type="datetimeFigureOut">
               <a:rPr lang="en-US" smtClean="0"/>
-              <a:t>9/15/2025</a:t>
+              <a:t>9/16/2025</a:t>
             </a:fld>
             <a:endParaRPr lang="en-US"/>
           </a:p>
@@ -3892,7 +3897,7 @@
           <a:p>
             <a:fld id="{D241CDF3-A1FB-4215-9C3B-B36887AAFAD2}" type="datetimeFigureOut">
               <a:rPr lang="en-US" smtClean="0"/>
-              <a:t>9/15/2025</a:t>
+              <a:t>9/16/2025</a:t>
             </a:fld>
             <a:endParaRPr lang="en-US"/>
           </a:p>
@@ -4133,7 +4138,7 @@
           <a:p>
             <a:fld id="{D241CDF3-A1FB-4215-9C3B-B36887AAFAD2}" type="datetimeFigureOut">
               <a:rPr lang="en-US" smtClean="0"/>
-              <a:t>9/15/2025</a:t>
+              <a:t>9/16/2025</a:t>
             </a:fld>
             <a:endParaRPr lang="en-US"/>
           </a:p>
@@ -6239,6 +6244,488 @@
     <p:extLst>
       <p:ext uri="{BB962C8B-B14F-4D97-AF65-F5344CB8AC3E}">
         <p14:creationId xmlns:p14="http://schemas.microsoft.com/office/powerpoint/2010/main" val="1838129098"/>
+      </p:ext>
+    </p:extLst>
+  </p:cSld>
+  <p:clrMapOvr>
+    <a:masterClrMapping/>
+  </p:clrMapOvr>
+</p:sld>
+</file>
+
+<file path=ppt/slides/slide4.xml><?xml version="1.0" encoding="utf-8"?>
+<p:sld xmlns:a="http://schemas.openxmlformats.org/drawingml/2006/main" xmlns:r="http://schemas.openxmlformats.org/officeDocument/2006/relationships" xmlns:p="http://schemas.openxmlformats.org/presentationml/2006/main">
+  <p:cSld>
+    <p:spTree>
+      <p:nvGrpSpPr>
+        <p:cNvPr id="1" name=""/>
+        <p:cNvGrpSpPr/>
+        <p:nvPr/>
+      </p:nvGrpSpPr>
+      <p:grpSpPr>
+        <a:xfrm>
+          <a:off x="0" y="0"/>
+          <a:ext cx="0" cy="0"/>
+          <a:chOff x="0" y="0"/>
+          <a:chExt cx="0" cy="0"/>
+        </a:xfrm>
+      </p:grpSpPr>
+      <p:pic>
+        <p:nvPicPr>
+          <p:cNvPr id="5" name="Picture 4">
+            <a:extLst>
+              <a:ext uri="{FF2B5EF4-FFF2-40B4-BE49-F238E27FC236}">
+                <a16:creationId xmlns:a16="http://schemas.microsoft.com/office/drawing/2014/main" id="{08CDB1DE-94D6-D866-9238-5CD12107B803}"/>
+              </a:ext>
+            </a:extLst>
+          </p:cNvPr>
+          <p:cNvPicPr>
+            <a:picLocks noChangeAspect="1"/>
+          </p:cNvPicPr>
+          <p:nvPr/>
+        </p:nvPicPr>
+        <p:blipFill>
+          <a:blip r:embed="rId2"/>
+          <a:stretch>
+            <a:fillRect/>
+          </a:stretch>
+        </p:blipFill>
+        <p:spPr>
+          <a:xfrm>
+            <a:off x="4693737" y="0"/>
+            <a:ext cx="2804526" cy="6858000"/>
+          </a:xfrm>
+          <a:prstGeom prst="rect">
+            <a:avLst/>
+          </a:prstGeom>
+        </p:spPr>
+      </p:pic>
+      <p:sp>
+        <p:nvSpPr>
+          <p:cNvPr id="6" name="TextBox 5">
+            <a:extLst>
+              <a:ext uri="{FF2B5EF4-FFF2-40B4-BE49-F238E27FC236}">
+                <a16:creationId xmlns:a16="http://schemas.microsoft.com/office/drawing/2014/main" id="{4C2336B3-D2FD-E5AA-C4B9-A28F097B6112}"/>
+              </a:ext>
+            </a:extLst>
+          </p:cNvPr>
+          <p:cNvSpPr txBox="1"/>
+          <p:nvPr/>
+        </p:nvSpPr>
+        <p:spPr>
+          <a:xfrm>
+            <a:off x="4385639" y="2830286"/>
+            <a:ext cx="308098" cy="369332"/>
+          </a:xfrm>
+          <a:prstGeom prst="rect">
+            <a:avLst/>
+          </a:prstGeom>
+          <a:noFill/>
+        </p:spPr>
+        <p:txBody>
+          <a:bodyPr wrap="none" rtlCol="0">
+            <a:spAutoFit/>
+          </a:bodyPr>
+          <a:lstStyle/>
+          <a:p>
+            <a:r>
+              <a:rPr lang="en-US" dirty="0">
+                <a:solidFill>
+                  <a:srgbClr val="FF0000"/>
+                </a:solidFill>
+              </a:rPr>
+              <a:t>1</a:t>
+            </a:r>
+          </a:p>
+        </p:txBody>
+      </p:sp>
+      <p:sp>
+        <p:nvSpPr>
+          <p:cNvPr id="7" name="Rectangle 6">
+            <a:extLst>
+              <a:ext uri="{FF2B5EF4-FFF2-40B4-BE49-F238E27FC236}">
+                <a16:creationId xmlns:a16="http://schemas.microsoft.com/office/drawing/2014/main" id="{241A92DB-5AB1-7703-5285-5C63D5BA07F1}"/>
+              </a:ext>
+            </a:extLst>
+          </p:cNvPr>
+          <p:cNvSpPr/>
+          <p:nvPr/>
+        </p:nvSpPr>
+        <p:spPr>
+          <a:xfrm>
+            <a:off x="4693737" y="2830286"/>
+            <a:ext cx="2804526" cy="362857"/>
+          </a:xfrm>
+          <a:prstGeom prst="rect">
+            <a:avLst/>
+          </a:prstGeom>
+          <a:noFill/>
+          <a:ln w="38100">
+            <a:solidFill>
+              <a:srgbClr val="FF0000"/>
+            </a:solidFill>
+          </a:ln>
+        </p:spPr>
+        <p:style>
+          <a:lnRef idx="2">
+            <a:schemeClr val="accent1">
+              <a:shade val="15000"/>
+            </a:schemeClr>
+          </a:lnRef>
+          <a:fillRef idx="1">
+            <a:schemeClr val="accent1"/>
+          </a:fillRef>
+          <a:effectRef idx="0">
+            <a:schemeClr val="accent1"/>
+          </a:effectRef>
+          <a:fontRef idx="minor">
+            <a:schemeClr val="lt1"/>
+          </a:fontRef>
+        </p:style>
+        <p:txBody>
+          <a:bodyPr rtlCol="0" anchor="ctr"/>
+          <a:lstStyle/>
+          <a:p>
+            <a:pPr algn="ctr"/>
+            <a:endParaRPr lang="en-US">
+              <a:ln w="0"/>
+              <a:solidFill>
+                <a:schemeClr val="tx1"/>
+              </a:solidFill>
+              <a:effectLst>
+                <a:outerShdw blurRad="38100" dist="19050" dir="2700000" algn="tl" rotWithShape="0">
+                  <a:schemeClr val="dk1">
+                    <a:alpha val="40000"/>
+                  </a:schemeClr>
+                </a:outerShdw>
+              </a:effectLst>
+            </a:endParaRPr>
+          </a:p>
+        </p:txBody>
+      </p:sp>
+      <p:sp>
+        <p:nvSpPr>
+          <p:cNvPr id="8" name="Rectangle 7">
+            <a:extLst>
+              <a:ext uri="{FF2B5EF4-FFF2-40B4-BE49-F238E27FC236}">
+                <a16:creationId xmlns:a16="http://schemas.microsoft.com/office/drawing/2014/main" id="{8E6F0C0F-5D4E-B0C9-801B-32CAF110D070}"/>
+              </a:ext>
+            </a:extLst>
+          </p:cNvPr>
+          <p:cNvSpPr/>
+          <p:nvPr/>
+        </p:nvSpPr>
+        <p:spPr>
+          <a:xfrm>
+            <a:off x="4693737" y="3991428"/>
+            <a:ext cx="2804526" cy="362857"/>
+          </a:xfrm>
+          <a:prstGeom prst="rect">
+            <a:avLst/>
+          </a:prstGeom>
+          <a:noFill/>
+          <a:ln w="38100">
+            <a:solidFill>
+              <a:srgbClr val="FF0000"/>
+            </a:solidFill>
+          </a:ln>
+        </p:spPr>
+        <p:style>
+          <a:lnRef idx="2">
+            <a:schemeClr val="accent1">
+              <a:shade val="15000"/>
+            </a:schemeClr>
+          </a:lnRef>
+          <a:fillRef idx="1">
+            <a:schemeClr val="accent1"/>
+          </a:fillRef>
+          <a:effectRef idx="0">
+            <a:schemeClr val="accent1"/>
+          </a:effectRef>
+          <a:fontRef idx="minor">
+            <a:schemeClr val="lt1"/>
+          </a:fontRef>
+        </p:style>
+        <p:txBody>
+          <a:bodyPr rtlCol="0" anchor="ctr"/>
+          <a:lstStyle/>
+          <a:p>
+            <a:pPr algn="ctr"/>
+            <a:endParaRPr lang="en-US">
+              <a:ln w="0"/>
+              <a:solidFill>
+                <a:schemeClr val="tx1"/>
+              </a:solidFill>
+              <a:effectLst>
+                <a:outerShdw blurRad="38100" dist="19050" dir="2700000" algn="tl" rotWithShape="0">
+                  <a:schemeClr val="dk1">
+                    <a:alpha val="40000"/>
+                  </a:schemeClr>
+                </a:outerShdw>
+              </a:effectLst>
+            </a:endParaRPr>
+          </a:p>
+        </p:txBody>
+      </p:sp>
+      <p:sp>
+        <p:nvSpPr>
+          <p:cNvPr id="9" name="Rectangle 8">
+            <a:extLst>
+              <a:ext uri="{FF2B5EF4-FFF2-40B4-BE49-F238E27FC236}">
+                <a16:creationId xmlns:a16="http://schemas.microsoft.com/office/drawing/2014/main" id="{55DD43E3-001F-C246-5AD9-4A9DE88CA6AA}"/>
+              </a:ext>
+            </a:extLst>
+          </p:cNvPr>
+          <p:cNvSpPr/>
+          <p:nvPr/>
+        </p:nvSpPr>
+        <p:spPr>
+          <a:xfrm>
+            <a:off x="4693737" y="4550230"/>
+            <a:ext cx="2804526" cy="362857"/>
+          </a:xfrm>
+          <a:prstGeom prst="rect">
+            <a:avLst/>
+          </a:prstGeom>
+          <a:noFill/>
+          <a:ln w="38100">
+            <a:solidFill>
+              <a:srgbClr val="FF0000"/>
+            </a:solidFill>
+          </a:ln>
+        </p:spPr>
+        <p:style>
+          <a:lnRef idx="2">
+            <a:schemeClr val="accent1">
+              <a:shade val="15000"/>
+            </a:schemeClr>
+          </a:lnRef>
+          <a:fillRef idx="1">
+            <a:schemeClr val="accent1"/>
+          </a:fillRef>
+          <a:effectRef idx="0">
+            <a:schemeClr val="accent1"/>
+          </a:effectRef>
+          <a:fontRef idx="minor">
+            <a:schemeClr val="lt1"/>
+          </a:fontRef>
+        </p:style>
+        <p:txBody>
+          <a:bodyPr rtlCol="0" anchor="ctr"/>
+          <a:lstStyle/>
+          <a:p>
+            <a:pPr algn="ctr"/>
+            <a:endParaRPr lang="en-US">
+              <a:ln w="0"/>
+              <a:solidFill>
+                <a:schemeClr val="tx1"/>
+              </a:solidFill>
+              <a:effectLst>
+                <a:outerShdw blurRad="38100" dist="19050" dir="2700000" algn="tl" rotWithShape="0">
+                  <a:schemeClr val="dk1">
+                    <a:alpha val="40000"/>
+                  </a:schemeClr>
+                </a:outerShdw>
+              </a:effectLst>
+            </a:endParaRPr>
+          </a:p>
+        </p:txBody>
+      </p:sp>
+      <p:sp>
+        <p:nvSpPr>
+          <p:cNvPr id="10" name="Rectangle 9">
+            <a:extLst>
+              <a:ext uri="{FF2B5EF4-FFF2-40B4-BE49-F238E27FC236}">
+                <a16:creationId xmlns:a16="http://schemas.microsoft.com/office/drawing/2014/main" id="{495B6F51-0B07-0B59-1DC5-50DAA14F2E82}"/>
+              </a:ext>
+            </a:extLst>
+          </p:cNvPr>
+          <p:cNvSpPr/>
+          <p:nvPr/>
+        </p:nvSpPr>
+        <p:spPr>
+          <a:xfrm>
+            <a:off x="4693737" y="5109032"/>
+            <a:ext cx="2804526" cy="362857"/>
+          </a:xfrm>
+          <a:prstGeom prst="rect">
+            <a:avLst/>
+          </a:prstGeom>
+          <a:noFill/>
+          <a:ln w="38100">
+            <a:solidFill>
+              <a:srgbClr val="FF0000"/>
+            </a:solidFill>
+          </a:ln>
+        </p:spPr>
+        <p:style>
+          <a:lnRef idx="2">
+            <a:schemeClr val="accent1">
+              <a:shade val="15000"/>
+            </a:schemeClr>
+          </a:lnRef>
+          <a:fillRef idx="1">
+            <a:schemeClr val="accent1"/>
+          </a:fillRef>
+          <a:effectRef idx="0">
+            <a:schemeClr val="accent1"/>
+          </a:effectRef>
+          <a:fontRef idx="minor">
+            <a:schemeClr val="lt1"/>
+          </a:fontRef>
+        </p:style>
+        <p:txBody>
+          <a:bodyPr rtlCol="0" anchor="ctr"/>
+          <a:lstStyle/>
+          <a:p>
+            <a:pPr algn="ctr"/>
+            <a:endParaRPr lang="en-US">
+              <a:ln w="0"/>
+              <a:solidFill>
+                <a:schemeClr val="tx1"/>
+              </a:solidFill>
+              <a:effectLst>
+                <a:outerShdw blurRad="38100" dist="19050" dir="2700000" algn="tl" rotWithShape="0">
+                  <a:schemeClr val="dk1">
+                    <a:alpha val="40000"/>
+                  </a:schemeClr>
+                </a:outerShdw>
+              </a:effectLst>
+            </a:endParaRPr>
+          </a:p>
+        </p:txBody>
+      </p:sp>
+      <p:sp>
+        <p:nvSpPr>
+          <p:cNvPr id="12" name="TextBox 11">
+            <a:extLst>
+              <a:ext uri="{FF2B5EF4-FFF2-40B4-BE49-F238E27FC236}">
+                <a16:creationId xmlns:a16="http://schemas.microsoft.com/office/drawing/2014/main" id="{CD7D68FD-AE43-BDD7-ED5A-234645335C58}"/>
+              </a:ext>
+            </a:extLst>
+          </p:cNvPr>
+          <p:cNvSpPr txBox="1"/>
+          <p:nvPr/>
+        </p:nvSpPr>
+        <p:spPr>
+          <a:xfrm>
+            <a:off x="4385639" y="3984953"/>
+            <a:ext cx="308098" cy="369332"/>
+          </a:xfrm>
+          <a:prstGeom prst="rect">
+            <a:avLst/>
+          </a:prstGeom>
+          <a:noFill/>
+        </p:spPr>
+        <p:txBody>
+          <a:bodyPr wrap="none" rtlCol="0">
+            <a:spAutoFit/>
+          </a:bodyPr>
+          <a:lstStyle/>
+          <a:p>
+            <a:r>
+              <a:rPr lang="en-CA" dirty="0">
+                <a:solidFill>
+                  <a:srgbClr val="FF0000"/>
+                </a:solidFill>
+              </a:rPr>
+              <a:t>2</a:t>
+            </a:r>
+            <a:endParaRPr lang="en-US" dirty="0">
+              <a:solidFill>
+                <a:srgbClr val="FF0000"/>
+              </a:solidFill>
+            </a:endParaRPr>
+          </a:p>
+        </p:txBody>
+      </p:sp>
+      <p:sp>
+        <p:nvSpPr>
+          <p:cNvPr id="13" name="TextBox 12">
+            <a:extLst>
+              <a:ext uri="{FF2B5EF4-FFF2-40B4-BE49-F238E27FC236}">
+                <a16:creationId xmlns:a16="http://schemas.microsoft.com/office/drawing/2014/main" id="{DA8C9A3F-6F1A-08BD-E751-BBE6C250C608}"/>
+              </a:ext>
+            </a:extLst>
+          </p:cNvPr>
+          <p:cNvSpPr txBox="1"/>
+          <p:nvPr/>
+        </p:nvSpPr>
+        <p:spPr>
+          <a:xfrm>
+            <a:off x="4385639" y="4546992"/>
+            <a:ext cx="308098" cy="369332"/>
+          </a:xfrm>
+          <a:prstGeom prst="rect">
+            <a:avLst/>
+          </a:prstGeom>
+          <a:noFill/>
+        </p:spPr>
+        <p:txBody>
+          <a:bodyPr wrap="none" rtlCol="0">
+            <a:spAutoFit/>
+          </a:bodyPr>
+          <a:lstStyle/>
+          <a:p>
+            <a:r>
+              <a:rPr lang="en-US" dirty="0">
+                <a:solidFill>
+                  <a:srgbClr val="FF0000"/>
+                </a:solidFill>
+              </a:rPr>
+              <a:t>3</a:t>
+            </a:r>
+          </a:p>
+        </p:txBody>
+      </p:sp>
+      <p:sp>
+        <p:nvSpPr>
+          <p:cNvPr id="14" name="TextBox 13">
+            <a:extLst>
+              <a:ext uri="{FF2B5EF4-FFF2-40B4-BE49-F238E27FC236}">
+                <a16:creationId xmlns:a16="http://schemas.microsoft.com/office/drawing/2014/main" id="{C145E54B-8DD3-7459-0822-D57905D55D04}"/>
+              </a:ext>
+            </a:extLst>
+          </p:cNvPr>
+          <p:cNvSpPr txBox="1"/>
+          <p:nvPr/>
+        </p:nvSpPr>
+        <p:spPr>
+          <a:xfrm>
+            <a:off x="4385639" y="5114220"/>
+            <a:ext cx="308098" cy="369332"/>
+          </a:xfrm>
+          <a:prstGeom prst="rect">
+            <a:avLst/>
+          </a:prstGeom>
+          <a:noFill/>
+        </p:spPr>
+        <p:txBody>
+          <a:bodyPr wrap="none" rtlCol="0">
+            <a:spAutoFit/>
+          </a:bodyPr>
+          <a:lstStyle/>
+          <a:p>
+            <a:r>
+              <a:rPr lang="en-CA" dirty="0">
+                <a:solidFill>
+                  <a:srgbClr val="FF0000"/>
+                </a:solidFill>
+              </a:rPr>
+              <a:t>4</a:t>
+            </a:r>
+            <a:endParaRPr lang="en-US" dirty="0">
+              <a:solidFill>
+                <a:srgbClr val="FF0000"/>
+              </a:solidFill>
+            </a:endParaRPr>
+          </a:p>
+        </p:txBody>
+      </p:sp>
+    </p:spTree>
+    <p:extLst>
+      <p:ext uri="{BB962C8B-B14F-4D97-AF65-F5344CB8AC3E}">
+        <p14:creationId xmlns:p14="http://schemas.microsoft.com/office/powerpoint/2010/main" val="2371670190"/>
       </p:ext>
     </p:extLst>
   </p:cSld>

--- a/images_with_layers.pptx
+++ b/images_with_layers.pptx
@@ -5,13 +5,15 @@
     <p:sldMasterId id="2147483648" r:id="rId1"/>
   </p:sldMasterIdLst>
   <p:notesMasterIdLst>
-    <p:notesMasterId r:id="rId6"/>
+    <p:notesMasterId r:id="rId8"/>
   </p:notesMasterIdLst>
   <p:sldIdLst>
-    <p:sldId id="256" r:id="rId2"/>
-    <p:sldId id="257" r:id="rId3"/>
-    <p:sldId id="259" r:id="rId4"/>
-    <p:sldId id="260" r:id="rId5"/>
+    <p:sldId id="261" r:id="rId2"/>
+    <p:sldId id="256" r:id="rId3"/>
+    <p:sldId id="257" r:id="rId4"/>
+    <p:sldId id="259" r:id="rId5"/>
+    <p:sldId id="262" r:id="rId6"/>
+    <p:sldId id="260" r:id="rId7"/>
   </p:sldIdLst>
   <p:sldSz cx="12192000" cy="6858000"/>
   <p:notesSz cx="6858000" cy="9144000"/>
@@ -115,9 +117,15 @@
       <p14:sectionLst xmlns:p14="http://schemas.microsoft.com/office/powerpoint/2010/main">
         <p14:section name="Home Page and Variants" id="{9EE3B63E-DA1C-47B6-82D6-E79847A08A80}">
           <p14:sldIdLst>
+            <p14:sldId id="261"/>
             <p14:sldId id="256"/>
             <p14:sldId id="257"/>
             <p14:sldId id="259"/>
+          </p14:sldIdLst>
+        </p14:section>
+        <p14:section name="Dataset Gallery" id="{69866AF7-968C-4F26-9ECA-AA64F6FFB6E8}">
+          <p14:sldIdLst>
+            <p14:sldId id="262"/>
             <p14:sldId id="260"/>
           </p14:sldIdLst>
         </p14:section>
@@ -622,7 +630,7 @@
           <a:p>
             <a:fld id="{E487E608-D9C6-4B3C-A9A4-BEAD08ECA06D}" type="datetimeFigureOut">
               <a:rPr lang="en-US" smtClean="0"/>
-              <a:t>9/16/2025</a:t>
+              <a:t>9/19/2025</a:t>
             </a:fld>
             <a:endParaRPr lang="en-US"/>
           </a:p>
@@ -952,29 +960,6 @@
             </a:pPr>
             <a:r>
               <a:rPr lang="en-US" dirty="0"/>
-              <a:t>Unmarked:  /docs/studio/assets/user/home-page.png</a:t>
-            </a:r>
-          </a:p>
-          <a:p>
-            <a:pPr marL="0" marR="0" lvl="0" indent="0" algn="l" defTabSz="914400" rtl="0" eaLnBrk="1" fontAlgn="auto" latinLnBrk="0" hangingPunct="1">
-              <a:lnSpc>
-                <a:spcPct val="100000"/>
-              </a:lnSpc>
-              <a:spcBef>
-                <a:spcPts val="0"/>
-              </a:spcBef>
-              <a:spcAft>
-                <a:spcPts val="0"/>
-              </a:spcAft>
-              <a:buClrTx/>
-              <a:buSzTx/>
-              <a:buFontTx/>
-              <a:buNone/>
-              <a:tabLst/>
-              <a:defRPr/>
-            </a:pPr>
-            <a:r>
-              <a:rPr lang="en-US" dirty="0"/>
               <a:t>Marked:  /docs/studio/assets/user/home-page-breakdown.png</a:t>
             </a:r>
           </a:p>
@@ -1020,7 +1005,7 @@
           <a:p>
             <a:fld id="{874397DF-5812-45E4-B5F0-BF2AEB9BFE48}" type="slidenum">
               <a:rPr lang="en-US" smtClean="0"/>
-              <a:t>1</a:t>
+              <a:t>2</a:t>
             </a:fld>
             <a:endParaRPr lang="en-US"/>
           </a:p>
@@ -1171,7 +1156,7 @@
           <a:p>
             <a:fld id="{874397DF-5812-45E4-B5F0-BF2AEB9BFE48}" type="slidenum">
               <a:rPr lang="en-US" smtClean="0"/>
-              <a:t>2</a:t>
+              <a:t>3</a:t>
             </a:fld>
             <a:endParaRPr lang="en-US"/>
           </a:p>
@@ -1322,7 +1307,7 @@
           <a:p>
             <a:fld id="{874397DF-5812-45E4-B5F0-BF2AEB9BFE48}" type="slidenum">
               <a:rPr lang="en-US" smtClean="0"/>
-              <a:t>3</a:t>
+              <a:t>4</a:t>
             </a:fld>
             <a:endParaRPr lang="en-US"/>
           </a:p>
@@ -1332,6 +1317,106 @@
     <p:extLst>
       <p:ext uri="{BB962C8B-B14F-4D97-AF65-F5344CB8AC3E}">
         <p14:creationId xmlns:p14="http://schemas.microsoft.com/office/powerpoint/2010/main" val="3074423555"/>
+      </p:ext>
+    </p:extLst>
+  </p:cSld>
+  <p:clrMapOvr>
+    <a:masterClrMapping/>
+  </p:clrMapOvr>
+</p:notes>
+</file>
+
+<file path=ppt/notesSlides/notesSlide4.xml><?xml version="1.0" encoding="utf-8"?>
+<p:notes xmlns:a="http://schemas.openxmlformats.org/drawingml/2006/main" xmlns:r="http://schemas.openxmlformats.org/officeDocument/2006/relationships" xmlns:p="http://schemas.openxmlformats.org/presentationml/2006/main">
+  <p:cSld>
+    <p:spTree>
+      <p:nvGrpSpPr>
+        <p:cNvPr id="1" name=""/>
+        <p:cNvGrpSpPr/>
+        <p:nvPr/>
+      </p:nvGrpSpPr>
+      <p:grpSpPr>
+        <a:xfrm>
+          <a:off x="0" y="0"/>
+          <a:ext cx="0" cy="0"/>
+          <a:chOff x="0" y="0"/>
+          <a:chExt cx="0" cy="0"/>
+        </a:xfrm>
+      </p:grpSpPr>
+      <p:sp>
+        <p:nvSpPr>
+          <p:cNvPr id="2" name="Slide Image Placeholder 1"/>
+          <p:cNvSpPr>
+            <a:spLocks noGrp="1" noRot="1" noChangeAspect="1"/>
+          </p:cNvSpPr>
+          <p:nvPr>
+            <p:ph type="sldImg"/>
+          </p:nvPr>
+        </p:nvSpPr>
+        <p:spPr/>
+      </p:sp>
+      <p:sp>
+        <p:nvSpPr>
+          <p:cNvPr id="3" name="Notes Placeholder 2"/>
+          <p:cNvSpPr>
+            <a:spLocks noGrp="1"/>
+          </p:cNvSpPr>
+          <p:nvPr>
+            <p:ph type="body" idx="1"/>
+          </p:nvPr>
+        </p:nvSpPr>
+        <p:spPr/>
+        <p:txBody>
+          <a:bodyPr/>
+          <a:lstStyle/>
+          <a:p>
+            <a:r>
+              <a:rPr lang="en-US" dirty="0"/>
+              <a:t>Marked:  </a:t>
+            </a:r>
+            <a:r>
+              <a:rPr lang="en-US" sz="1200" b="0" i="0" kern="1200" dirty="0">
+                <a:solidFill>
+                  <a:schemeClr val="tx1"/>
+                </a:solidFill>
+                <a:effectLst/>
+                <a:latin typeface="+mn-lt"/>
+                <a:ea typeface="+mn-ea"/>
+                <a:cs typeface="+mn-cs"/>
+              </a:rPr>
+              <a:t>docs/3D/assets/3d_viewers.jpg</a:t>
+            </a:r>
+            <a:endParaRPr lang="en-US" dirty="0"/>
+          </a:p>
+        </p:txBody>
+      </p:sp>
+      <p:sp>
+        <p:nvSpPr>
+          <p:cNvPr id="4" name="Slide Number Placeholder 3"/>
+          <p:cNvSpPr>
+            <a:spLocks noGrp="1"/>
+          </p:cNvSpPr>
+          <p:nvPr>
+            <p:ph type="sldNum" sz="quarter" idx="5"/>
+          </p:nvPr>
+        </p:nvSpPr>
+        <p:spPr/>
+        <p:txBody>
+          <a:bodyPr/>
+          <a:lstStyle/>
+          <a:p>
+            <a:fld id="{874397DF-5812-45E4-B5F0-BF2AEB9BFE48}" type="slidenum">
+              <a:rPr lang="en-US" smtClean="0"/>
+              <a:t>6</a:t>
+            </a:fld>
+            <a:endParaRPr lang="en-US"/>
+          </a:p>
+        </p:txBody>
+      </p:sp>
+    </p:spTree>
+    <p:extLst>
+      <p:ext uri="{BB962C8B-B14F-4D97-AF65-F5344CB8AC3E}">
+        <p14:creationId xmlns:p14="http://schemas.microsoft.com/office/powerpoint/2010/main" val="302560666"/>
       </p:ext>
     </p:extLst>
   </p:cSld>
@@ -1488,7 +1573,7 @@
           <a:p>
             <a:fld id="{D241CDF3-A1FB-4215-9C3B-B36887AAFAD2}" type="datetimeFigureOut">
               <a:rPr lang="en-US" smtClean="0"/>
-              <a:t>9/16/2025</a:t>
+              <a:t>9/19/2025</a:t>
             </a:fld>
             <a:endParaRPr lang="en-US"/>
           </a:p>
@@ -1686,7 +1771,7 @@
           <a:p>
             <a:fld id="{D241CDF3-A1FB-4215-9C3B-B36887AAFAD2}" type="datetimeFigureOut">
               <a:rPr lang="en-US" smtClean="0"/>
-              <a:t>9/16/2025</a:t>
+              <a:t>9/19/2025</a:t>
             </a:fld>
             <a:endParaRPr lang="en-US"/>
           </a:p>
@@ -1894,7 +1979,7 @@
           <a:p>
             <a:fld id="{D241CDF3-A1FB-4215-9C3B-B36887AAFAD2}" type="datetimeFigureOut">
               <a:rPr lang="en-US" smtClean="0"/>
-              <a:t>9/16/2025</a:t>
+              <a:t>9/19/2025</a:t>
             </a:fld>
             <a:endParaRPr lang="en-US"/>
           </a:p>
@@ -2092,7 +2177,7 @@
           <a:p>
             <a:fld id="{D241CDF3-A1FB-4215-9C3B-B36887AAFAD2}" type="datetimeFigureOut">
               <a:rPr lang="en-US" smtClean="0"/>
-              <a:t>9/16/2025</a:t>
+              <a:t>9/19/2025</a:t>
             </a:fld>
             <a:endParaRPr lang="en-US"/>
           </a:p>
@@ -2367,7 +2452,7 @@
           <a:p>
             <a:fld id="{D241CDF3-A1FB-4215-9C3B-B36887AAFAD2}" type="datetimeFigureOut">
               <a:rPr lang="en-US" smtClean="0"/>
-              <a:t>9/16/2025</a:t>
+              <a:t>9/19/2025</a:t>
             </a:fld>
             <a:endParaRPr lang="en-US"/>
           </a:p>
@@ -2632,7 +2717,7 @@
           <a:p>
             <a:fld id="{D241CDF3-A1FB-4215-9C3B-B36887AAFAD2}" type="datetimeFigureOut">
               <a:rPr lang="en-US" smtClean="0"/>
-              <a:t>9/16/2025</a:t>
+              <a:t>9/19/2025</a:t>
             </a:fld>
             <a:endParaRPr lang="en-US"/>
           </a:p>
@@ -3044,7 +3129,7 @@
           <a:p>
             <a:fld id="{D241CDF3-A1FB-4215-9C3B-B36887AAFAD2}" type="datetimeFigureOut">
               <a:rPr lang="en-US" smtClean="0"/>
-              <a:t>9/16/2025</a:t>
+              <a:t>9/19/2025</a:t>
             </a:fld>
             <a:endParaRPr lang="en-US"/>
           </a:p>
@@ -3185,7 +3270,7 @@
           <a:p>
             <a:fld id="{D241CDF3-A1FB-4215-9C3B-B36887AAFAD2}" type="datetimeFigureOut">
               <a:rPr lang="en-US" smtClean="0"/>
-              <a:t>9/16/2025</a:t>
+              <a:t>9/19/2025</a:t>
             </a:fld>
             <a:endParaRPr lang="en-US"/>
           </a:p>
@@ -3298,7 +3383,7 @@
           <a:p>
             <a:fld id="{D241CDF3-A1FB-4215-9C3B-B36887AAFAD2}" type="datetimeFigureOut">
               <a:rPr lang="en-US" smtClean="0"/>
-              <a:t>9/16/2025</a:t>
+              <a:t>9/19/2025</a:t>
             </a:fld>
             <a:endParaRPr lang="en-US"/>
           </a:p>
@@ -3609,7 +3694,7 @@
           <a:p>
             <a:fld id="{D241CDF3-A1FB-4215-9C3B-B36887AAFAD2}" type="datetimeFigureOut">
               <a:rPr lang="en-US" smtClean="0"/>
-              <a:t>9/16/2025</a:t>
+              <a:t>9/19/2025</a:t>
             </a:fld>
             <a:endParaRPr lang="en-US"/>
           </a:p>
@@ -3897,7 +3982,7 @@
           <a:p>
             <a:fld id="{D241CDF3-A1FB-4215-9C3B-B36887AAFAD2}" type="datetimeFigureOut">
               <a:rPr lang="en-US" smtClean="0"/>
-              <a:t>9/16/2025</a:t>
+              <a:t>9/19/2025</a:t>
             </a:fld>
             <a:endParaRPr lang="en-US"/>
           </a:p>
@@ -4138,7 +4223,7 @@
           <a:p>
             <a:fld id="{D241CDF3-A1FB-4215-9C3B-B36887AAFAD2}" type="datetimeFigureOut">
               <a:rPr lang="en-US" smtClean="0"/>
-              <a:t>9/16/2025</a:t>
+              <a:t>9/19/2025</a:t>
             </a:fld>
             <a:endParaRPr lang="en-US"/>
           </a:p>
@@ -4555,6 +4640,104 @@
           <a:chExt cx="0" cy="0"/>
         </a:xfrm>
       </p:grpSpPr>
+      <p:sp>
+        <p:nvSpPr>
+          <p:cNvPr id="2" name="Title 1">
+            <a:extLst>
+              <a:ext uri="{FF2B5EF4-FFF2-40B4-BE49-F238E27FC236}">
+                <a16:creationId xmlns:a16="http://schemas.microsoft.com/office/drawing/2014/main" id="{16BDF30B-6797-CA80-5FF9-1A95CBDF6F67}"/>
+              </a:ext>
+            </a:extLst>
+          </p:cNvPr>
+          <p:cNvSpPr>
+            <a:spLocks noGrp="1"/>
+          </p:cNvSpPr>
+          <p:nvPr>
+            <p:ph type="title"/>
+          </p:nvPr>
+        </p:nvSpPr>
+        <p:spPr/>
+        <p:txBody>
+          <a:bodyPr/>
+          <a:lstStyle/>
+          <a:p>
+            <a:r>
+              <a:rPr lang="en-US" dirty="0"/>
+              <a:t>Home Page Image</a:t>
+            </a:r>
+          </a:p>
+        </p:txBody>
+      </p:sp>
+      <p:sp>
+        <p:nvSpPr>
+          <p:cNvPr id="3" name="Content Placeholder 2">
+            <a:extLst>
+              <a:ext uri="{FF2B5EF4-FFF2-40B4-BE49-F238E27FC236}">
+                <a16:creationId xmlns:a16="http://schemas.microsoft.com/office/drawing/2014/main" id="{39B1F5AD-648D-9504-BDB3-13C31619395B}"/>
+              </a:ext>
+            </a:extLst>
+          </p:cNvPr>
+          <p:cNvSpPr>
+            <a:spLocks noGrp="1"/>
+          </p:cNvSpPr>
+          <p:nvPr>
+            <p:ph idx="1"/>
+          </p:nvPr>
+        </p:nvSpPr>
+        <p:spPr/>
+        <p:txBody>
+          <a:bodyPr/>
+          <a:lstStyle/>
+          <a:p>
+            <a:r>
+              <a:rPr lang="en-US" dirty="0"/>
+              <a:t>Unmarked:  /docs/studio/assets/user/home-page.png</a:t>
+            </a:r>
+          </a:p>
+          <a:p>
+            <a:r>
+              <a:rPr lang="en-US" dirty="0"/>
+              <a:t>1005 x 660 pixels</a:t>
+            </a:r>
+          </a:p>
+          <a:p>
+            <a:r>
+              <a:rPr lang="en-US" dirty="0"/>
+              <a:t>3 variants</a:t>
+            </a:r>
+          </a:p>
+        </p:txBody>
+      </p:sp>
+    </p:spTree>
+    <p:extLst>
+      <p:ext uri="{BB962C8B-B14F-4D97-AF65-F5344CB8AC3E}">
+        <p14:creationId xmlns:p14="http://schemas.microsoft.com/office/powerpoint/2010/main" val="732937030"/>
+      </p:ext>
+    </p:extLst>
+  </p:cSld>
+  <p:clrMapOvr>
+    <a:masterClrMapping/>
+  </p:clrMapOvr>
+</p:sld>
+</file>
+
+<file path=ppt/slides/slide2.xml><?xml version="1.0" encoding="utf-8"?>
+<p:sld xmlns:a="http://schemas.openxmlformats.org/drawingml/2006/main" xmlns:r="http://schemas.openxmlformats.org/officeDocument/2006/relationships" xmlns:p="http://schemas.openxmlformats.org/presentationml/2006/main">
+  <p:cSld>
+    <p:spTree>
+      <p:nvGrpSpPr>
+        <p:cNvPr id="1" name=""/>
+        <p:cNvGrpSpPr/>
+        <p:nvPr/>
+      </p:nvGrpSpPr>
+      <p:grpSpPr>
+        <a:xfrm>
+          <a:off x="0" y="0"/>
+          <a:ext cx="0" cy="0"/>
+          <a:chOff x="0" y="0"/>
+          <a:chExt cx="0" cy="0"/>
+        </a:xfrm>
+      </p:grpSpPr>
       <p:pic>
         <p:nvPicPr>
           <p:cNvPr id="5" name="Picture 4">
@@ -5221,7 +5404,7 @@
 </p:sld>
 </file>
 
-<file path=ppt/slides/slide2.xml><?xml version="1.0" encoding="utf-8"?>
+<file path=ppt/slides/slide3.xml><?xml version="1.0" encoding="utf-8"?>
 <p:sld xmlns:a="http://schemas.openxmlformats.org/drawingml/2006/main" xmlns:r="http://schemas.openxmlformats.org/officeDocument/2006/relationships" xmlns:p="http://schemas.openxmlformats.org/presentationml/2006/main">
   <p:cSld>
     <p:spTree>
@@ -5356,7 +5539,7 @@
 </p:sld>
 </file>
 
-<file path=ppt/slides/slide3.xml><?xml version="1.0" encoding="utf-8"?>
+<file path=ppt/slides/slide4.xml><?xml version="1.0" encoding="utf-8"?>
 <p:sld xmlns:a="http://schemas.openxmlformats.org/drawingml/2006/main" xmlns:r="http://schemas.openxmlformats.org/officeDocument/2006/relationships" xmlns:p="http://schemas.openxmlformats.org/presentationml/2006/main">
   <p:cSld>
     <p:spTree>
@@ -5674,15 +5857,15 @@
               </a:ext>
             </a:extLst>
           </a:blip>
-          <a:srcRect t="-72" b="94976"/>
+          <a:srcRect t="-72" b="95205"/>
           <a:stretch>
             <a:fillRect/>
           </a:stretch>
         </p:blipFill>
         <p:spPr>
           <a:xfrm>
-            <a:off x="1309019" y="290074"/>
-            <a:ext cx="9573961" cy="320400"/>
+            <a:off x="1296000" y="288000"/>
+            <a:ext cx="9573961" cy="306000"/>
           </a:xfrm>
           <a:prstGeom prst="rect">
             <a:avLst/>
@@ -6253,7 +6436,105 @@
 </p:sld>
 </file>
 
-<file path=ppt/slides/slide4.xml><?xml version="1.0" encoding="utf-8"?>
+<file path=ppt/slides/slide5.xml><?xml version="1.0" encoding="utf-8"?>
+<p:sld xmlns:a="http://schemas.openxmlformats.org/drawingml/2006/main" xmlns:r="http://schemas.openxmlformats.org/officeDocument/2006/relationships" xmlns:p="http://schemas.openxmlformats.org/presentationml/2006/main">
+  <p:cSld>
+    <p:spTree>
+      <p:nvGrpSpPr>
+        <p:cNvPr id="1" name="">
+          <a:extLst>
+            <a:ext uri="{FF2B5EF4-FFF2-40B4-BE49-F238E27FC236}">
+              <a16:creationId xmlns:a16="http://schemas.microsoft.com/office/drawing/2014/main" id="{FC7CDD00-8F0F-BBDD-E553-0474BAD7D07B}"/>
+            </a:ext>
+          </a:extLst>
+        </p:cNvPr>
+        <p:cNvGrpSpPr/>
+        <p:nvPr/>
+      </p:nvGrpSpPr>
+      <p:grpSpPr>
+        <a:xfrm>
+          <a:off x="0" y="0"/>
+          <a:ext cx="0" cy="0"/>
+          <a:chOff x="0" y="0"/>
+          <a:chExt cx="0" cy="0"/>
+        </a:xfrm>
+      </p:grpSpPr>
+      <p:sp>
+        <p:nvSpPr>
+          <p:cNvPr id="2" name="Title 1">
+            <a:extLst>
+              <a:ext uri="{FF2B5EF4-FFF2-40B4-BE49-F238E27FC236}">
+                <a16:creationId xmlns:a16="http://schemas.microsoft.com/office/drawing/2014/main" id="{6537E871-67D2-A5ED-31F4-52DFE89B1345}"/>
+              </a:ext>
+            </a:extLst>
+          </p:cNvPr>
+          <p:cNvSpPr>
+            <a:spLocks noGrp="1"/>
+          </p:cNvSpPr>
+          <p:nvPr>
+            <p:ph type="title"/>
+          </p:nvPr>
+        </p:nvSpPr>
+        <p:spPr/>
+        <p:txBody>
+          <a:bodyPr/>
+          <a:lstStyle/>
+          <a:p>
+            <a:r>
+              <a:rPr lang="en-US" dirty="0"/>
+              <a:t>Dataset Gallery Sidebar</a:t>
+            </a:r>
+          </a:p>
+        </p:txBody>
+      </p:sp>
+      <p:sp>
+        <p:nvSpPr>
+          <p:cNvPr id="3" name="Content Placeholder 2">
+            <a:extLst>
+              <a:ext uri="{FF2B5EF4-FFF2-40B4-BE49-F238E27FC236}">
+                <a16:creationId xmlns:a16="http://schemas.microsoft.com/office/drawing/2014/main" id="{4F554BEA-40F2-76F8-4398-7BA2A898FF52}"/>
+              </a:ext>
+            </a:extLst>
+          </p:cNvPr>
+          <p:cNvSpPr>
+            <a:spLocks noGrp="1"/>
+          </p:cNvSpPr>
+          <p:nvPr>
+            <p:ph idx="1"/>
+          </p:nvPr>
+        </p:nvSpPr>
+        <p:spPr/>
+        <p:txBody>
+          <a:bodyPr/>
+          <a:lstStyle/>
+          <a:p>
+            <a:r>
+              <a:rPr lang="en-US" dirty="0"/>
+              <a:t>Not unmarked</a:t>
+            </a:r>
+          </a:p>
+          <a:p>
+            <a:r>
+              <a:rPr lang="en-US" dirty="0"/>
+              <a:t>212 x 464</a:t>
+            </a:r>
+          </a:p>
+        </p:txBody>
+      </p:sp>
+    </p:spTree>
+    <p:extLst>
+      <p:ext uri="{BB962C8B-B14F-4D97-AF65-F5344CB8AC3E}">
+        <p14:creationId xmlns:p14="http://schemas.microsoft.com/office/powerpoint/2010/main" val="1799300729"/>
+      </p:ext>
+    </p:extLst>
+  </p:cSld>
+  <p:clrMapOvr>
+    <a:masterClrMapping/>
+  </p:clrMapOvr>
+</p:sld>
+</file>
+
+<file path=ppt/slides/slide6.xml><?xml version="1.0" encoding="utf-8"?>
 <p:sld xmlns:a="http://schemas.openxmlformats.org/drawingml/2006/main" xmlns:r="http://schemas.openxmlformats.org/officeDocument/2006/relationships" xmlns:p="http://schemas.openxmlformats.org/presentationml/2006/main">
   <p:cSld>
     <p:spTree>
@@ -6285,7 +6566,7 @@
           <p:nvPr/>
         </p:nvPicPr>
         <p:blipFill>
-          <a:blip r:embed="rId2"/>
+          <a:blip r:embed="rId3"/>
           <a:stretch>
             <a:fillRect/>
           </a:stretch>

--- a/images_with_layers.pptx
+++ b/images_with_layers.pptx
@@ -5,15 +5,25 @@
     <p:sldMasterId id="2147483648" r:id="rId1"/>
   </p:sldMasterIdLst>
   <p:notesMasterIdLst>
-    <p:notesMasterId r:id="rId8"/>
+    <p:notesMasterId r:id="rId18"/>
   </p:notesMasterIdLst>
   <p:sldIdLst>
-    <p:sldId id="261" r:id="rId2"/>
-    <p:sldId id="256" r:id="rId3"/>
-    <p:sldId id="257" r:id="rId4"/>
-    <p:sldId id="259" r:id="rId5"/>
-    <p:sldId id="262" r:id="rId6"/>
-    <p:sldId id="260" r:id="rId7"/>
+    <p:sldId id="264" r:id="rId2"/>
+    <p:sldId id="265" r:id="rId3"/>
+    <p:sldId id="267" r:id="rId4"/>
+    <p:sldId id="266" r:id="rId5"/>
+    <p:sldId id="261" r:id="rId6"/>
+    <p:sldId id="256" r:id="rId7"/>
+    <p:sldId id="257" r:id="rId8"/>
+    <p:sldId id="259" r:id="rId9"/>
+    <p:sldId id="268" r:id="rId10"/>
+    <p:sldId id="269" r:id="rId11"/>
+    <p:sldId id="270" r:id="rId12"/>
+    <p:sldId id="271" r:id="rId13"/>
+    <p:sldId id="272" r:id="rId14"/>
+    <p:sldId id="273" r:id="rId15"/>
+    <p:sldId id="262" r:id="rId16"/>
+    <p:sldId id="260" r:id="rId17"/>
   </p:sldIdLst>
   <p:sldSz cx="12192000" cy="6858000"/>
   <p:notesSz cx="6858000" cy="9144000"/>
@@ -115,12 +125,42 @@
   <p:extLst>
     <p:ext uri="{521415D9-36F7-43E2-AB2F-B90AF26B5E84}">
       <p14:sectionLst xmlns:p14="http://schemas.microsoft.com/office/powerpoint/2010/main">
+        <p14:section name="Verify Email" id="{A2088BEF-74F3-42A9-A2C1-EBED34B9363D}">
+          <p14:sldIdLst>
+            <p14:sldId id="264"/>
+            <p14:sldId id="265"/>
+          </p14:sldIdLst>
+        </p14:section>
+        <p14:section name="Login Page" id="{8AB4A417-FB6B-4774-A7CF-EF4461F143C1}">
+          <p14:sldIdLst>
+            <p14:sldId id="267"/>
+            <p14:sldId id="266"/>
+          </p14:sldIdLst>
+        </p14:section>
         <p14:section name="Home Page and Variants" id="{9EE3B63E-DA1C-47B6-82D6-E79847A08A80}">
           <p14:sldIdLst>
             <p14:sldId id="261"/>
             <p14:sldId id="256"/>
             <p14:sldId id="257"/>
             <p14:sldId id="259"/>
+          </p14:sldIdLst>
+        </p14:section>
+        <p14:section name="Projects" id="{03FB2B58-827B-48C9-AD77-448ACF3B58C4}">
+          <p14:sldIdLst>
+            <p14:sldId id="268"/>
+            <p14:sldId id="269"/>
+          </p14:sldIdLst>
+        </p14:section>
+        <p14:section name="Create Project" id="{80E44758-F3E7-4183-870E-68AD10FB3027}">
+          <p14:sldIdLst>
+            <p14:sldId id="270"/>
+            <p14:sldId id="271"/>
+          </p14:sldIdLst>
+        </p14:section>
+        <p14:section name="Created Project" id="{AE4F5735-EF9D-4838-BC43-12C85FD3DA56}">
+          <p14:sldIdLst>
+            <p14:sldId id="272"/>
+            <p14:sldId id="273"/>
           </p14:sldIdLst>
         </p14:section>
         <p14:section name="Dataset Gallery" id="{69866AF7-968C-4F26-9ECA-AA64F6FFB6E8}">
@@ -630,7 +670,7 @@
           <a:p>
             <a:fld id="{E487E608-D9C6-4B3C-A9A4-BEAD08ECA06D}" type="datetimeFigureOut">
               <a:rPr lang="en-US" smtClean="0"/>
-              <a:t>9/19/2025</a:t>
+              <a:t>11/17/2025</a:t>
             </a:fld>
             <a:endParaRPr lang="en-US"/>
           </a:p>
@@ -1005,7 +1045,7 @@
           <a:p>
             <a:fld id="{874397DF-5812-45E4-B5F0-BF2AEB9BFE48}" type="slidenum">
               <a:rPr lang="en-US" smtClean="0"/>
-              <a:t>2</a:t>
+              <a:t>6</a:t>
             </a:fld>
             <a:endParaRPr lang="en-US"/>
           </a:p>
@@ -1156,7 +1196,7 @@
           <a:p>
             <a:fld id="{874397DF-5812-45E4-B5F0-BF2AEB9BFE48}" type="slidenum">
               <a:rPr lang="en-US" smtClean="0"/>
-              <a:t>3</a:t>
+              <a:t>7</a:t>
             </a:fld>
             <a:endParaRPr lang="en-US"/>
           </a:p>
@@ -1256,7 +1296,7 @@
             </a:pPr>
             <a:r>
               <a:rPr lang="en-US" dirty="0"/>
-              <a:t>Marked:  /docs/studio/assets/user/home-page-breakdown.png</a:t>
+              <a:t>Marked:  /docs/studio/assets/navigation/navigation-bar.png</a:t>
             </a:r>
           </a:p>
           <a:p>
@@ -1307,7 +1347,7 @@
           <a:p>
             <a:fld id="{874397DF-5812-45E4-B5F0-BF2AEB9BFE48}" type="slidenum">
               <a:rPr lang="en-US" smtClean="0"/>
-              <a:t>4</a:t>
+              <a:t>8</a:t>
             </a:fld>
             <a:endParaRPr lang="en-US"/>
           </a:p>
@@ -1370,6 +1410,387 @@
           <a:bodyPr/>
           <a:lstStyle/>
           <a:p>
+            <a:pPr marL="0" marR="0" lvl="0" indent="0" algn="l" defTabSz="914400" rtl="0" eaLnBrk="1" fontAlgn="auto" latinLnBrk="0" hangingPunct="1">
+              <a:lnSpc>
+                <a:spcPct val="100000"/>
+              </a:lnSpc>
+              <a:spcBef>
+                <a:spcPts val="0"/>
+              </a:spcBef>
+              <a:spcAft>
+                <a:spcPts val="0"/>
+              </a:spcAft>
+              <a:buClrTx/>
+              <a:buSzTx/>
+              <a:buFontTx/>
+              <a:buNone/>
+              <a:tabLst/>
+              <a:defRPr/>
+            </a:pPr>
+            <a:r>
+              <a:rPr lang="en-US" dirty="0"/>
+              <a:t>Marked: /docs/</a:t>
+            </a:r>
+            <a:r>
+              <a:rPr lang="en-US" sz="1200" b="0" u="sng" kern="1200" dirty="0">
+                <a:solidFill>
+                  <a:schemeClr val="tx1"/>
+                </a:solidFill>
+                <a:effectLst/>
+                <a:latin typeface="+mn-lt"/>
+                <a:ea typeface="+mn-ea"/>
+                <a:cs typeface="+mn-cs"/>
+              </a:rPr>
+              <a:t>studio/assets/projects/create-project.jpg</a:t>
+            </a:r>
+            <a:endParaRPr lang="en-US" sz="1200" b="0" kern="1200" dirty="0">
+              <a:solidFill>
+                <a:schemeClr val="tx1"/>
+              </a:solidFill>
+              <a:effectLst/>
+              <a:latin typeface="+mn-lt"/>
+              <a:ea typeface="+mn-ea"/>
+              <a:cs typeface="+mn-cs"/>
+            </a:endParaRPr>
+          </a:p>
+          <a:p>
+            <a:endParaRPr lang="en-US" dirty="0"/>
+          </a:p>
+        </p:txBody>
+      </p:sp>
+      <p:sp>
+        <p:nvSpPr>
+          <p:cNvPr id="4" name="Slide Number Placeholder 3"/>
+          <p:cNvSpPr>
+            <a:spLocks noGrp="1"/>
+          </p:cNvSpPr>
+          <p:nvPr>
+            <p:ph type="sldNum" sz="quarter" idx="5"/>
+          </p:nvPr>
+        </p:nvSpPr>
+        <p:spPr/>
+        <p:txBody>
+          <a:bodyPr/>
+          <a:lstStyle/>
+          <a:p>
+            <a:fld id="{874397DF-5812-45E4-B5F0-BF2AEB9BFE48}" type="slidenum">
+              <a:rPr lang="en-US" smtClean="0"/>
+              <a:t>10</a:t>
+            </a:fld>
+            <a:endParaRPr lang="en-US"/>
+          </a:p>
+        </p:txBody>
+      </p:sp>
+    </p:spTree>
+    <p:extLst>
+      <p:ext uri="{BB962C8B-B14F-4D97-AF65-F5344CB8AC3E}">
+        <p14:creationId xmlns:p14="http://schemas.microsoft.com/office/powerpoint/2010/main" val="189310779"/>
+      </p:ext>
+    </p:extLst>
+  </p:cSld>
+  <p:clrMapOvr>
+    <a:masterClrMapping/>
+  </p:clrMapOvr>
+</p:notes>
+</file>
+
+<file path=ppt/notesSlides/notesSlide5.xml><?xml version="1.0" encoding="utf-8"?>
+<p:notes xmlns:a="http://schemas.openxmlformats.org/drawingml/2006/main" xmlns:r="http://schemas.openxmlformats.org/officeDocument/2006/relationships" xmlns:p="http://schemas.openxmlformats.org/presentationml/2006/main">
+  <p:cSld>
+    <p:spTree>
+      <p:nvGrpSpPr>
+        <p:cNvPr id="1" name=""/>
+        <p:cNvGrpSpPr/>
+        <p:nvPr/>
+      </p:nvGrpSpPr>
+      <p:grpSpPr>
+        <a:xfrm>
+          <a:off x="0" y="0"/>
+          <a:ext cx="0" cy="0"/>
+          <a:chOff x="0" y="0"/>
+          <a:chExt cx="0" cy="0"/>
+        </a:xfrm>
+      </p:grpSpPr>
+      <p:sp>
+        <p:nvSpPr>
+          <p:cNvPr id="2" name="Slide Image Placeholder 1"/>
+          <p:cNvSpPr>
+            <a:spLocks noGrp="1" noRot="1" noChangeAspect="1"/>
+          </p:cNvSpPr>
+          <p:nvPr>
+            <p:ph type="sldImg"/>
+          </p:nvPr>
+        </p:nvSpPr>
+        <p:spPr/>
+      </p:sp>
+      <p:sp>
+        <p:nvSpPr>
+          <p:cNvPr id="3" name="Notes Placeholder 2"/>
+          <p:cNvSpPr>
+            <a:spLocks noGrp="1"/>
+          </p:cNvSpPr>
+          <p:nvPr>
+            <p:ph type="body" idx="1"/>
+          </p:nvPr>
+        </p:nvSpPr>
+        <p:spPr/>
+        <p:txBody>
+          <a:bodyPr/>
+          <a:lstStyle/>
+          <a:p>
+            <a:pPr marL="0" marR="0" lvl="0" indent="0" algn="l" defTabSz="914400" rtl="0" eaLnBrk="1" fontAlgn="auto" latinLnBrk="0" hangingPunct="1">
+              <a:lnSpc>
+                <a:spcPct val="100000"/>
+              </a:lnSpc>
+              <a:spcBef>
+                <a:spcPts val="0"/>
+              </a:spcBef>
+              <a:spcAft>
+                <a:spcPts val="0"/>
+              </a:spcAft>
+              <a:buClrTx/>
+              <a:buSzTx/>
+              <a:buFontTx/>
+              <a:buNone/>
+              <a:tabLst/>
+              <a:defRPr/>
+            </a:pPr>
+            <a:r>
+              <a:rPr lang="en-US" dirty="0"/>
+              <a:t>Marked: docs/</a:t>
+            </a:r>
+            <a:r>
+              <a:rPr lang="en-US" sz="1200" b="0" u="sng" kern="1200" dirty="0">
+                <a:solidFill>
+                  <a:schemeClr val="tx1"/>
+                </a:solidFill>
+                <a:effectLst/>
+                <a:latin typeface="+mn-lt"/>
+                <a:ea typeface="+mn-ea"/>
+                <a:cs typeface="+mn-cs"/>
+              </a:rPr>
+              <a:t>studio/assets/projects/create-project-fields.jpg</a:t>
+            </a:r>
+            <a:endParaRPr lang="en-US" sz="1200" b="0" kern="1200" dirty="0">
+              <a:solidFill>
+                <a:schemeClr val="tx1"/>
+              </a:solidFill>
+              <a:effectLst/>
+              <a:latin typeface="+mn-lt"/>
+              <a:ea typeface="+mn-ea"/>
+              <a:cs typeface="+mn-cs"/>
+            </a:endParaRPr>
+          </a:p>
+          <a:p>
+            <a:endParaRPr lang="en-US" dirty="0"/>
+          </a:p>
+        </p:txBody>
+      </p:sp>
+      <p:sp>
+        <p:nvSpPr>
+          <p:cNvPr id="4" name="Slide Number Placeholder 3"/>
+          <p:cNvSpPr>
+            <a:spLocks noGrp="1"/>
+          </p:cNvSpPr>
+          <p:nvPr>
+            <p:ph type="sldNum" sz="quarter" idx="5"/>
+          </p:nvPr>
+        </p:nvSpPr>
+        <p:spPr/>
+        <p:txBody>
+          <a:bodyPr/>
+          <a:lstStyle/>
+          <a:p>
+            <a:fld id="{874397DF-5812-45E4-B5F0-BF2AEB9BFE48}" type="slidenum">
+              <a:rPr lang="en-US" smtClean="0"/>
+              <a:t>12</a:t>
+            </a:fld>
+            <a:endParaRPr lang="en-US"/>
+          </a:p>
+        </p:txBody>
+      </p:sp>
+    </p:spTree>
+    <p:extLst>
+      <p:ext uri="{BB962C8B-B14F-4D97-AF65-F5344CB8AC3E}">
+        <p14:creationId xmlns:p14="http://schemas.microsoft.com/office/powerpoint/2010/main" val="2999767519"/>
+      </p:ext>
+    </p:extLst>
+  </p:cSld>
+  <p:clrMapOvr>
+    <a:masterClrMapping/>
+  </p:clrMapOvr>
+</p:notes>
+</file>
+
+<file path=ppt/notesSlides/notesSlide6.xml><?xml version="1.0" encoding="utf-8"?>
+<p:notes xmlns:a="http://schemas.openxmlformats.org/drawingml/2006/main" xmlns:r="http://schemas.openxmlformats.org/officeDocument/2006/relationships" xmlns:p="http://schemas.openxmlformats.org/presentationml/2006/main">
+  <p:cSld>
+    <p:spTree>
+      <p:nvGrpSpPr>
+        <p:cNvPr id="1" name=""/>
+        <p:cNvGrpSpPr/>
+        <p:nvPr/>
+      </p:nvGrpSpPr>
+      <p:grpSpPr>
+        <a:xfrm>
+          <a:off x="0" y="0"/>
+          <a:ext cx="0" cy="0"/>
+          <a:chOff x="0" y="0"/>
+          <a:chExt cx="0" cy="0"/>
+        </a:xfrm>
+      </p:grpSpPr>
+      <p:sp>
+        <p:nvSpPr>
+          <p:cNvPr id="2" name="Slide Image Placeholder 1"/>
+          <p:cNvSpPr>
+            <a:spLocks noGrp="1" noRot="1" noChangeAspect="1"/>
+          </p:cNvSpPr>
+          <p:nvPr>
+            <p:ph type="sldImg"/>
+          </p:nvPr>
+        </p:nvSpPr>
+        <p:spPr/>
+      </p:sp>
+      <p:sp>
+        <p:nvSpPr>
+          <p:cNvPr id="3" name="Notes Placeholder 2"/>
+          <p:cNvSpPr>
+            <a:spLocks noGrp="1"/>
+          </p:cNvSpPr>
+          <p:nvPr>
+            <p:ph type="body" idx="1"/>
+          </p:nvPr>
+        </p:nvSpPr>
+        <p:spPr/>
+        <p:txBody>
+          <a:bodyPr/>
+          <a:lstStyle/>
+          <a:p>
+            <a:pPr marL="0" marR="0" lvl="0" indent="0" algn="l" defTabSz="914400" rtl="0" eaLnBrk="1" fontAlgn="auto" latinLnBrk="0" hangingPunct="1">
+              <a:lnSpc>
+                <a:spcPct val="100000"/>
+              </a:lnSpc>
+              <a:spcBef>
+                <a:spcPts val="0"/>
+              </a:spcBef>
+              <a:spcAft>
+                <a:spcPts val="0"/>
+              </a:spcAft>
+              <a:buClrTx/>
+              <a:buSzTx/>
+              <a:buFontTx/>
+              <a:buNone/>
+              <a:tabLst/>
+              <a:defRPr/>
+            </a:pPr>
+            <a:r>
+              <a:rPr lang="en-US" dirty="0"/>
+              <a:t>Marked: </a:t>
+            </a:r>
+            <a:r>
+              <a:rPr lang="en-US" sz="1200" b="0" u="sng" kern="1200" dirty="0">
+                <a:solidFill>
+                  <a:schemeClr val="tx1"/>
+                </a:solidFill>
+                <a:effectLst/>
+                <a:latin typeface="+mn-lt"/>
+                <a:ea typeface="+mn-ea"/>
+                <a:cs typeface="+mn-cs"/>
+              </a:rPr>
+              <a:t>/studio/assets/projects/new-project.jpg</a:t>
+            </a:r>
+            <a:endParaRPr lang="en-US" sz="1200" b="0" kern="1200" dirty="0">
+              <a:solidFill>
+                <a:schemeClr val="tx1"/>
+              </a:solidFill>
+              <a:effectLst/>
+              <a:latin typeface="+mn-lt"/>
+              <a:ea typeface="+mn-ea"/>
+              <a:cs typeface="+mn-cs"/>
+            </a:endParaRPr>
+          </a:p>
+        </p:txBody>
+      </p:sp>
+      <p:sp>
+        <p:nvSpPr>
+          <p:cNvPr id="4" name="Slide Number Placeholder 3"/>
+          <p:cNvSpPr>
+            <a:spLocks noGrp="1"/>
+          </p:cNvSpPr>
+          <p:nvPr>
+            <p:ph type="sldNum" sz="quarter" idx="5"/>
+          </p:nvPr>
+        </p:nvSpPr>
+        <p:spPr/>
+        <p:txBody>
+          <a:bodyPr/>
+          <a:lstStyle/>
+          <a:p>
+            <a:fld id="{874397DF-5812-45E4-B5F0-BF2AEB9BFE48}" type="slidenum">
+              <a:rPr lang="en-US" smtClean="0"/>
+              <a:t>14</a:t>
+            </a:fld>
+            <a:endParaRPr lang="en-US"/>
+          </a:p>
+        </p:txBody>
+      </p:sp>
+    </p:spTree>
+    <p:extLst>
+      <p:ext uri="{BB962C8B-B14F-4D97-AF65-F5344CB8AC3E}">
+        <p14:creationId xmlns:p14="http://schemas.microsoft.com/office/powerpoint/2010/main" val="2070805352"/>
+      </p:ext>
+    </p:extLst>
+  </p:cSld>
+  <p:clrMapOvr>
+    <a:masterClrMapping/>
+  </p:clrMapOvr>
+</p:notes>
+</file>
+
+<file path=ppt/notesSlides/notesSlide7.xml><?xml version="1.0" encoding="utf-8"?>
+<p:notes xmlns:a="http://schemas.openxmlformats.org/drawingml/2006/main" xmlns:r="http://schemas.openxmlformats.org/officeDocument/2006/relationships" xmlns:p="http://schemas.openxmlformats.org/presentationml/2006/main">
+  <p:cSld>
+    <p:spTree>
+      <p:nvGrpSpPr>
+        <p:cNvPr id="1" name=""/>
+        <p:cNvGrpSpPr/>
+        <p:nvPr/>
+      </p:nvGrpSpPr>
+      <p:grpSpPr>
+        <a:xfrm>
+          <a:off x="0" y="0"/>
+          <a:ext cx="0" cy="0"/>
+          <a:chOff x="0" y="0"/>
+          <a:chExt cx="0" cy="0"/>
+        </a:xfrm>
+      </p:grpSpPr>
+      <p:sp>
+        <p:nvSpPr>
+          <p:cNvPr id="2" name="Slide Image Placeholder 1"/>
+          <p:cNvSpPr>
+            <a:spLocks noGrp="1" noRot="1" noChangeAspect="1"/>
+          </p:cNvSpPr>
+          <p:nvPr>
+            <p:ph type="sldImg"/>
+          </p:nvPr>
+        </p:nvSpPr>
+        <p:spPr/>
+      </p:sp>
+      <p:sp>
+        <p:nvSpPr>
+          <p:cNvPr id="3" name="Notes Placeholder 2"/>
+          <p:cNvSpPr>
+            <a:spLocks noGrp="1"/>
+          </p:cNvSpPr>
+          <p:nvPr>
+            <p:ph type="body" idx="1"/>
+          </p:nvPr>
+        </p:nvSpPr>
+        <p:spPr/>
+        <p:txBody>
+          <a:bodyPr/>
+          <a:lstStyle/>
+          <a:p>
             <a:r>
               <a:rPr lang="en-US" dirty="0"/>
               <a:t>Marked:  </a:t>
@@ -1407,7 +1828,7 @@
           <a:p>
             <a:fld id="{874397DF-5812-45E4-B5F0-BF2AEB9BFE48}" type="slidenum">
               <a:rPr lang="en-US" smtClean="0"/>
-              <a:t>6</a:t>
+              <a:t>16</a:t>
             </a:fld>
             <a:endParaRPr lang="en-US"/>
           </a:p>
@@ -1573,7 +1994,7 @@
           <a:p>
             <a:fld id="{D241CDF3-A1FB-4215-9C3B-B36887AAFAD2}" type="datetimeFigureOut">
               <a:rPr lang="en-US" smtClean="0"/>
-              <a:t>9/19/2025</a:t>
+              <a:t>11/17/2025</a:t>
             </a:fld>
             <a:endParaRPr lang="en-US"/>
           </a:p>
@@ -1771,7 +2192,7 @@
           <a:p>
             <a:fld id="{D241CDF3-A1FB-4215-9C3B-B36887AAFAD2}" type="datetimeFigureOut">
               <a:rPr lang="en-US" smtClean="0"/>
-              <a:t>9/19/2025</a:t>
+              <a:t>11/17/2025</a:t>
             </a:fld>
             <a:endParaRPr lang="en-US"/>
           </a:p>
@@ -1979,7 +2400,7 @@
           <a:p>
             <a:fld id="{D241CDF3-A1FB-4215-9C3B-B36887AAFAD2}" type="datetimeFigureOut">
               <a:rPr lang="en-US" smtClean="0"/>
-              <a:t>9/19/2025</a:t>
+              <a:t>11/17/2025</a:t>
             </a:fld>
             <a:endParaRPr lang="en-US"/>
           </a:p>
@@ -2177,7 +2598,7 @@
           <a:p>
             <a:fld id="{D241CDF3-A1FB-4215-9C3B-B36887AAFAD2}" type="datetimeFigureOut">
               <a:rPr lang="en-US" smtClean="0"/>
-              <a:t>9/19/2025</a:t>
+              <a:t>11/17/2025</a:t>
             </a:fld>
             <a:endParaRPr lang="en-US"/>
           </a:p>
@@ -2452,7 +2873,7 @@
           <a:p>
             <a:fld id="{D241CDF3-A1FB-4215-9C3B-B36887AAFAD2}" type="datetimeFigureOut">
               <a:rPr lang="en-US" smtClean="0"/>
-              <a:t>9/19/2025</a:t>
+              <a:t>11/17/2025</a:t>
             </a:fld>
             <a:endParaRPr lang="en-US"/>
           </a:p>
@@ -2717,7 +3138,7 @@
           <a:p>
             <a:fld id="{D241CDF3-A1FB-4215-9C3B-B36887AAFAD2}" type="datetimeFigureOut">
               <a:rPr lang="en-US" smtClean="0"/>
-              <a:t>9/19/2025</a:t>
+              <a:t>11/17/2025</a:t>
             </a:fld>
             <a:endParaRPr lang="en-US"/>
           </a:p>
@@ -3129,7 +3550,7 @@
           <a:p>
             <a:fld id="{D241CDF3-A1FB-4215-9C3B-B36887AAFAD2}" type="datetimeFigureOut">
               <a:rPr lang="en-US" smtClean="0"/>
-              <a:t>9/19/2025</a:t>
+              <a:t>11/17/2025</a:t>
             </a:fld>
             <a:endParaRPr lang="en-US"/>
           </a:p>
@@ -3270,7 +3691,7 @@
           <a:p>
             <a:fld id="{D241CDF3-A1FB-4215-9C3B-B36887AAFAD2}" type="datetimeFigureOut">
               <a:rPr lang="en-US" smtClean="0"/>
-              <a:t>9/19/2025</a:t>
+              <a:t>11/17/2025</a:t>
             </a:fld>
             <a:endParaRPr lang="en-US"/>
           </a:p>
@@ -3383,7 +3804,7 @@
           <a:p>
             <a:fld id="{D241CDF3-A1FB-4215-9C3B-B36887AAFAD2}" type="datetimeFigureOut">
               <a:rPr lang="en-US" smtClean="0"/>
-              <a:t>9/19/2025</a:t>
+              <a:t>11/17/2025</a:t>
             </a:fld>
             <a:endParaRPr lang="en-US"/>
           </a:p>
@@ -3694,7 +4115,7 @@
           <a:p>
             <a:fld id="{D241CDF3-A1FB-4215-9C3B-B36887AAFAD2}" type="datetimeFigureOut">
               <a:rPr lang="en-US" smtClean="0"/>
-              <a:t>9/19/2025</a:t>
+              <a:t>11/17/2025</a:t>
             </a:fld>
             <a:endParaRPr lang="en-US"/>
           </a:p>
@@ -3982,7 +4403,7 @@
           <a:p>
             <a:fld id="{D241CDF3-A1FB-4215-9C3B-B36887AAFAD2}" type="datetimeFigureOut">
               <a:rPr lang="en-US" smtClean="0"/>
-              <a:t>9/19/2025</a:t>
+              <a:t>11/17/2025</a:t>
             </a:fld>
             <a:endParaRPr lang="en-US"/>
           </a:p>
@@ -4223,7 +4644,7 @@
           <a:p>
             <a:fld id="{D241CDF3-A1FB-4215-9C3B-B36887AAFAD2}" type="datetimeFigureOut">
               <a:rPr lang="en-US" smtClean="0"/>
-              <a:t>9/19/2025</a:t>
+              <a:t>11/17/2025</a:t>
             </a:fld>
             <a:endParaRPr lang="en-US"/>
           </a:p>
@@ -4628,7 +5049,13 @@
   <p:cSld>
     <p:spTree>
       <p:nvGrpSpPr>
-        <p:cNvPr id="1" name=""/>
+        <p:cNvPr id="1" name="">
+          <a:extLst>
+            <a:ext uri="{FF2B5EF4-FFF2-40B4-BE49-F238E27FC236}">
+              <a16:creationId xmlns:a16="http://schemas.microsoft.com/office/drawing/2014/main" id="{61FFE42E-9FCD-1DB6-26E9-F9852BF11AAC}"/>
+            </a:ext>
+          </a:extLst>
+        </p:cNvPr>
         <p:cNvGrpSpPr/>
         <p:nvPr/>
       </p:nvGrpSpPr>
@@ -4645,7 +5072,7 @@
           <p:cNvPr id="2" name="Title 1">
             <a:extLst>
               <a:ext uri="{FF2B5EF4-FFF2-40B4-BE49-F238E27FC236}">
-                <a16:creationId xmlns:a16="http://schemas.microsoft.com/office/drawing/2014/main" id="{16BDF30B-6797-CA80-5FF9-1A95CBDF6F67}"/>
+                <a16:creationId xmlns:a16="http://schemas.microsoft.com/office/drawing/2014/main" id="{E0018983-D601-F4CC-2FBB-0AA015B139DF}"/>
               </a:ext>
             </a:extLst>
           </p:cNvPr>
@@ -4663,7 +5090,7 @@
           <a:p>
             <a:r>
               <a:rPr lang="en-US" dirty="0"/>
-              <a:t>Home Page Image</a:t>
+              <a:t>Verify Email Image</a:t>
             </a:r>
           </a:p>
         </p:txBody>
@@ -4673,7 +5100,7 @@
           <p:cNvPr id="3" name="Content Placeholder 2">
             <a:extLst>
               <a:ext uri="{FF2B5EF4-FFF2-40B4-BE49-F238E27FC236}">
-                <a16:creationId xmlns:a16="http://schemas.microsoft.com/office/drawing/2014/main" id="{39B1F5AD-648D-9504-BDB3-13C31619395B}"/>
+                <a16:creationId xmlns:a16="http://schemas.microsoft.com/office/drawing/2014/main" id="{C568C9B6-A336-B729-9E16-A08833395A54}"/>
               </a:ext>
             </a:extLst>
           </p:cNvPr>
@@ -4691,19 +5118,7 @@
           <a:p>
             <a:r>
               <a:rPr lang="en-US" dirty="0"/>
-              <a:t>Unmarked:  /docs/studio/assets/user/home-page.png</a:t>
-            </a:r>
-          </a:p>
-          <a:p>
-            <a:r>
-              <a:rPr lang="en-US" dirty="0"/>
-              <a:t>1005 x 660 pixels</a:t>
-            </a:r>
-          </a:p>
-          <a:p>
-            <a:r>
-              <a:rPr lang="en-US" dirty="0"/>
-              <a:t>3 variants</a:t>
+              <a:t>Unmarked:  /docs/studio/assets/user/email-verification.jpg</a:t>
             </a:r>
           </a:p>
         </p:txBody>
@@ -4711,7 +5126,7 @@
     </p:spTree>
     <p:extLst>
       <p:ext uri="{BB962C8B-B14F-4D97-AF65-F5344CB8AC3E}">
-        <p14:creationId xmlns:p14="http://schemas.microsoft.com/office/powerpoint/2010/main" val="732937030"/>
+        <p14:creationId xmlns:p14="http://schemas.microsoft.com/office/powerpoint/2010/main" val="903728305"/>
       </p:ext>
     </p:extLst>
   </p:cSld>
@@ -4721,7 +5136,7 @@
 </p:sld>
 </file>
 
-<file path=ppt/slides/slide2.xml><?xml version="1.0" encoding="utf-8"?>
+<file path=ppt/slides/slide10.xml><?xml version="1.0" encoding="utf-8"?>
 <p:sld xmlns:a="http://schemas.openxmlformats.org/drawingml/2006/main" xmlns:r="http://schemas.openxmlformats.org/officeDocument/2006/relationships" xmlns:p="http://schemas.openxmlformats.org/presentationml/2006/main">
   <p:cSld>
     <p:spTree>
@@ -4743,30 +5158,25 @@
           <p:cNvPr id="5" name="Picture 4">
             <a:extLst>
               <a:ext uri="{FF2B5EF4-FFF2-40B4-BE49-F238E27FC236}">
-                <a16:creationId xmlns:a16="http://schemas.microsoft.com/office/drawing/2014/main" id="{743A2118-C1EA-9738-2846-3C4377B4E3E9}"/>
+                <a16:creationId xmlns:a16="http://schemas.microsoft.com/office/drawing/2014/main" id="{31BF084C-3F4E-251E-F938-C3DBA1C99C79}"/>
               </a:ext>
             </a:extLst>
           </p:cNvPr>
           <p:cNvPicPr>
-            <a:picLocks noGrp="1" noRot="1" noChangeAspect="1" noMove="1" noResize="1" noEditPoints="1" noAdjustHandles="1" noChangeArrowheads="1" noChangeShapeType="1" noCrop="1"/>
+            <a:picLocks noChangeAspect="1"/>
           </p:cNvPicPr>
           <p:nvPr/>
         </p:nvPicPr>
         <p:blipFill>
-          <a:blip r:embed="rId3">
-            <a:extLst>
-              <a:ext uri="{28A0092B-C50C-407E-A947-70E740481C1C}">
-                <a14:useLocalDpi xmlns:a14="http://schemas.microsoft.com/office/drawing/2010/main" val="0"/>
-              </a:ext>
-            </a:extLst>
-          </a:blip>
-          <a:srcRect/>
-          <a:stretch/>
+          <a:blip r:embed="rId3"/>
+          <a:stretch>
+            <a:fillRect/>
+          </a:stretch>
         </p:blipFill>
         <p:spPr>
           <a:xfrm>
-            <a:off x="1316272" y="290074"/>
-            <a:ext cx="9559454" cy="6277851"/>
+            <a:off x="1112031" y="0"/>
+            <a:ext cx="9967938" cy="6858000"/>
           </a:xfrm>
           <a:prstGeom prst="rect">
             <a:avLst/>
@@ -4775,10 +5185,10 @@
       </p:pic>
       <p:sp>
         <p:nvSpPr>
-          <p:cNvPr id="7" name="Rectangle 6">
-            <a:extLst>
-              <a:ext uri="{FF2B5EF4-FFF2-40B4-BE49-F238E27FC236}">
-                <a16:creationId xmlns:a16="http://schemas.microsoft.com/office/drawing/2014/main" id="{7A08FA56-6667-2FEB-DFC0-5795598FD922}"/>
+          <p:cNvPr id="6" name="Rectangle 5">
+            <a:extLst>
+              <a:ext uri="{FF2B5EF4-FFF2-40B4-BE49-F238E27FC236}">
+                <a16:creationId xmlns:a16="http://schemas.microsoft.com/office/drawing/2014/main" id="{70A41AB3-5778-A4F5-A95D-354A8B37494D}"/>
               </a:ext>
             </a:extLst>
           </p:cNvPr>
@@ -4787,8 +5197,8 @@
         </p:nvSpPr>
         <p:spPr>
           <a:xfrm>
-            <a:off x="1256565" y="226337"/>
-            <a:ext cx="9687660" cy="434565"/>
+            <a:off x="10133814" y="659876"/>
+            <a:ext cx="838986" cy="311086"/>
           </a:xfrm>
           <a:prstGeom prst="rect">
             <a:avLst/>
@@ -4837,51 +5247,158 @@
           </a:p>
         </p:txBody>
       </p:sp>
-      <p:sp>
-        <p:nvSpPr>
-          <p:cNvPr id="8" name="TextBox 7">
-            <a:extLst>
-              <a:ext uri="{FF2B5EF4-FFF2-40B4-BE49-F238E27FC236}">
-                <a16:creationId xmlns:a16="http://schemas.microsoft.com/office/drawing/2014/main" id="{9B1E6C77-DB95-5CB9-F5BE-10B04E4B3331}"/>
-              </a:ext>
-            </a:extLst>
-          </p:cNvPr>
-          <p:cNvSpPr txBox="1"/>
+    </p:spTree>
+    <p:extLst>
+      <p:ext uri="{BB962C8B-B14F-4D97-AF65-F5344CB8AC3E}">
+        <p14:creationId xmlns:p14="http://schemas.microsoft.com/office/powerpoint/2010/main" val="479816760"/>
+      </p:ext>
+    </p:extLst>
+  </p:cSld>
+  <p:clrMapOvr>
+    <a:masterClrMapping/>
+  </p:clrMapOvr>
+</p:sld>
+</file>
+
+<file path=ppt/slides/slide11.xml><?xml version="1.0" encoding="utf-8"?>
+<p:sld xmlns:a="http://schemas.openxmlformats.org/drawingml/2006/main" xmlns:r="http://schemas.openxmlformats.org/officeDocument/2006/relationships" xmlns:p="http://schemas.openxmlformats.org/presentationml/2006/main">
+  <p:cSld>
+    <p:spTree>
+      <p:nvGrpSpPr>
+        <p:cNvPr id="1" name=""/>
+        <p:cNvGrpSpPr/>
+        <p:nvPr/>
+      </p:nvGrpSpPr>
+      <p:grpSpPr>
+        <a:xfrm>
+          <a:off x="0" y="0"/>
+          <a:ext cx="0" cy="0"/>
+          <a:chOff x="0" y="0"/>
+          <a:chExt cx="0" cy="0"/>
+        </a:xfrm>
+      </p:grpSpPr>
+      <p:sp>
+        <p:nvSpPr>
+          <p:cNvPr id="2" name="Title 1">
+            <a:extLst>
+              <a:ext uri="{FF2B5EF4-FFF2-40B4-BE49-F238E27FC236}">
+                <a16:creationId xmlns:a16="http://schemas.microsoft.com/office/drawing/2014/main" id="{2754BFBF-7F07-EA8D-B8A1-272C146728C0}"/>
+              </a:ext>
+            </a:extLst>
+          </p:cNvPr>
+          <p:cNvSpPr>
+            <a:spLocks noGrp="1"/>
+          </p:cNvSpPr>
+          <p:nvPr>
+            <p:ph type="title"/>
+          </p:nvPr>
+        </p:nvSpPr>
+        <p:spPr/>
+        <p:txBody>
+          <a:bodyPr/>
+          <a:lstStyle/>
+          <a:p>
+            <a:r>
+              <a:rPr lang="en-US" dirty="0"/>
+              <a:t>Create Project Image</a:t>
+            </a:r>
+          </a:p>
+        </p:txBody>
+      </p:sp>
+      <p:sp>
+        <p:nvSpPr>
+          <p:cNvPr id="3" name="Content Placeholder 2">
+            <a:extLst>
+              <a:ext uri="{FF2B5EF4-FFF2-40B4-BE49-F238E27FC236}">
+                <a16:creationId xmlns:a16="http://schemas.microsoft.com/office/drawing/2014/main" id="{E5D400A7-1429-C6E5-FEE9-E437D8A14CAB}"/>
+              </a:ext>
+            </a:extLst>
+          </p:cNvPr>
+          <p:cNvSpPr>
+            <a:spLocks noGrp="1"/>
+          </p:cNvSpPr>
+          <p:nvPr>
+            <p:ph idx="1"/>
+          </p:nvPr>
+        </p:nvSpPr>
+        <p:spPr/>
+        <p:txBody>
+          <a:bodyPr/>
+          <a:lstStyle/>
+          <a:p>
+            <a:r>
+              <a:rPr lang="en-US" dirty="0"/>
+              <a:t>Unmarked: None</a:t>
+            </a:r>
+          </a:p>
+        </p:txBody>
+      </p:sp>
+    </p:spTree>
+    <p:extLst>
+      <p:ext uri="{BB962C8B-B14F-4D97-AF65-F5344CB8AC3E}">
+        <p14:creationId xmlns:p14="http://schemas.microsoft.com/office/powerpoint/2010/main" val="177138575"/>
+      </p:ext>
+    </p:extLst>
+  </p:cSld>
+  <p:clrMapOvr>
+    <a:masterClrMapping/>
+  </p:clrMapOvr>
+</p:sld>
+</file>
+
+<file path=ppt/slides/slide12.xml><?xml version="1.0" encoding="utf-8"?>
+<p:sld xmlns:a="http://schemas.openxmlformats.org/drawingml/2006/main" xmlns:r="http://schemas.openxmlformats.org/officeDocument/2006/relationships" xmlns:p="http://schemas.openxmlformats.org/presentationml/2006/main">
+  <p:cSld>
+    <p:spTree>
+      <p:nvGrpSpPr>
+        <p:cNvPr id="1" name=""/>
+        <p:cNvGrpSpPr/>
+        <p:nvPr/>
+      </p:nvGrpSpPr>
+      <p:grpSpPr>
+        <a:xfrm>
+          <a:off x="0" y="0"/>
+          <a:ext cx="0" cy="0"/>
+          <a:chOff x="0" y="0"/>
+          <a:chExt cx="0" cy="0"/>
+        </a:xfrm>
+      </p:grpSpPr>
+      <p:pic>
+        <p:nvPicPr>
+          <p:cNvPr id="5" name="Picture 4">
+            <a:extLst>
+              <a:ext uri="{FF2B5EF4-FFF2-40B4-BE49-F238E27FC236}">
+                <a16:creationId xmlns:a16="http://schemas.microsoft.com/office/drawing/2014/main" id="{0F69F3A9-D836-C1CA-0FD5-84FD6E9FFBB0}"/>
+              </a:ext>
+            </a:extLst>
+          </p:cNvPr>
+          <p:cNvPicPr>
+            <a:picLocks noChangeAspect="1"/>
+          </p:cNvPicPr>
           <p:nvPr/>
-        </p:nvSpPr>
+        </p:nvPicPr>
+        <p:blipFill>
+          <a:blip r:embed="rId3"/>
+          <a:stretch>
+            <a:fillRect/>
+          </a:stretch>
+        </p:blipFill>
         <p:spPr>
           <a:xfrm>
-            <a:off x="948467" y="201252"/>
-            <a:ext cx="308098" cy="369332"/>
+            <a:off x="0" y="318247"/>
+            <a:ext cx="12192000" cy="6221506"/>
           </a:xfrm>
           <a:prstGeom prst="rect">
             <a:avLst/>
           </a:prstGeom>
-          <a:noFill/>
         </p:spPr>
-        <p:txBody>
-          <a:bodyPr wrap="none" rtlCol="0">
-            <a:spAutoFit/>
-          </a:bodyPr>
-          <a:lstStyle/>
-          <a:p>
-            <a:r>
-              <a:rPr lang="en-US" dirty="0">
-                <a:solidFill>
-                  <a:srgbClr val="FF0000"/>
-                </a:solidFill>
-              </a:rPr>
-              <a:t>1</a:t>
-            </a:r>
-          </a:p>
-        </p:txBody>
-      </p:sp>
-      <p:sp>
-        <p:nvSpPr>
-          <p:cNvPr id="9" name="Rectangle 8">
-            <a:extLst>
-              <a:ext uri="{FF2B5EF4-FFF2-40B4-BE49-F238E27FC236}">
-                <a16:creationId xmlns:a16="http://schemas.microsoft.com/office/drawing/2014/main" id="{6D48391C-EA04-C850-11E2-9DD29AEEAAE8}"/>
+      </p:pic>
+      <p:sp>
+        <p:nvSpPr>
+          <p:cNvPr id="6" name="Rectangle 5">
+            <a:extLst>
+              <a:ext uri="{FF2B5EF4-FFF2-40B4-BE49-F238E27FC236}">
+                <a16:creationId xmlns:a16="http://schemas.microsoft.com/office/drawing/2014/main" id="{BFCE4A81-3065-CA3C-42C9-D2ED31675E1A}"/>
               </a:ext>
             </a:extLst>
           </p:cNvPr>
@@ -4890,8 +5407,8 @@
         </p:nvSpPr>
         <p:spPr>
           <a:xfrm>
-            <a:off x="4267955" y="151078"/>
-            <a:ext cx="1494670" cy="534909"/>
+            <a:off x="8066889" y="4307951"/>
+            <a:ext cx="810411" cy="425974"/>
           </a:xfrm>
           <a:prstGeom prst="rect">
             <a:avLst/>
@@ -4942,49 +5459,249 @@
       </p:sp>
       <p:sp>
         <p:nvSpPr>
-          <p:cNvPr id="10" name="TextBox 9">
-            <a:extLst>
-              <a:ext uri="{FF2B5EF4-FFF2-40B4-BE49-F238E27FC236}">
-                <a16:creationId xmlns:a16="http://schemas.microsoft.com/office/drawing/2014/main" id="{79E39D9C-5B4D-15B1-CE5E-940082C00152}"/>
-              </a:ext>
-            </a:extLst>
-          </p:cNvPr>
-          <p:cNvSpPr txBox="1"/>
+          <p:cNvPr id="7" name="Arrow: Down 6">
+            <a:extLst>
+              <a:ext uri="{FF2B5EF4-FFF2-40B4-BE49-F238E27FC236}">
+                <a16:creationId xmlns:a16="http://schemas.microsoft.com/office/drawing/2014/main" id="{E1162D16-E76C-4FDB-0B5E-94168A5B0037}"/>
+              </a:ext>
+            </a:extLst>
+          </p:cNvPr>
+          <p:cNvSpPr/>
+          <p:nvPr/>
+        </p:nvSpPr>
+        <p:spPr>
+          <a:xfrm rot="2945459">
+            <a:off x="9799538" y="1182396"/>
+            <a:ext cx="742950" cy="2270857"/>
+          </a:xfrm>
+          <a:prstGeom prst="downArrow">
+            <a:avLst/>
+          </a:prstGeom>
+        </p:spPr>
+        <p:style>
+          <a:lnRef idx="2">
+            <a:schemeClr val="accent6">
+              <a:shade val="15000"/>
+            </a:schemeClr>
+          </a:lnRef>
+          <a:fillRef idx="1">
+            <a:schemeClr val="accent6"/>
+          </a:fillRef>
+          <a:effectRef idx="0">
+            <a:schemeClr val="accent6"/>
+          </a:effectRef>
+          <a:fontRef idx="minor">
+            <a:schemeClr val="lt1"/>
+          </a:fontRef>
+        </p:style>
+        <p:txBody>
+          <a:bodyPr rtlCol="0" anchor="ctr"/>
+          <a:lstStyle/>
+          <a:p>
+            <a:pPr algn="ctr"/>
+            <a:endParaRPr lang="en-US"/>
+          </a:p>
+        </p:txBody>
+      </p:sp>
+      <p:sp>
+        <p:nvSpPr>
+          <p:cNvPr id="8" name="Oval 7">
+            <a:extLst>
+              <a:ext uri="{FF2B5EF4-FFF2-40B4-BE49-F238E27FC236}">
+                <a16:creationId xmlns:a16="http://schemas.microsoft.com/office/drawing/2014/main" id="{5DA4AE31-1635-B773-23C9-BB9E840578AA}"/>
+              </a:ext>
+            </a:extLst>
+          </p:cNvPr>
+          <p:cNvSpPr/>
           <p:nvPr/>
         </p:nvSpPr>
         <p:spPr>
           <a:xfrm>
-            <a:off x="3959857" y="201252"/>
-            <a:ext cx="308098" cy="369332"/>
+            <a:off x="11001080" y="970962"/>
+            <a:ext cx="1093510" cy="716436"/>
+          </a:xfrm>
+          <a:prstGeom prst="ellipse">
+            <a:avLst/>
+          </a:prstGeom>
+          <a:noFill/>
+        </p:spPr>
+        <p:style>
+          <a:lnRef idx="2">
+            <a:schemeClr val="accent6"/>
+          </a:lnRef>
+          <a:fillRef idx="1">
+            <a:schemeClr val="lt1"/>
+          </a:fillRef>
+          <a:effectRef idx="0">
+            <a:schemeClr val="accent6"/>
+          </a:effectRef>
+          <a:fontRef idx="minor">
+            <a:schemeClr val="dk1"/>
+          </a:fontRef>
+        </p:style>
+        <p:txBody>
+          <a:bodyPr rtlCol="0" anchor="ctr"/>
+          <a:lstStyle/>
+          <a:p>
+            <a:pPr algn="ctr"/>
+            <a:endParaRPr lang="en-US">
+              <a:noFill/>
+            </a:endParaRPr>
+          </a:p>
+        </p:txBody>
+      </p:sp>
+    </p:spTree>
+    <p:extLst>
+      <p:ext uri="{BB962C8B-B14F-4D97-AF65-F5344CB8AC3E}">
+        <p14:creationId xmlns:p14="http://schemas.microsoft.com/office/powerpoint/2010/main" val="3261600860"/>
+      </p:ext>
+    </p:extLst>
+  </p:cSld>
+  <p:clrMapOvr>
+    <a:masterClrMapping/>
+  </p:clrMapOvr>
+</p:sld>
+</file>
+
+<file path=ppt/slides/slide13.xml><?xml version="1.0" encoding="utf-8"?>
+<p:sld xmlns:a="http://schemas.openxmlformats.org/drawingml/2006/main" xmlns:r="http://schemas.openxmlformats.org/officeDocument/2006/relationships" xmlns:p="http://schemas.openxmlformats.org/presentationml/2006/main">
+  <p:cSld>
+    <p:spTree>
+      <p:nvGrpSpPr>
+        <p:cNvPr id="1" name=""/>
+        <p:cNvGrpSpPr/>
+        <p:nvPr/>
+      </p:nvGrpSpPr>
+      <p:grpSpPr>
+        <a:xfrm>
+          <a:off x="0" y="0"/>
+          <a:ext cx="0" cy="0"/>
+          <a:chOff x="0" y="0"/>
+          <a:chExt cx="0" cy="0"/>
+        </a:xfrm>
+      </p:grpSpPr>
+      <p:sp>
+        <p:nvSpPr>
+          <p:cNvPr id="2" name="Title 1">
+            <a:extLst>
+              <a:ext uri="{FF2B5EF4-FFF2-40B4-BE49-F238E27FC236}">
+                <a16:creationId xmlns:a16="http://schemas.microsoft.com/office/drawing/2014/main" id="{4AB5246D-AC5F-6B0B-0BF4-B4E936C2850D}"/>
+              </a:ext>
+            </a:extLst>
+          </p:cNvPr>
+          <p:cNvSpPr>
+            <a:spLocks noGrp="1"/>
+          </p:cNvSpPr>
+          <p:nvPr>
+            <p:ph type="title"/>
+          </p:nvPr>
+        </p:nvSpPr>
+        <p:spPr/>
+        <p:txBody>
+          <a:bodyPr/>
+          <a:lstStyle/>
+          <a:p>
+            <a:r>
+              <a:rPr lang="en-US" dirty="0"/>
+              <a:t>Created Project Image</a:t>
+            </a:r>
+          </a:p>
+        </p:txBody>
+      </p:sp>
+      <p:sp>
+        <p:nvSpPr>
+          <p:cNvPr id="3" name="Content Placeholder 2">
+            <a:extLst>
+              <a:ext uri="{FF2B5EF4-FFF2-40B4-BE49-F238E27FC236}">
+                <a16:creationId xmlns:a16="http://schemas.microsoft.com/office/drawing/2014/main" id="{04268344-160D-64FE-7CF3-7ECAEEC42F09}"/>
+              </a:ext>
+            </a:extLst>
+          </p:cNvPr>
+          <p:cNvSpPr>
+            <a:spLocks noGrp="1"/>
+          </p:cNvSpPr>
+          <p:nvPr>
+            <p:ph idx="1"/>
+          </p:nvPr>
+        </p:nvSpPr>
+        <p:spPr/>
+        <p:txBody>
+          <a:bodyPr/>
+          <a:lstStyle/>
+          <a:p>
+            <a:r>
+              <a:rPr lang="en-US" dirty="0"/>
+              <a:t>Unmarked: None</a:t>
+            </a:r>
+          </a:p>
+        </p:txBody>
+      </p:sp>
+    </p:spTree>
+    <p:extLst>
+      <p:ext uri="{BB962C8B-B14F-4D97-AF65-F5344CB8AC3E}">
+        <p14:creationId xmlns:p14="http://schemas.microsoft.com/office/powerpoint/2010/main" val="1943592596"/>
+      </p:ext>
+    </p:extLst>
+  </p:cSld>
+  <p:clrMapOvr>
+    <a:masterClrMapping/>
+  </p:clrMapOvr>
+</p:sld>
+</file>
+
+<file path=ppt/slides/slide14.xml><?xml version="1.0" encoding="utf-8"?>
+<p:sld xmlns:a="http://schemas.openxmlformats.org/drawingml/2006/main" xmlns:r="http://schemas.openxmlformats.org/officeDocument/2006/relationships" xmlns:p="http://schemas.openxmlformats.org/presentationml/2006/main">
+  <p:cSld>
+    <p:spTree>
+      <p:nvGrpSpPr>
+        <p:cNvPr id="1" name=""/>
+        <p:cNvGrpSpPr/>
+        <p:nvPr/>
+      </p:nvGrpSpPr>
+      <p:grpSpPr>
+        <a:xfrm>
+          <a:off x="0" y="0"/>
+          <a:ext cx="0" cy="0"/>
+          <a:chOff x="0" y="0"/>
+          <a:chExt cx="0" cy="0"/>
+        </a:xfrm>
+      </p:grpSpPr>
+      <p:pic>
+        <p:nvPicPr>
+          <p:cNvPr id="5" name="Picture 4">
+            <a:extLst>
+              <a:ext uri="{FF2B5EF4-FFF2-40B4-BE49-F238E27FC236}">
+                <a16:creationId xmlns:a16="http://schemas.microsoft.com/office/drawing/2014/main" id="{80BEDB98-47F1-3F76-F395-6D8026747FC4}"/>
+              </a:ext>
+            </a:extLst>
+          </p:cNvPr>
+          <p:cNvPicPr>
+            <a:picLocks noChangeAspect="1"/>
+          </p:cNvPicPr>
+          <p:nvPr/>
+        </p:nvPicPr>
+        <p:blipFill>
+          <a:blip r:embed="rId3"/>
+          <a:stretch>
+            <a:fillRect/>
+          </a:stretch>
+        </p:blipFill>
+        <p:spPr>
+          <a:xfrm>
+            <a:off x="0" y="320444"/>
+            <a:ext cx="12192000" cy="6217112"/>
           </a:xfrm>
           <a:prstGeom prst="rect">
             <a:avLst/>
           </a:prstGeom>
-          <a:noFill/>
         </p:spPr>
-        <p:txBody>
-          <a:bodyPr wrap="none" rtlCol="0">
-            <a:spAutoFit/>
-          </a:bodyPr>
-          <a:lstStyle/>
-          <a:p>
-            <a:r>
-              <a:rPr lang="en-US" dirty="0">
-                <a:solidFill>
-                  <a:srgbClr val="FF0000"/>
-                </a:solidFill>
-              </a:rPr>
-              <a:t>2</a:t>
-            </a:r>
-          </a:p>
-        </p:txBody>
-      </p:sp>
-      <p:sp>
-        <p:nvSpPr>
-          <p:cNvPr id="11" name="Rectangle 10">
-            <a:extLst>
-              <a:ext uri="{FF2B5EF4-FFF2-40B4-BE49-F238E27FC236}">
-                <a16:creationId xmlns:a16="http://schemas.microsoft.com/office/drawing/2014/main" id="{2833DB43-D41E-B980-2962-A29C8DC3C52A}"/>
+      </p:pic>
+      <p:sp>
+        <p:nvSpPr>
+          <p:cNvPr id="6" name="Rectangle 5">
+            <a:extLst>
+              <a:ext uri="{FF2B5EF4-FFF2-40B4-BE49-F238E27FC236}">
+                <a16:creationId xmlns:a16="http://schemas.microsoft.com/office/drawing/2014/main" id="{AE6D52E0-8337-0D7C-8178-83BBDCB5A4DA}"/>
               </a:ext>
             </a:extLst>
           </p:cNvPr>
@@ -4993,8 +5710,8 @@
         </p:nvSpPr>
         <p:spPr>
           <a:xfrm>
-            <a:off x="2017988" y="774810"/>
-            <a:ext cx="4726844" cy="1153578"/>
+            <a:off x="4095750" y="1743075"/>
+            <a:ext cx="4029075" cy="4210050"/>
           </a:xfrm>
           <a:prstGeom prst="rect">
             <a:avLst/>
@@ -5045,69 +5762,27 @@
       </p:sp>
       <p:sp>
         <p:nvSpPr>
-          <p:cNvPr id="12" name="TextBox 11">
-            <a:extLst>
-              <a:ext uri="{FF2B5EF4-FFF2-40B4-BE49-F238E27FC236}">
-                <a16:creationId xmlns:a16="http://schemas.microsoft.com/office/drawing/2014/main" id="{FC04C220-DD23-CC83-B1D2-AB1922EBBA7F}"/>
-              </a:ext>
-            </a:extLst>
-          </p:cNvPr>
-          <p:cNvSpPr txBox="1"/>
+          <p:cNvPr id="7" name="Arrow: Down 6">
+            <a:extLst>
+              <a:ext uri="{FF2B5EF4-FFF2-40B4-BE49-F238E27FC236}">
+                <a16:creationId xmlns:a16="http://schemas.microsoft.com/office/drawing/2014/main" id="{A6BB729C-F3AE-DC34-ED08-87C27344C5D7}"/>
+              </a:ext>
+            </a:extLst>
+          </p:cNvPr>
+          <p:cNvSpPr/>
           <p:nvPr/>
         </p:nvSpPr>
         <p:spPr>
-          <a:xfrm>
-            <a:off x="1709890" y="774810"/>
-            <a:ext cx="308098" cy="369332"/>
+          <a:xfrm rot="10800000">
+            <a:off x="5819775" y="6006870"/>
+            <a:ext cx="552450" cy="333375"/>
           </a:xfrm>
-          <a:prstGeom prst="rect">
+          <a:prstGeom prst="downArrow">
             <a:avLst/>
           </a:prstGeom>
-          <a:noFill/>
-        </p:spPr>
-        <p:txBody>
-          <a:bodyPr wrap="none" rtlCol="0">
-            <a:spAutoFit/>
-          </a:bodyPr>
-          <a:lstStyle/>
-          <a:p>
-            <a:r>
-              <a:rPr lang="en-US" dirty="0">
-                <a:solidFill>
-                  <a:srgbClr val="FF0000"/>
-                </a:solidFill>
-              </a:rPr>
-              <a:t>3</a:t>
-            </a:r>
-          </a:p>
-        </p:txBody>
-      </p:sp>
-      <p:sp>
-        <p:nvSpPr>
-          <p:cNvPr id="13" name="Rectangle 12">
-            <a:extLst>
-              <a:ext uri="{FF2B5EF4-FFF2-40B4-BE49-F238E27FC236}">
-                <a16:creationId xmlns:a16="http://schemas.microsoft.com/office/drawing/2014/main" id="{C108EFD0-0B82-6469-1709-FA5655D787C6}"/>
-              </a:ext>
-            </a:extLst>
-          </p:cNvPr>
-          <p:cNvSpPr/>
-          <p:nvPr/>
-        </p:nvSpPr>
-        <p:spPr>
-          <a:xfrm>
-            <a:off x="2017988" y="1992124"/>
-            <a:ext cx="4726843" cy="1602101"/>
-          </a:xfrm>
-          <a:prstGeom prst="rect">
-            <a:avLst/>
-          </a:prstGeom>
-          <a:noFill/>
-          <a:ln w="38100">
-            <a:solidFill>
-              <a:srgbClr val="FF0000"/>
-            </a:solidFill>
-          </a:ln>
+          <a:solidFill>
+            <a:srgbClr val="FF0000"/>
+          </a:solidFill>
         </p:spPr>
         <p:style>
           <a:lnRef idx="2">
@@ -5130,271 +5805,14 @@
           <a:lstStyle/>
           <a:p>
             <a:pPr algn="ctr"/>
-            <a:endParaRPr lang="en-US">
-              <a:ln w="0"/>
-              <a:solidFill>
-                <a:schemeClr val="tx1"/>
-              </a:solidFill>
-              <a:effectLst>
-                <a:outerShdw blurRad="38100" dist="19050" dir="2700000" algn="tl" rotWithShape="0">
-                  <a:schemeClr val="dk1">
-                    <a:alpha val="40000"/>
-                  </a:schemeClr>
-                </a:outerShdw>
-              </a:effectLst>
-            </a:endParaRPr>
-          </a:p>
-        </p:txBody>
-      </p:sp>
-      <p:sp>
-        <p:nvSpPr>
-          <p:cNvPr id="14" name="TextBox 13">
-            <a:extLst>
-              <a:ext uri="{FF2B5EF4-FFF2-40B4-BE49-F238E27FC236}">
-                <a16:creationId xmlns:a16="http://schemas.microsoft.com/office/drawing/2014/main" id="{A846B7CF-E7D2-BC5C-2705-E663D974A7E2}"/>
-              </a:ext>
-            </a:extLst>
-          </p:cNvPr>
-          <p:cNvSpPr txBox="1"/>
-          <p:nvPr/>
-        </p:nvSpPr>
-        <p:spPr>
-          <a:xfrm>
-            <a:off x="1709890" y="1992124"/>
-            <a:ext cx="308098" cy="369332"/>
-          </a:xfrm>
-          <a:prstGeom prst="rect">
-            <a:avLst/>
-          </a:prstGeom>
-          <a:noFill/>
-        </p:spPr>
-        <p:txBody>
-          <a:bodyPr wrap="none" rtlCol="0">
-            <a:spAutoFit/>
-          </a:bodyPr>
-          <a:lstStyle/>
-          <a:p>
-            <a:r>
-              <a:rPr lang="en-US" dirty="0">
-                <a:solidFill>
-                  <a:srgbClr val="FF0000"/>
-                </a:solidFill>
-              </a:rPr>
-              <a:t>4</a:t>
-            </a:r>
-          </a:p>
-        </p:txBody>
-      </p:sp>
-      <p:sp>
-        <p:nvSpPr>
-          <p:cNvPr id="15" name="Rectangle 14">
-            <a:extLst>
-              <a:ext uri="{FF2B5EF4-FFF2-40B4-BE49-F238E27FC236}">
-                <a16:creationId xmlns:a16="http://schemas.microsoft.com/office/drawing/2014/main" id="{12D14BB5-5053-B952-61E5-BD8A6FC3A4AD}"/>
-              </a:ext>
-            </a:extLst>
-          </p:cNvPr>
-          <p:cNvSpPr/>
-          <p:nvPr/>
-        </p:nvSpPr>
-        <p:spPr>
-          <a:xfrm>
-            <a:off x="6835251" y="774810"/>
-            <a:ext cx="3308907" cy="1206377"/>
-          </a:xfrm>
-          <a:prstGeom prst="rect">
-            <a:avLst/>
-          </a:prstGeom>
-          <a:noFill/>
-          <a:ln w="38100">
-            <a:solidFill>
-              <a:srgbClr val="FF0000"/>
-            </a:solidFill>
-          </a:ln>
-        </p:spPr>
-        <p:style>
-          <a:lnRef idx="2">
-            <a:schemeClr val="accent1">
-              <a:shade val="15000"/>
-            </a:schemeClr>
-          </a:lnRef>
-          <a:fillRef idx="1">
-            <a:schemeClr val="accent1"/>
-          </a:fillRef>
-          <a:effectRef idx="0">
-            <a:schemeClr val="accent1"/>
-          </a:effectRef>
-          <a:fontRef idx="minor">
-            <a:schemeClr val="lt1"/>
-          </a:fontRef>
-        </p:style>
-        <p:txBody>
-          <a:bodyPr rtlCol="0" anchor="ctr"/>
-          <a:lstStyle/>
-          <a:p>
-            <a:pPr algn="ctr"/>
-            <a:endParaRPr lang="en-US">
-              <a:ln w="0"/>
-              <a:solidFill>
-                <a:schemeClr val="tx1"/>
-              </a:solidFill>
-              <a:effectLst>
-                <a:outerShdw blurRad="38100" dist="19050" dir="2700000" algn="tl" rotWithShape="0">
-                  <a:schemeClr val="dk1">
-                    <a:alpha val="40000"/>
-                  </a:schemeClr>
-                </a:outerShdw>
-              </a:effectLst>
-            </a:endParaRPr>
-          </a:p>
-        </p:txBody>
-      </p:sp>
-      <p:sp>
-        <p:nvSpPr>
-          <p:cNvPr id="16" name="TextBox 15">
-            <a:extLst>
-              <a:ext uri="{FF2B5EF4-FFF2-40B4-BE49-F238E27FC236}">
-                <a16:creationId xmlns:a16="http://schemas.microsoft.com/office/drawing/2014/main" id="{98610F23-443B-34BB-F719-A7433A6FF245}"/>
-              </a:ext>
-            </a:extLst>
-          </p:cNvPr>
-          <p:cNvSpPr txBox="1"/>
-          <p:nvPr/>
-        </p:nvSpPr>
-        <p:spPr>
-          <a:xfrm>
-            <a:off x="10109018" y="702462"/>
-            <a:ext cx="308098" cy="369332"/>
-          </a:xfrm>
-          <a:prstGeom prst="rect">
-            <a:avLst/>
-          </a:prstGeom>
-          <a:noFill/>
-        </p:spPr>
-        <p:txBody>
-          <a:bodyPr wrap="none" rtlCol="0">
-            <a:spAutoFit/>
-          </a:bodyPr>
-          <a:lstStyle/>
-          <a:p>
-            <a:r>
-              <a:rPr lang="en-US" dirty="0">
-                <a:solidFill>
-                  <a:srgbClr val="FF0000"/>
-                </a:solidFill>
-              </a:rPr>
-              <a:t>5</a:t>
-            </a:r>
-          </a:p>
-        </p:txBody>
-      </p:sp>
-      <p:sp>
-        <p:nvSpPr>
-          <p:cNvPr id="17" name="Rectangle 16">
-            <a:extLst>
-              <a:ext uri="{FF2B5EF4-FFF2-40B4-BE49-F238E27FC236}">
-                <a16:creationId xmlns:a16="http://schemas.microsoft.com/office/drawing/2014/main" id="{5710D559-00D9-D4B5-840E-0929DD1D3752}"/>
-              </a:ext>
-            </a:extLst>
-          </p:cNvPr>
-          <p:cNvSpPr/>
-          <p:nvPr/>
-        </p:nvSpPr>
-        <p:spPr>
-          <a:xfrm>
-            <a:off x="6835250" y="2044924"/>
-            <a:ext cx="3308907" cy="4016394"/>
-          </a:xfrm>
-          <a:prstGeom prst="rect">
-            <a:avLst/>
-          </a:prstGeom>
-          <a:noFill/>
-          <a:ln w="38100">
-            <a:solidFill>
-              <a:srgbClr val="FF0000"/>
-            </a:solidFill>
-          </a:ln>
-        </p:spPr>
-        <p:style>
-          <a:lnRef idx="2">
-            <a:schemeClr val="accent1">
-              <a:shade val="15000"/>
-            </a:schemeClr>
-          </a:lnRef>
-          <a:fillRef idx="1">
-            <a:schemeClr val="accent1"/>
-          </a:fillRef>
-          <a:effectRef idx="0">
-            <a:schemeClr val="accent1"/>
-          </a:effectRef>
-          <a:fontRef idx="minor">
-            <a:schemeClr val="lt1"/>
-          </a:fontRef>
-        </p:style>
-        <p:txBody>
-          <a:bodyPr rtlCol="0" anchor="ctr"/>
-          <a:lstStyle/>
-          <a:p>
-            <a:pPr algn="ctr"/>
-            <a:endParaRPr lang="en-US">
-              <a:ln w="0"/>
-              <a:solidFill>
-                <a:schemeClr val="tx1"/>
-              </a:solidFill>
-              <a:effectLst>
-                <a:outerShdw blurRad="38100" dist="19050" dir="2700000" algn="tl" rotWithShape="0">
-                  <a:schemeClr val="dk1">
-                    <a:alpha val="40000"/>
-                  </a:schemeClr>
-                </a:outerShdw>
-              </a:effectLst>
-            </a:endParaRPr>
-          </a:p>
-        </p:txBody>
-      </p:sp>
-      <p:sp>
-        <p:nvSpPr>
-          <p:cNvPr id="18" name="TextBox 17">
-            <a:extLst>
-              <a:ext uri="{FF2B5EF4-FFF2-40B4-BE49-F238E27FC236}">
-                <a16:creationId xmlns:a16="http://schemas.microsoft.com/office/drawing/2014/main" id="{DDAEC382-88AF-0048-E5CD-7007074237EA}"/>
-              </a:ext>
-            </a:extLst>
-          </p:cNvPr>
-          <p:cNvSpPr txBox="1"/>
-          <p:nvPr/>
-        </p:nvSpPr>
-        <p:spPr>
-          <a:xfrm>
-            <a:off x="10144157" y="1981187"/>
-            <a:ext cx="308098" cy="369332"/>
-          </a:xfrm>
-          <a:prstGeom prst="rect">
-            <a:avLst/>
-          </a:prstGeom>
-          <a:noFill/>
-        </p:spPr>
-        <p:txBody>
-          <a:bodyPr wrap="none" rtlCol="0">
-            <a:spAutoFit/>
-          </a:bodyPr>
-          <a:lstStyle/>
-          <a:p>
-            <a:r>
-              <a:rPr lang="en-US" dirty="0">
-                <a:solidFill>
-                  <a:srgbClr val="FF0000"/>
-                </a:solidFill>
-              </a:rPr>
-              <a:t>6</a:t>
-            </a:r>
+            <a:endParaRPr lang="en-US"/>
           </a:p>
         </p:txBody>
       </p:sp>
     </p:spTree>
     <p:extLst>
       <p:ext uri="{BB962C8B-B14F-4D97-AF65-F5344CB8AC3E}">
-        <p14:creationId xmlns:p14="http://schemas.microsoft.com/office/powerpoint/2010/main" val="2030273751"/>
+        <p14:creationId xmlns:p14="http://schemas.microsoft.com/office/powerpoint/2010/main" val="2709341814"/>
       </p:ext>
     </p:extLst>
   </p:cSld>
@@ -5404,1039 +5822,7 @@
 </p:sld>
 </file>
 
-<file path=ppt/slides/slide3.xml><?xml version="1.0" encoding="utf-8"?>
-<p:sld xmlns:a="http://schemas.openxmlformats.org/drawingml/2006/main" xmlns:r="http://schemas.openxmlformats.org/officeDocument/2006/relationships" xmlns:p="http://schemas.openxmlformats.org/presentationml/2006/main">
-  <p:cSld>
-    <p:spTree>
-      <p:nvGrpSpPr>
-        <p:cNvPr id="1" name="">
-          <a:extLst>
-            <a:ext uri="{FF2B5EF4-FFF2-40B4-BE49-F238E27FC236}">
-              <a16:creationId xmlns:a16="http://schemas.microsoft.com/office/drawing/2014/main" id="{1C7C15F3-1C36-3169-7045-1C0AB65E9E14}"/>
-            </a:ext>
-          </a:extLst>
-        </p:cNvPr>
-        <p:cNvGrpSpPr/>
-        <p:nvPr/>
-      </p:nvGrpSpPr>
-      <p:grpSpPr>
-        <a:xfrm>
-          <a:off x="0" y="0"/>
-          <a:ext cx="0" cy="0"/>
-          <a:chOff x="0" y="0"/>
-          <a:chExt cx="0" cy="0"/>
-        </a:xfrm>
-      </p:grpSpPr>
-      <p:pic>
-        <p:nvPicPr>
-          <p:cNvPr id="5" name="Picture 4">
-            <a:extLst>
-              <a:ext uri="{FF2B5EF4-FFF2-40B4-BE49-F238E27FC236}">
-                <a16:creationId xmlns:a16="http://schemas.microsoft.com/office/drawing/2014/main" id="{60C0A187-7FAE-AE45-10F5-3BAF0B34869C}"/>
-              </a:ext>
-            </a:extLst>
-          </p:cNvPr>
-          <p:cNvPicPr>
-            <a:picLocks noGrp="1" noRot="1" noChangeAspect="1" noMove="1" noResize="1" noEditPoints="1" noAdjustHandles="1" noChangeArrowheads="1" noChangeShapeType="1" noCrop="1"/>
-          </p:cNvPicPr>
-          <p:nvPr/>
-        </p:nvPicPr>
-        <p:blipFill>
-          <a:blip r:embed="rId3">
-            <a:extLst>
-              <a:ext uri="{28A0092B-C50C-407E-A947-70E740481C1C}">
-                <a14:useLocalDpi xmlns:a14="http://schemas.microsoft.com/office/drawing/2010/main" val="0"/>
-              </a:ext>
-            </a:extLst>
-          </a:blip>
-          <a:srcRect/>
-          <a:stretch/>
-        </p:blipFill>
-        <p:spPr>
-          <a:xfrm>
-            <a:off x="1316272" y="290074"/>
-            <a:ext cx="9559455" cy="6277851"/>
-          </a:xfrm>
-          <a:prstGeom prst="rect">
-            <a:avLst/>
-          </a:prstGeom>
-        </p:spPr>
-      </p:pic>
-      <p:sp>
-        <p:nvSpPr>
-          <p:cNvPr id="9" name="Rectangle 8">
-            <a:extLst>
-              <a:ext uri="{FF2B5EF4-FFF2-40B4-BE49-F238E27FC236}">
-                <a16:creationId xmlns:a16="http://schemas.microsoft.com/office/drawing/2014/main" id="{0ACD48EA-BFF4-77F4-FA55-A99720CB1B88}"/>
-              </a:ext>
-            </a:extLst>
-          </p:cNvPr>
-          <p:cNvSpPr/>
-          <p:nvPr/>
-        </p:nvSpPr>
-        <p:spPr>
-          <a:xfrm>
-            <a:off x="4239380" y="176164"/>
-            <a:ext cx="1567758" cy="534909"/>
-          </a:xfrm>
-          <a:prstGeom prst="rect">
-            <a:avLst/>
-          </a:prstGeom>
-          <a:noFill/>
-          <a:ln w="38100">
-            <a:solidFill>
-              <a:srgbClr val="FF0000"/>
-            </a:solidFill>
-          </a:ln>
-        </p:spPr>
-        <p:style>
-          <a:lnRef idx="2">
-            <a:schemeClr val="accent1">
-              <a:shade val="15000"/>
-            </a:schemeClr>
-          </a:lnRef>
-          <a:fillRef idx="1">
-            <a:schemeClr val="accent1"/>
-          </a:fillRef>
-          <a:effectRef idx="0">
-            <a:schemeClr val="accent1"/>
-          </a:effectRef>
-          <a:fontRef idx="minor">
-            <a:schemeClr val="lt1"/>
-          </a:fontRef>
-        </p:style>
-        <p:txBody>
-          <a:bodyPr rtlCol="0" anchor="ctr"/>
-          <a:lstStyle/>
-          <a:p>
-            <a:pPr algn="ctr"/>
-            <a:endParaRPr lang="en-US">
-              <a:ln w="0"/>
-              <a:solidFill>
-                <a:schemeClr val="tx1"/>
-              </a:solidFill>
-              <a:effectLst>
-                <a:outerShdw blurRad="38100" dist="19050" dir="2700000" algn="tl" rotWithShape="0">
-                  <a:schemeClr val="dk1">
-                    <a:alpha val="40000"/>
-                  </a:schemeClr>
-                </a:outerShdw>
-              </a:effectLst>
-            </a:endParaRPr>
-          </a:p>
-        </p:txBody>
-      </p:sp>
-    </p:spTree>
-    <p:extLst>
-      <p:ext uri="{BB962C8B-B14F-4D97-AF65-F5344CB8AC3E}">
-        <p14:creationId xmlns:p14="http://schemas.microsoft.com/office/powerpoint/2010/main" val="2427920272"/>
-      </p:ext>
-    </p:extLst>
-  </p:cSld>
-  <p:clrMapOvr>
-    <a:masterClrMapping/>
-  </p:clrMapOvr>
-</p:sld>
-</file>
-
-<file path=ppt/slides/slide4.xml><?xml version="1.0" encoding="utf-8"?>
-<p:sld xmlns:a="http://schemas.openxmlformats.org/drawingml/2006/main" xmlns:r="http://schemas.openxmlformats.org/officeDocument/2006/relationships" xmlns:p="http://schemas.openxmlformats.org/presentationml/2006/main">
-  <p:cSld>
-    <p:spTree>
-      <p:nvGrpSpPr>
-        <p:cNvPr id="1" name="">
-          <a:extLst>
-            <a:ext uri="{FF2B5EF4-FFF2-40B4-BE49-F238E27FC236}">
-              <a16:creationId xmlns:a16="http://schemas.microsoft.com/office/drawing/2014/main" id="{4699E48C-9048-EDE2-981B-D5B27D232C60}"/>
-            </a:ext>
-          </a:extLst>
-        </p:cNvPr>
-        <p:cNvGrpSpPr/>
-        <p:nvPr/>
-      </p:nvGrpSpPr>
-      <p:grpSpPr>
-        <a:xfrm>
-          <a:off x="0" y="0"/>
-          <a:ext cx="0" cy="0"/>
-          <a:chOff x="0" y="0"/>
-          <a:chExt cx="0" cy="0"/>
-        </a:xfrm>
-      </p:grpSpPr>
-      <p:sp>
-        <p:nvSpPr>
-          <p:cNvPr id="8" name="TextBox 7">
-            <a:extLst>
-              <a:ext uri="{FF2B5EF4-FFF2-40B4-BE49-F238E27FC236}">
-                <a16:creationId xmlns:a16="http://schemas.microsoft.com/office/drawing/2014/main" id="{1E107447-00AF-0794-5BDB-B5C886C40847}"/>
-              </a:ext>
-            </a:extLst>
-          </p:cNvPr>
-          <p:cNvSpPr txBox="1"/>
-          <p:nvPr/>
-        </p:nvSpPr>
-        <p:spPr>
-          <a:xfrm>
-            <a:off x="1247106" y="612000"/>
-            <a:ext cx="308098" cy="369332"/>
-          </a:xfrm>
-          <a:prstGeom prst="rect">
-            <a:avLst/>
-          </a:prstGeom>
-          <a:noFill/>
-        </p:spPr>
-        <p:txBody>
-          <a:bodyPr wrap="none" rtlCol="0">
-            <a:spAutoFit/>
-          </a:bodyPr>
-          <a:lstStyle/>
-          <a:p>
-            <a:r>
-              <a:rPr lang="en-US" dirty="0">
-                <a:solidFill>
-                  <a:srgbClr val="FF0000"/>
-                </a:solidFill>
-              </a:rPr>
-              <a:t>1</a:t>
-            </a:r>
-          </a:p>
-        </p:txBody>
-      </p:sp>
-      <p:sp>
-        <p:nvSpPr>
-          <p:cNvPr id="10" name="TextBox 9">
-            <a:extLst>
-              <a:ext uri="{FF2B5EF4-FFF2-40B4-BE49-F238E27FC236}">
-                <a16:creationId xmlns:a16="http://schemas.microsoft.com/office/drawing/2014/main" id="{167DA61D-8CB4-5D76-7A06-103433A298DE}"/>
-              </a:ext>
-            </a:extLst>
-          </p:cNvPr>
-          <p:cNvSpPr txBox="1"/>
-          <p:nvPr/>
-        </p:nvSpPr>
-        <p:spPr>
-          <a:xfrm>
-            <a:off x="1956074" y="612000"/>
-            <a:ext cx="308098" cy="369332"/>
-          </a:xfrm>
-          <a:prstGeom prst="rect">
-            <a:avLst/>
-          </a:prstGeom>
-          <a:noFill/>
-        </p:spPr>
-        <p:txBody>
-          <a:bodyPr wrap="none" rtlCol="0">
-            <a:spAutoFit/>
-          </a:bodyPr>
-          <a:lstStyle/>
-          <a:p>
-            <a:r>
-              <a:rPr lang="en-US" dirty="0">
-                <a:solidFill>
-                  <a:srgbClr val="FF0000"/>
-                </a:solidFill>
-              </a:rPr>
-              <a:t>2</a:t>
-            </a:r>
-          </a:p>
-        </p:txBody>
-      </p:sp>
-      <p:sp>
-        <p:nvSpPr>
-          <p:cNvPr id="12" name="TextBox 11">
-            <a:extLst>
-              <a:ext uri="{FF2B5EF4-FFF2-40B4-BE49-F238E27FC236}">
-                <a16:creationId xmlns:a16="http://schemas.microsoft.com/office/drawing/2014/main" id="{60A86629-EEE5-FC0A-0F80-BB58BCCCBBAC}"/>
-              </a:ext>
-            </a:extLst>
-          </p:cNvPr>
-          <p:cNvSpPr txBox="1"/>
-          <p:nvPr/>
-        </p:nvSpPr>
-        <p:spPr>
-          <a:xfrm>
-            <a:off x="4104990" y="612000"/>
-            <a:ext cx="308098" cy="369332"/>
-          </a:xfrm>
-          <a:prstGeom prst="rect">
-            <a:avLst/>
-          </a:prstGeom>
-          <a:noFill/>
-        </p:spPr>
-        <p:txBody>
-          <a:bodyPr wrap="none" rtlCol="0">
-            <a:spAutoFit/>
-          </a:bodyPr>
-          <a:lstStyle/>
-          <a:p>
-            <a:r>
-              <a:rPr lang="en-US" dirty="0">
-                <a:solidFill>
-                  <a:srgbClr val="FF0000"/>
-                </a:solidFill>
-              </a:rPr>
-              <a:t>3</a:t>
-            </a:r>
-          </a:p>
-        </p:txBody>
-      </p:sp>
-      <p:sp>
-        <p:nvSpPr>
-          <p:cNvPr id="14" name="TextBox 13">
-            <a:extLst>
-              <a:ext uri="{FF2B5EF4-FFF2-40B4-BE49-F238E27FC236}">
-                <a16:creationId xmlns:a16="http://schemas.microsoft.com/office/drawing/2014/main" id="{AF8F806A-6581-ADA4-02E1-7E8FF39629F0}"/>
-              </a:ext>
-            </a:extLst>
-          </p:cNvPr>
-          <p:cNvSpPr txBox="1"/>
-          <p:nvPr/>
-        </p:nvSpPr>
-        <p:spPr>
-          <a:xfrm>
-            <a:off x="7592852" y="612000"/>
-            <a:ext cx="308098" cy="369332"/>
-          </a:xfrm>
-          <a:prstGeom prst="rect">
-            <a:avLst/>
-          </a:prstGeom>
-          <a:noFill/>
-        </p:spPr>
-        <p:txBody>
-          <a:bodyPr wrap="none" rtlCol="0">
-            <a:spAutoFit/>
-          </a:bodyPr>
-          <a:lstStyle/>
-          <a:p>
-            <a:r>
-              <a:rPr lang="en-US" dirty="0">
-                <a:solidFill>
-                  <a:srgbClr val="FF0000"/>
-                </a:solidFill>
-              </a:rPr>
-              <a:t>4</a:t>
-            </a:r>
-          </a:p>
-        </p:txBody>
-      </p:sp>
-      <p:sp>
-        <p:nvSpPr>
-          <p:cNvPr id="16" name="TextBox 15">
-            <a:extLst>
-              <a:ext uri="{FF2B5EF4-FFF2-40B4-BE49-F238E27FC236}">
-                <a16:creationId xmlns:a16="http://schemas.microsoft.com/office/drawing/2014/main" id="{BE2F7F57-2BC2-C81B-B04C-65FF5E1E8AEF}"/>
-              </a:ext>
-            </a:extLst>
-          </p:cNvPr>
-          <p:cNvSpPr txBox="1"/>
-          <p:nvPr/>
-        </p:nvSpPr>
-        <p:spPr>
-          <a:xfrm>
-            <a:off x="9254275" y="612000"/>
-            <a:ext cx="308098" cy="369332"/>
-          </a:xfrm>
-          <a:prstGeom prst="rect">
-            <a:avLst/>
-          </a:prstGeom>
-          <a:noFill/>
-        </p:spPr>
-        <p:txBody>
-          <a:bodyPr wrap="none" rtlCol="0">
-            <a:spAutoFit/>
-          </a:bodyPr>
-          <a:lstStyle/>
-          <a:p>
-            <a:r>
-              <a:rPr lang="en-US" dirty="0">
-                <a:solidFill>
-                  <a:srgbClr val="FF0000"/>
-                </a:solidFill>
-              </a:rPr>
-              <a:t>5</a:t>
-            </a:r>
-          </a:p>
-        </p:txBody>
-      </p:sp>
-      <p:sp>
-        <p:nvSpPr>
-          <p:cNvPr id="18" name="TextBox 17">
-            <a:extLst>
-              <a:ext uri="{FF2B5EF4-FFF2-40B4-BE49-F238E27FC236}">
-                <a16:creationId xmlns:a16="http://schemas.microsoft.com/office/drawing/2014/main" id="{5DDFC490-0EB6-E706-0A7A-D4107B4CBEF6}"/>
-              </a:ext>
-            </a:extLst>
-          </p:cNvPr>
-          <p:cNvSpPr txBox="1"/>
-          <p:nvPr/>
-        </p:nvSpPr>
-        <p:spPr>
-          <a:xfrm>
-            <a:off x="9741768" y="612000"/>
-            <a:ext cx="308098" cy="369332"/>
-          </a:xfrm>
-          <a:prstGeom prst="rect">
-            <a:avLst/>
-          </a:prstGeom>
-          <a:noFill/>
-        </p:spPr>
-        <p:txBody>
-          <a:bodyPr wrap="square" rtlCol="0">
-            <a:spAutoFit/>
-          </a:bodyPr>
-          <a:lstStyle/>
-          <a:p>
-            <a:r>
-              <a:rPr lang="en-US" dirty="0">
-                <a:solidFill>
-                  <a:srgbClr val="FF0000"/>
-                </a:solidFill>
-              </a:rPr>
-              <a:t>6</a:t>
-            </a:r>
-          </a:p>
-        </p:txBody>
-      </p:sp>
-      <p:sp>
-        <p:nvSpPr>
-          <p:cNvPr id="3" name="TextBox 2">
-            <a:extLst>
-              <a:ext uri="{FF2B5EF4-FFF2-40B4-BE49-F238E27FC236}">
-                <a16:creationId xmlns:a16="http://schemas.microsoft.com/office/drawing/2014/main" id="{9A8F4913-9D14-11CE-7CD0-FDE51C54D856}"/>
-              </a:ext>
-            </a:extLst>
-          </p:cNvPr>
-          <p:cNvSpPr txBox="1"/>
-          <p:nvPr/>
-        </p:nvSpPr>
-        <p:spPr>
-          <a:xfrm>
-            <a:off x="10100763" y="612000"/>
-            <a:ext cx="308098" cy="369332"/>
-          </a:xfrm>
-          <a:prstGeom prst="rect">
-            <a:avLst/>
-          </a:prstGeom>
-          <a:noFill/>
-        </p:spPr>
-        <p:txBody>
-          <a:bodyPr wrap="square" rtlCol="0">
-            <a:spAutoFit/>
-          </a:bodyPr>
-          <a:lstStyle/>
-          <a:p>
-            <a:r>
-              <a:rPr lang="en-US" dirty="0">
-                <a:solidFill>
-                  <a:srgbClr val="FF0000"/>
-                </a:solidFill>
-              </a:rPr>
-              <a:t>7</a:t>
-            </a:r>
-          </a:p>
-        </p:txBody>
-      </p:sp>
-      <p:pic>
-        <p:nvPicPr>
-          <p:cNvPr id="5" name="Picture 4">
-            <a:extLst>
-              <a:ext uri="{FF2B5EF4-FFF2-40B4-BE49-F238E27FC236}">
-                <a16:creationId xmlns:a16="http://schemas.microsoft.com/office/drawing/2014/main" id="{DADB91F5-08C6-5411-5BB7-3FFB52573ACF}"/>
-              </a:ext>
-            </a:extLst>
-          </p:cNvPr>
-          <p:cNvPicPr preferRelativeResize="0">
-            <a:picLocks/>
-          </p:cNvPicPr>
-          <p:nvPr/>
-        </p:nvPicPr>
-        <p:blipFill>
-          <a:blip r:embed="rId3">
-            <a:extLst>
-              <a:ext uri="{28A0092B-C50C-407E-A947-70E740481C1C}">
-                <a14:useLocalDpi xmlns:a14="http://schemas.microsoft.com/office/drawing/2010/main" val="0"/>
-              </a:ext>
-            </a:extLst>
-          </a:blip>
-          <a:srcRect t="-72" b="95205"/>
-          <a:stretch>
-            <a:fillRect/>
-          </a:stretch>
-        </p:blipFill>
-        <p:spPr>
-          <a:xfrm>
-            <a:off x="1296000" y="288000"/>
-            <a:ext cx="9573961" cy="306000"/>
-          </a:xfrm>
-          <a:prstGeom prst="rect">
-            <a:avLst/>
-          </a:prstGeom>
-        </p:spPr>
-      </p:pic>
-      <p:sp>
-        <p:nvSpPr>
-          <p:cNvPr id="7" name="Rectangle 6">
-            <a:extLst>
-              <a:ext uri="{FF2B5EF4-FFF2-40B4-BE49-F238E27FC236}">
-                <a16:creationId xmlns:a16="http://schemas.microsoft.com/office/drawing/2014/main" id="{1154C8EF-2181-C5EB-0505-FA6C78C42E85}"/>
-              </a:ext>
-            </a:extLst>
-          </p:cNvPr>
-          <p:cNvSpPr/>
-          <p:nvPr/>
-        </p:nvSpPr>
-        <p:spPr>
-          <a:xfrm>
-            <a:off x="1347788" y="216000"/>
-            <a:ext cx="508172" cy="432000"/>
-          </a:xfrm>
-          <a:prstGeom prst="rect">
-            <a:avLst/>
-          </a:prstGeom>
-          <a:noFill/>
-          <a:ln w="38100">
-            <a:solidFill>
-              <a:srgbClr val="FF0000"/>
-            </a:solidFill>
-          </a:ln>
-        </p:spPr>
-        <p:style>
-          <a:lnRef idx="2">
-            <a:schemeClr val="accent1">
-              <a:shade val="15000"/>
-            </a:schemeClr>
-          </a:lnRef>
-          <a:fillRef idx="1">
-            <a:schemeClr val="accent1"/>
-          </a:fillRef>
-          <a:effectRef idx="0">
-            <a:schemeClr val="accent1"/>
-          </a:effectRef>
-          <a:fontRef idx="minor">
-            <a:schemeClr val="lt1"/>
-          </a:fontRef>
-        </p:style>
-        <p:txBody>
-          <a:bodyPr rtlCol="0" anchor="ctr"/>
-          <a:lstStyle/>
-          <a:p>
-            <a:pPr algn="ctr"/>
-            <a:endParaRPr lang="en-US">
-              <a:ln w="0"/>
-              <a:solidFill>
-                <a:schemeClr val="tx1"/>
-              </a:solidFill>
-              <a:effectLst>
-                <a:outerShdw blurRad="38100" dist="19050" dir="2700000" algn="tl" rotWithShape="0">
-                  <a:schemeClr val="dk1">
-                    <a:alpha val="40000"/>
-                  </a:schemeClr>
-                </a:outerShdw>
-              </a:effectLst>
-            </a:endParaRPr>
-          </a:p>
-        </p:txBody>
-      </p:sp>
-      <p:sp>
-        <p:nvSpPr>
-          <p:cNvPr id="9" name="Rectangle 8">
-            <a:extLst>
-              <a:ext uri="{FF2B5EF4-FFF2-40B4-BE49-F238E27FC236}">
-                <a16:creationId xmlns:a16="http://schemas.microsoft.com/office/drawing/2014/main" id="{BB20B77C-AB5A-03CB-D8DA-1A5E8F64A150}"/>
-              </a:ext>
-            </a:extLst>
-          </p:cNvPr>
-          <p:cNvSpPr/>
-          <p:nvPr/>
-        </p:nvSpPr>
-        <p:spPr>
-          <a:xfrm>
-            <a:off x="2057400" y="216000"/>
-            <a:ext cx="381000" cy="432000"/>
-          </a:xfrm>
-          <a:prstGeom prst="rect">
-            <a:avLst/>
-          </a:prstGeom>
-          <a:noFill/>
-          <a:ln w="38100">
-            <a:solidFill>
-              <a:srgbClr val="FF0000"/>
-            </a:solidFill>
-          </a:ln>
-        </p:spPr>
-        <p:style>
-          <a:lnRef idx="2">
-            <a:schemeClr val="accent1">
-              <a:shade val="15000"/>
-            </a:schemeClr>
-          </a:lnRef>
-          <a:fillRef idx="1">
-            <a:schemeClr val="accent1"/>
-          </a:fillRef>
-          <a:effectRef idx="0">
-            <a:schemeClr val="accent1"/>
-          </a:effectRef>
-          <a:fontRef idx="minor">
-            <a:schemeClr val="lt1"/>
-          </a:fontRef>
-        </p:style>
-        <p:txBody>
-          <a:bodyPr rtlCol="0" anchor="ctr"/>
-          <a:lstStyle/>
-          <a:p>
-            <a:pPr algn="ctr"/>
-            <a:endParaRPr lang="en-US" dirty="0">
-              <a:ln w="0"/>
-              <a:solidFill>
-                <a:schemeClr val="tx1"/>
-              </a:solidFill>
-              <a:effectLst>
-                <a:outerShdw blurRad="38100" dist="19050" dir="2700000" algn="tl" rotWithShape="0">
-                  <a:schemeClr val="dk1">
-                    <a:alpha val="40000"/>
-                  </a:schemeClr>
-                </a:outerShdw>
-              </a:effectLst>
-            </a:endParaRPr>
-          </a:p>
-        </p:txBody>
-      </p:sp>
-      <p:sp>
-        <p:nvSpPr>
-          <p:cNvPr id="11" name="Rectangle 10">
-            <a:extLst>
-              <a:ext uri="{FF2B5EF4-FFF2-40B4-BE49-F238E27FC236}">
-                <a16:creationId xmlns:a16="http://schemas.microsoft.com/office/drawing/2014/main" id="{0A6D7683-FE00-C1C6-EE58-D18D58B85268}"/>
-              </a:ext>
-            </a:extLst>
-          </p:cNvPr>
-          <p:cNvSpPr/>
-          <p:nvPr/>
-        </p:nvSpPr>
-        <p:spPr>
-          <a:xfrm>
-            <a:off x="4209764" y="216000"/>
-            <a:ext cx="1538243" cy="432000"/>
-          </a:xfrm>
-          <a:prstGeom prst="rect">
-            <a:avLst/>
-          </a:prstGeom>
-          <a:noFill/>
-          <a:ln w="38100">
-            <a:solidFill>
-              <a:srgbClr val="FF0000"/>
-            </a:solidFill>
-          </a:ln>
-        </p:spPr>
-        <p:style>
-          <a:lnRef idx="2">
-            <a:schemeClr val="accent1">
-              <a:shade val="15000"/>
-            </a:schemeClr>
-          </a:lnRef>
-          <a:fillRef idx="1">
-            <a:schemeClr val="accent1"/>
-          </a:fillRef>
-          <a:effectRef idx="0">
-            <a:schemeClr val="accent1"/>
-          </a:effectRef>
-          <a:fontRef idx="minor">
-            <a:schemeClr val="lt1"/>
-          </a:fontRef>
-        </p:style>
-        <p:txBody>
-          <a:bodyPr rtlCol="0" anchor="ctr"/>
-          <a:lstStyle/>
-          <a:p>
-            <a:pPr algn="ctr"/>
-            <a:endParaRPr lang="en-US">
-              <a:ln w="0"/>
-              <a:solidFill>
-                <a:schemeClr val="tx1"/>
-              </a:solidFill>
-              <a:effectLst>
-                <a:outerShdw blurRad="38100" dist="19050" dir="2700000" algn="tl" rotWithShape="0">
-                  <a:schemeClr val="dk1">
-                    <a:alpha val="40000"/>
-                  </a:schemeClr>
-                </a:outerShdw>
-              </a:effectLst>
-            </a:endParaRPr>
-          </a:p>
-        </p:txBody>
-      </p:sp>
-      <p:sp>
-        <p:nvSpPr>
-          <p:cNvPr id="13" name="Rectangle 12">
-            <a:extLst>
-              <a:ext uri="{FF2B5EF4-FFF2-40B4-BE49-F238E27FC236}">
-                <a16:creationId xmlns:a16="http://schemas.microsoft.com/office/drawing/2014/main" id="{87F319DB-E90A-F9AB-1273-9B6163824C75}"/>
-              </a:ext>
-            </a:extLst>
-          </p:cNvPr>
-          <p:cNvSpPr/>
-          <p:nvPr/>
-        </p:nvSpPr>
-        <p:spPr>
-          <a:xfrm>
-            <a:off x="7707041" y="216000"/>
-            <a:ext cx="1495426" cy="432000"/>
-          </a:xfrm>
-          <a:prstGeom prst="rect">
-            <a:avLst/>
-          </a:prstGeom>
-          <a:noFill/>
-          <a:ln w="38100">
-            <a:solidFill>
-              <a:srgbClr val="FF0000"/>
-            </a:solidFill>
-          </a:ln>
-        </p:spPr>
-        <p:style>
-          <a:lnRef idx="2">
-            <a:schemeClr val="accent1">
-              <a:shade val="15000"/>
-            </a:schemeClr>
-          </a:lnRef>
-          <a:fillRef idx="1">
-            <a:schemeClr val="accent1"/>
-          </a:fillRef>
-          <a:effectRef idx="0">
-            <a:schemeClr val="accent1"/>
-          </a:effectRef>
-          <a:fontRef idx="minor">
-            <a:schemeClr val="lt1"/>
-          </a:fontRef>
-        </p:style>
-        <p:txBody>
-          <a:bodyPr rtlCol="0" anchor="ctr"/>
-          <a:lstStyle/>
-          <a:p>
-            <a:pPr algn="ctr"/>
-            <a:endParaRPr lang="en-US">
-              <a:ln w="0"/>
-              <a:solidFill>
-                <a:schemeClr val="tx1"/>
-              </a:solidFill>
-              <a:effectLst>
-                <a:outerShdw blurRad="38100" dist="19050" dir="2700000" algn="tl" rotWithShape="0">
-                  <a:schemeClr val="dk1">
-                    <a:alpha val="40000"/>
-                  </a:schemeClr>
-                </a:outerShdw>
-              </a:effectLst>
-            </a:endParaRPr>
-          </a:p>
-        </p:txBody>
-      </p:sp>
-      <p:sp>
-        <p:nvSpPr>
-          <p:cNvPr id="15" name="Rectangle 14">
-            <a:extLst>
-              <a:ext uri="{FF2B5EF4-FFF2-40B4-BE49-F238E27FC236}">
-                <a16:creationId xmlns:a16="http://schemas.microsoft.com/office/drawing/2014/main" id="{788F1A68-DAEC-8C35-0014-46C58CD04C8A}"/>
-              </a:ext>
-            </a:extLst>
-          </p:cNvPr>
-          <p:cNvSpPr/>
-          <p:nvPr/>
-        </p:nvSpPr>
-        <p:spPr>
-          <a:xfrm>
-            <a:off x="9316656" y="216000"/>
-            <a:ext cx="457200" cy="432000"/>
-          </a:xfrm>
-          <a:prstGeom prst="rect">
-            <a:avLst/>
-          </a:prstGeom>
-          <a:noFill/>
-          <a:ln w="38100">
-            <a:solidFill>
-              <a:srgbClr val="FF0000"/>
-            </a:solidFill>
-          </a:ln>
-        </p:spPr>
-        <p:style>
-          <a:lnRef idx="2">
-            <a:schemeClr val="accent1">
-              <a:shade val="15000"/>
-            </a:schemeClr>
-          </a:lnRef>
-          <a:fillRef idx="1">
-            <a:schemeClr val="accent1"/>
-          </a:fillRef>
-          <a:effectRef idx="0">
-            <a:schemeClr val="accent1"/>
-          </a:effectRef>
-          <a:fontRef idx="minor">
-            <a:schemeClr val="lt1"/>
-          </a:fontRef>
-        </p:style>
-        <p:txBody>
-          <a:bodyPr rtlCol="0" anchor="ctr"/>
-          <a:lstStyle/>
-          <a:p>
-            <a:pPr algn="ctr"/>
-            <a:endParaRPr lang="en-US">
-              <a:ln w="0"/>
-              <a:solidFill>
-                <a:schemeClr val="tx1"/>
-              </a:solidFill>
-              <a:effectLst>
-                <a:outerShdw blurRad="38100" dist="19050" dir="2700000" algn="tl" rotWithShape="0">
-                  <a:schemeClr val="dk1">
-                    <a:alpha val="40000"/>
-                  </a:schemeClr>
-                </a:outerShdw>
-              </a:effectLst>
-            </a:endParaRPr>
-          </a:p>
-        </p:txBody>
-      </p:sp>
-      <p:sp>
-        <p:nvSpPr>
-          <p:cNvPr id="17" name="Rectangle 16">
-            <a:extLst>
-              <a:ext uri="{FF2B5EF4-FFF2-40B4-BE49-F238E27FC236}">
-                <a16:creationId xmlns:a16="http://schemas.microsoft.com/office/drawing/2014/main" id="{DC3D1C54-23C5-BAF7-DF50-16DF8B60CF66}"/>
-              </a:ext>
-            </a:extLst>
-          </p:cNvPr>
-          <p:cNvSpPr/>
-          <p:nvPr/>
-        </p:nvSpPr>
-        <p:spPr>
-          <a:xfrm>
-            <a:off x="9848507" y="216000"/>
-            <a:ext cx="286093" cy="432000"/>
-          </a:xfrm>
-          <a:prstGeom prst="rect">
-            <a:avLst/>
-          </a:prstGeom>
-          <a:noFill/>
-          <a:ln w="38100">
-            <a:solidFill>
-              <a:srgbClr val="FF0000"/>
-            </a:solidFill>
-          </a:ln>
-        </p:spPr>
-        <p:style>
-          <a:lnRef idx="2">
-            <a:schemeClr val="accent1">
-              <a:shade val="15000"/>
-            </a:schemeClr>
-          </a:lnRef>
-          <a:fillRef idx="1">
-            <a:schemeClr val="accent1"/>
-          </a:fillRef>
-          <a:effectRef idx="0">
-            <a:schemeClr val="accent1"/>
-          </a:effectRef>
-          <a:fontRef idx="minor">
-            <a:schemeClr val="lt1"/>
-          </a:fontRef>
-        </p:style>
-        <p:txBody>
-          <a:bodyPr rtlCol="0" anchor="ctr"/>
-          <a:lstStyle/>
-          <a:p>
-            <a:pPr algn="ctr"/>
-            <a:endParaRPr lang="en-US">
-              <a:ln w="0"/>
-              <a:solidFill>
-                <a:schemeClr val="tx1"/>
-              </a:solidFill>
-              <a:effectLst>
-                <a:outerShdw blurRad="38100" dist="19050" dir="2700000" algn="tl" rotWithShape="0">
-                  <a:schemeClr val="dk1">
-                    <a:alpha val="40000"/>
-                  </a:schemeClr>
-                </a:outerShdw>
-              </a:effectLst>
-            </a:endParaRPr>
-          </a:p>
-        </p:txBody>
-      </p:sp>
-      <p:sp>
-        <p:nvSpPr>
-          <p:cNvPr id="2" name="Rectangle 1">
-            <a:extLst>
-              <a:ext uri="{FF2B5EF4-FFF2-40B4-BE49-F238E27FC236}">
-                <a16:creationId xmlns:a16="http://schemas.microsoft.com/office/drawing/2014/main" id="{FE3672EF-3DAF-C198-9141-FDF246494426}"/>
-              </a:ext>
-            </a:extLst>
-          </p:cNvPr>
-          <p:cNvSpPr/>
-          <p:nvPr/>
-        </p:nvSpPr>
-        <p:spPr>
-          <a:xfrm>
-            <a:off x="10215520" y="216000"/>
-            <a:ext cx="286213" cy="432000"/>
-          </a:xfrm>
-          <a:prstGeom prst="rect">
-            <a:avLst/>
-          </a:prstGeom>
-          <a:noFill/>
-          <a:ln w="38100">
-            <a:solidFill>
-              <a:srgbClr val="FF0000"/>
-            </a:solidFill>
-          </a:ln>
-        </p:spPr>
-        <p:style>
-          <a:lnRef idx="2">
-            <a:schemeClr val="accent1">
-              <a:shade val="15000"/>
-            </a:schemeClr>
-          </a:lnRef>
-          <a:fillRef idx="1">
-            <a:schemeClr val="accent1"/>
-          </a:fillRef>
-          <a:effectRef idx="0">
-            <a:schemeClr val="accent1"/>
-          </a:effectRef>
-          <a:fontRef idx="minor">
-            <a:schemeClr val="lt1"/>
-          </a:fontRef>
-        </p:style>
-        <p:txBody>
-          <a:bodyPr rtlCol="0" anchor="ctr"/>
-          <a:lstStyle/>
-          <a:p>
-            <a:pPr algn="ctr"/>
-            <a:endParaRPr lang="en-US">
-              <a:ln w="0"/>
-              <a:solidFill>
-                <a:schemeClr val="tx1"/>
-              </a:solidFill>
-              <a:effectLst>
-                <a:outerShdw blurRad="38100" dist="19050" dir="2700000" algn="tl" rotWithShape="0">
-                  <a:schemeClr val="dk1">
-                    <a:alpha val="40000"/>
-                  </a:schemeClr>
-                </a:outerShdw>
-              </a:effectLst>
-            </a:endParaRPr>
-          </a:p>
-        </p:txBody>
-      </p:sp>
-      <p:sp>
-        <p:nvSpPr>
-          <p:cNvPr id="4" name="Rectangle 3">
-            <a:extLst>
-              <a:ext uri="{FF2B5EF4-FFF2-40B4-BE49-F238E27FC236}">
-                <a16:creationId xmlns:a16="http://schemas.microsoft.com/office/drawing/2014/main" id="{55F31252-F204-60C8-FB1F-4DD70CEEED95}"/>
-              </a:ext>
-            </a:extLst>
-          </p:cNvPr>
-          <p:cNvSpPr/>
-          <p:nvPr/>
-        </p:nvSpPr>
-        <p:spPr>
-          <a:xfrm>
-            <a:off x="10596767" y="216000"/>
-            <a:ext cx="286213" cy="432000"/>
-          </a:xfrm>
-          <a:prstGeom prst="rect">
-            <a:avLst/>
-          </a:prstGeom>
-          <a:noFill/>
-          <a:ln w="38100">
-            <a:solidFill>
-              <a:srgbClr val="FF0000"/>
-            </a:solidFill>
-          </a:ln>
-        </p:spPr>
-        <p:style>
-          <a:lnRef idx="2">
-            <a:schemeClr val="accent1">
-              <a:shade val="15000"/>
-            </a:schemeClr>
-          </a:lnRef>
-          <a:fillRef idx="1">
-            <a:schemeClr val="accent1"/>
-          </a:fillRef>
-          <a:effectRef idx="0">
-            <a:schemeClr val="accent1"/>
-          </a:effectRef>
-          <a:fontRef idx="minor">
-            <a:schemeClr val="lt1"/>
-          </a:fontRef>
-        </p:style>
-        <p:txBody>
-          <a:bodyPr rtlCol="0" anchor="ctr"/>
-          <a:lstStyle/>
-          <a:p>
-            <a:pPr algn="ctr"/>
-            <a:endParaRPr lang="en-US">
-              <a:ln w="0"/>
-              <a:solidFill>
-                <a:schemeClr val="tx1"/>
-              </a:solidFill>
-              <a:effectLst>
-                <a:outerShdw blurRad="38100" dist="19050" dir="2700000" algn="tl" rotWithShape="0">
-                  <a:schemeClr val="dk1">
-                    <a:alpha val="40000"/>
-                  </a:schemeClr>
-                </a:outerShdw>
-              </a:effectLst>
-            </a:endParaRPr>
-          </a:p>
-        </p:txBody>
-      </p:sp>
-      <p:sp>
-        <p:nvSpPr>
-          <p:cNvPr id="6" name="TextBox 5">
-            <a:extLst>
-              <a:ext uri="{FF2B5EF4-FFF2-40B4-BE49-F238E27FC236}">
-                <a16:creationId xmlns:a16="http://schemas.microsoft.com/office/drawing/2014/main" id="{EB222A99-1A52-EE89-5996-96FF2E6428F0}"/>
-              </a:ext>
-            </a:extLst>
-          </p:cNvPr>
-          <p:cNvSpPr txBox="1"/>
-          <p:nvPr/>
-        </p:nvSpPr>
-        <p:spPr>
-          <a:xfrm>
-            <a:off x="10512490" y="612000"/>
-            <a:ext cx="308098" cy="369332"/>
-          </a:xfrm>
-          <a:prstGeom prst="rect">
-            <a:avLst/>
-          </a:prstGeom>
-          <a:noFill/>
-        </p:spPr>
-        <p:txBody>
-          <a:bodyPr wrap="square" rtlCol="0">
-            <a:spAutoFit/>
-          </a:bodyPr>
-          <a:lstStyle/>
-          <a:p>
-            <a:r>
-              <a:rPr lang="en-US" dirty="0">
-                <a:solidFill>
-                  <a:srgbClr val="FF0000"/>
-                </a:solidFill>
-              </a:rPr>
-              <a:t>8</a:t>
-            </a:r>
-          </a:p>
-        </p:txBody>
-      </p:sp>
-    </p:spTree>
-    <p:extLst>
-      <p:ext uri="{BB962C8B-B14F-4D97-AF65-F5344CB8AC3E}">
-        <p14:creationId xmlns:p14="http://schemas.microsoft.com/office/powerpoint/2010/main" val="1838129098"/>
-      </p:ext>
-    </p:extLst>
-  </p:cSld>
-  <p:clrMapOvr>
-    <a:masterClrMapping/>
-  </p:clrMapOvr>
-</p:sld>
-</file>
-
-<file path=ppt/slides/slide5.xml><?xml version="1.0" encoding="utf-8"?>
+<file path=ppt/slides/slide15.xml><?xml version="1.0" encoding="utf-8"?>
 <p:sld xmlns:a="http://schemas.openxmlformats.org/drawingml/2006/main" xmlns:r="http://schemas.openxmlformats.org/officeDocument/2006/relationships" xmlns:p="http://schemas.openxmlformats.org/presentationml/2006/main">
   <p:cSld>
     <p:spTree>
@@ -6534,7 +5920,7 @@
 </p:sld>
 </file>
 
-<file path=ppt/slides/slide6.xml><?xml version="1.0" encoding="utf-8"?>
+<file path=ppt/slides/slide16.xml><?xml version="1.0" encoding="utf-8"?>
 <p:sld xmlns:a="http://schemas.openxmlformats.org/drawingml/2006/main" xmlns:r="http://schemas.openxmlformats.org/officeDocument/2006/relationships" xmlns:p="http://schemas.openxmlformats.org/presentationml/2006/main">
   <p:cSld>
     <p:spTree>
@@ -7007,6 +6393,2140 @@
     <p:extLst>
       <p:ext uri="{BB962C8B-B14F-4D97-AF65-F5344CB8AC3E}">
         <p14:creationId xmlns:p14="http://schemas.microsoft.com/office/powerpoint/2010/main" val="2371670190"/>
+      </p:ext>
+    </p:extLst>
+  </p:cSld>
+  <p:clrMapOvr>
+    <a:masterClrMapping/>
+  </p:clrMapOvr>
+</p:sld>
+</file>
+
+<file path=ppt/slides/slide2.xml><?xml version="1.0" encoding="utf-8"?>
+<p:sld xmlns:a="http://schemas.openxmlformats.org/drawingml/2006/main" xmlns:r="http://schemas.openxmlformats.org/officeDocument/2006/relationships" xmlns:p="http://schemas.openxmlformats.org/presentationml/2006/main">
+  <p:cSld>
+    <p:spTree>
+      <p:nvGrpSpPr>
+        <p:cNvPr id="1" name=""/>
+        <p:cNvGrpSpPr/>
+        <p:nvPr/>
+      </p:nvGrpSpPr>
+      <p:grpSpPr>
+        <a:xfrm>
+          <a:off x="0" y="0"/>
+          <a:ext cx="0" cy="0"/>
+          <a:chOff x="0" y="0"/>
+          <a:chExt cx="0" cy="0"/>
+        </a:xfrm>
+      </p:grpSpPr>
+      <p:pic>
+        <p:nvPicPr>
+          <p:cNvPr id="5" name="Picture 4">
+            <a:extLst>
+              <a:ext uri="{FF2B5EF4-FFF2-40B4-BE49-F238E27FC236}">
+                <a16:creationId xmlns:a16="http://schemas.microsoft.com/office/drawing/2014/main" id="{B97F010C-709D-B042-411F-8C6D7807055A}"/>
+              </a:ext>
+            </a:extLst>
+          </p:cNvPr>
+          <p:cNvPicPr>
+            <a:picLocks noChangeAspect="1"/>
+          </p:cNvPicPr>
+          <p:nvPr/>
+        </p:nvPicPr>
+        <p:blipFill>
+          <a:blip r:embed="rId2"/>
+          <a:stretch>
+            <a:fillRect/>
+          </a:stretch>
+        </p:blipFill>
+        <p:spPr>
+          <a:xfrm>
+            <a:off x="461176" y="113837"/>
+            <a:ext cx="11269648" cy="6630325"/>
+          </a:xfrm>
+          <a:prstGeom prst="rect">
+            <a:avLst/>
+          </a:prstGeom>
+        </p:spPr>
+      </p:pic>
+    </p:spTree>
+    <p:extLst>
+      <p:ext uri="{BB962C8B-B14F-4D97-AF65-F5344CB8AC3E}">
+        <p14:creationId xmlns:p14="http://schemas.microsoft.com/office/powerpoint/2010/main" val="837334526"/>
+      </p:ext>
+    </p:extLst>
+  </p:cSld>
+  <p:clrMapOvr>
+    <a:masterClrMapping/>
+  </p:clrMapOvr>
+</p:sld>
+</file>
+
+<file path=ppt/slides/slide3.xml><?xml version="1.0" encoding="utf-8"?>
+<p:sld xmlns:a="http://schemas.openxmlformats.org/drawingml/2006/main" xmlns:r="http://schemas.openxmlformats.org/officeDocument/2006/relationships" xmlns:p="http://schemas.openxmlformats.org/presentationml/2006/main">
+  <p:cSld>
+    <p:spTree>
+      <p:nvGrpSpPr>
+        <p:cNvPr id="1" name="">
+          <a:extLst>
+            <a:ext uri="{FF2B5EF4-FFF2-40B4-BE49-F238E27FC236}">
+              <a16:creationId xmlns:a16="http://schemas.microsoft.com/office/drawing/2014/main" id="{CC9CDA98-D998-91F5-574C-47F56ABECB36}"/>
+            </a:ext>
+          </a:extLst>
+        </p:cNvPr>
+        <p:cNvGrpSpPr/>
+        <p:nvPr/>
+      </p:nvGrpSpPr>
+      <p:grpSpPr>
+        <a:xfrm>
+          <a:off x="0" y="0"/>
+          <a:ext cx="0" cy="0"/>
+          <a:chOff x="0" y="0"/>
+          <a:chExt cx="0" cy="0"/>
+        </a:xfrm>
+      </p:grpSpPr>
+      <p:sp>
+        <p:nvSpPr>
+          <p:cNvPr id="2" name="Title 1">
+            <a:extLst>
+              <a:ext uri="{FF2B5EF4-FFF2-40B4-BE49-F238E27FC236}">
+                <a16:creationId xmlns:a16="http://schemas.microsoft.com/office/drawing/2014/main" id="{A71A57C0-842D-C71F-F8BD-D1B4C551C078}"/>
+              </a:ext>
+            </a:extLst>
+          </p:cNvPr>
+          <p:cNvSpPr>
+            <a:spLocks noGrp="1"/>
+          </p:cNvSpPr>
+          <p:nvPr>
+            <p:ph type="title"/>
+          </p:nvPr>
+        </p:nvSpPr>
+        <p:spPr/>
+        <p:txBody>
+          <a:bodyPr/>
+          <a:lstStyle/>
+          <a:p>
+            <a:r>
+              <a:rPr lang="en-US" dirty="0"/>
+              <a:t>Login Page Image</a:t>
+            </a:r>
+          </a:p>
+        </p:txBody>
+      </p:sp>
+      <p:sp>
+        <p:nvSpPr>
+          <p:cNvPr id="3" name="Content Placeholder 2">
+            <a:extLst>
+              <a:ext uri="{FF2B5EF4-FFF2-40B4-BE49-F238E27FC236}">
+                <a16:creationId xmlns:a16="http://schemas.microsoft.com/office/drawing/2014/main" id="{798A6EAA-9187-426B-CD4A-A875F433C0DD}"/>
+              </a:ext>
+            </a:extLst>
+          </p:cNvPr>
+          <p:cNvSpPr>
+            <a:spLocks noGrp="1"/>
+          </p:cNvSpPr>
+          <p:nvPr>
+            <p:ph idx="1"/>
+          </p:nvPr>
+        </p:nvSpPr>
+        <p:spPr/>
+        <p:txBody>
+          <a:bodyPr/>
+          <a:lstStyle/>
+          <a:p>
+            <a:r>
+              <a:rPr lang="en-US" dirty="0"/>
+              <a:t>Unmarked:  /docs/studio/assets/user/login-page.jpg</a:t>
+            </a:r>
+          </a:p>
+        </p:txBody>
+      </p:sp>
+    </p:spTree>
+    <p:extLst>
+      <p:ext uri="{BB962C8B-B14F-4D97-AF65-F5344CB8AC3E}">
+        <p14:creationId xmlns:p14="http://schemas.microsoft.com/office/powerpoint/2010/main" val="4126708747"/>
+      </p:ext>
+    </p:extLst>
+  </p:cSld>
+  <p:clrMapOvr>
+    <a:masterClrMapping/>
+  </p:clrMapOvr>
+</p:sld>
+</file>
+
+<file path=ppt/slides/slide4.xml><?xml version="1.0" encoding="utf-8"?>
+<p:sld xmlns:a="http://schemas.openxmlformats.org/drawingml/2006/main" xmlns:r="http://schemas.openxmlformats.org/officeDocument/2006/relationships" xmlns:p="http://schemas.openxmlformats.org/presentationml/2006/main">
+  <p:cSld>
+    <p:spTree>
+      <p:nvGrpSpPr>
+        <p:cNvPr id="1" name=""/>
+        <p:cNvGrpSpPr/>
+        <p:nvPr/>
+      </p:nvGrpSpPr>
+      <p:grpSpPr>
+        <a:xfrm>
+          <a:off x="0" y="0"/>
+          <a:ext cx="0" cy="0"/>
+          <a:chOff x="0" y="0"/>
+          <a:chExt cx="0" cy="0"/>
+        </a:xfrm>
+      </p:grpSpPr>
+      <p:pic>
+        <p:nvPicPr>
+          <p:cNvPr id="5" name="Picture 4">
+            <a:extLst>
+              <a:ext uri="{FF2B5EF4-FFF2-40B4-BE49-F238E27FC236}">
+                <a16:creationId xmlns:a16="http://schemas.microsoft.com/office/drawing/2014/main" id="{EE3CF5A9-3CE0-2AF4-7555-88C5EA31DB16}"/>
+              </a:ext>
+            </a:extLst>
+          </p:cNvPr>
+          <p:cNvPicPr>
+            <a:picLocks noChangeAspect="1"/>
+          </p:cNvPicPr>
+          <p:nvPr/>
+        </p:nvPicPr>
+        <p:blipFill>
+          <a:blip r:embed="rId2"/>
+          <a:srcRect l="8031" t="4167" r="8375" b="5139"/>
+          <a:stretch>
+            <a:fillRect/>
+          </a:stretch>
+        </p:blipFill>
+        <p:spPr>
+          <a:xfrm>
+            <a:off x="3771899" y="285750"/>
+            <a:ext cx="4629151" cy="6219825"/>
+          </a:xfrm>
+          <a:prstGeom prst="rect">
+            <a:avLst/>
+          </a:prstGeom>
+        </p:spPr>
+      </p:pic>
+      <p:pic>
+        <p:nvPicPr>
+          <p:cNvPr id="7" name="Picture 6" descr="A screenshot of a login form&#10;&#10;AI-generated content may be incorrect.">
+            <a:extLst>
+              <a:ext uri="{FF2B5EF4-FFF2-40B4-BE49-F238E27FC236}">
+                <a16:creationId xmlns:a16="http://schemas.microsoft.com/office/drawing/2014/main" id="{A91B77A1-216D-BE63-2E29-DB5B203973D7}"/>
+              </a:ext>
+            </a:extLst>
+          </p:cNvPr>
+          <p:cNvPicPr>
+            <a:picLocks noChangeAspect="1"/>
+          </p:cNvPicPr>
+          <p:nvPr/>
+        </p:nvPicPr>
+        <p:blipFill>
+          <a:blip r:embed="rId3">
+            <a:extLst>
+              <a:ext uri="{28A0092B-C50C-407E-A947-70E740481C1C}">
+                <a14:useLocalDpi xmlns:a14="http://schemas.microsoft.com/office/drawing/2010/main" val="0"/>
+              </a:ext>
+            </a:extLst>
+          </a:blip>
+          <a:stretch>
+            <a:fillRect/>
+          </a:stretch>
+        </p:blipFill>
+        <p:spPr>
+          <a:xfrm>
+            <a:off x="3480735" y="0"/>
+            <a:ext cx="5230530" cy="6858000"/>
+          </a:xfrm>
+          <a:prstGeom prst="rect">
+            <a:avLst/>
+          </a:prstGeom>
+        </p:spPr>
+      </p:pic>
+    </p:spTree>
+    <p:extLst>
+      <p:ext uri="{BB962C8B-B14F-4D97-AF65-F5344CB8AC3E}">
+        <p14:creationId xmlns:p14="http://schemas.microsoft.com/office/powerpoint/2010/main" val="3144287896"/>
+      </p:ext>
+    </p:extLst>
+  </p:cSld>
+  <p:clrMapOvr>
+    <a:masterClrMapping/>
+  </p:clrMapOvr>
+</p:sld>
+</file>
+
+<file path=ppt/slides/slide5.xml><?xml version="1.0" encoding="utf-8"?>
+<p:sld xmlns:a="http://schemas.openxmlformats.org/drawingml/2006/main" xmlns:r="http://schemas.openxmlformats.org/officeDocument/2006/relationships" xmlns:p="http://schemas.openxmlformats.org/presentationml/2006/main">
+  <p:cSld>
+    <p:spTree>
+      <p:nvGrpSpPr>
+        <p:cNvPr id="1" name=""/>
+        <p:cNvGrpSpPr/>
+        <p:nvPr/>
+      </p:nvGrpSpPr>
+      <p:grpSpPr>
+        <a:xfrm>
+          <a:off x="0" y="0"/>
+          <a:ext cx="0" cy="0"/>
+          <a:chOff x="0" y="0"/>
+          <a:chExt cx="0" cy="0"/>
+        </a:xfrm>
+      </p:grpSpPr>
+      <p:sp>
+        <p:nvSpPr>
+          <p:cNvPr id="2" name="Title 1">
+            <a:extLst>
+              <a:ext uri="{FF2B5EF4-FFF2-40B4-BE49-F238E27FC236}">
+                <a16:creationId xmlns:a16="http://schemas.microsoft.com/office/drawing/2014/main" id="{16BDF30B-6797-CA80-5FF9-1A95CBDF6F67}"/>
+              </a:ext>
+            </a:extLst>
+          </p:cNvPr>
+          <p:cNvSpPr>
+            <a:spLocks noGrp="1"/>
+          </p:cNvSpPr>
+          <p:nvPr>
+            <p:ph type="title"/>
+          </p:nvPr>
+        </p:nvSpPr>
+        <p:spPr/>
+        <p:txBody>
+          <a:bodyPr/>
+          <a:lstStyle/>
+          <a:p>
+            <a:r>
+              <a:rPr lang="en-US" dirty="0"/>
+              <a:t>Home Page Image</a:t>
+            </a:r>
+          </a:p>
+        </p:txBody>
+      </p:sp>
+      <p:sp>
+        <p:nvSpPr>
+          <p:cNvPr id="3" name="Content Placeholder 2">
+            <a:extLst>
+              <a:ext uri="{FF2B5EF4-FFF2-40B4-BE49-F238E27FC236}">
+                <a16:creationId xmlns:a16="http://schemas.microsoft.com/office/drawing/2014/main" id="{39B1F5AD-648D-9504-BDB3-13C31619395B}"/>
+              </a:ext>
+            </a:extLst>
+          </p:cNvPr>
+          <p:cNvSpPr>
+            <a:spLocks noGrp="1"/>
+          </p:cNvSpPr>
+          <p:nvPr>
+            <p:ph idx="1"/>
+          </p:nvPr>
+        </p:nvSpPr>
+        <p:spPr/>
+        <p:txBody>
+          <a:bodyPr/>
+          <a:lstStyle/>
+          <a:p>
+            <a:r>
+              <a:rPr lang="en-US" dirty="0"/>
+              <a:t>Unmarked:  /docs/studio/assets/user/home-page.png</a:t>
+            </a:r>
+          </a:p>
+          <a:p>
+            <a:r>
+              <a:rPr lang="en-US" dirty="0"/>
+              <a:t>1005 x 660 pixels</a:t>
+            </a:r>
+          </a:p>
+          <a:p>
+            <a:r>
+              <a:rPr lang="en-US" dirty="0"/>
+              <a:t>3 variants</a:t>
+            </a:r>
+          </a:p>
+        </p:txBody>
+      </p:sp>
+    </p:spTree>
+    <p:extLst>
+      <p:ext uri="{BB962C8B-B14F-4D97-AF65-F5344CB8AC3E}">
+        <p14:creationId xmlns:p14="http://schemas.microsoft.com/office/powerpoint/2010/main" val="732937030"/>
+      </p:ext>
+    </p:extLst>
+  </p:cSld>
+  <p:clrMapOvr>
+    <a:masterClrMapping/>
+  </p:clrMapOvr>
+</p:sld>
+</file>
+
+<file path=ppt/slides/slide6.xml><?xml version="1.0" encoding="utf-8"?>
+<p:sld xmlns:a="http://schemas.openxmlformats.org/drawingml/2006/main" xmlns:r="http://schemas.openxmlformats.org/officeDocument/2006/relationships" xmlns:p="http://schemas.openxmlformats.org/presentationml/2006/main">
+  <p:cSld>
+    <p:spTree>
+      <p:nvGrpSpPr>
+        <p:cNvPr id="1" name=""/>
+        <p:cNvGrpSpPr/>
+        <p:nvPr/>
+      </p:nvGrpSpPr>
+      <p:grpSpPr>
+        <a:xfrm>
+          <a:off x="0" y="0"/>
+          <a:ext cx="0" cy="0"/>
+          <a:chOff x="0" y="0"/>
+          <a:chExt cx="0" cy="0"/>
+        </a:xfrm>
+      </p:grpSpPr>
+      <p:pic>
+        <p:nvPicPr>
+          <p:cNvPr id="3" name="Picture 2">
+            <a:extLst>
+              <a:ext uri="{FF2B5EF4-FFF2-40B4-BE49-F238E27FC236}">
+                <a16:creationId xmlns:a16="http://schemas.microsoft.com/office/drawing/2014/main" id="{AE95041C-0E5F-3A58-656D-CFCFA449933C}"/>
+              </a:ext>
+            </a:extLst>
+          </p:cNvPr>
+          <p:cNvPicPr>
+            <a:picLocks noChangeAspect="1"/>
+          </p:cNvPicPr>
+          <p:nvPr/>
+        </p:nvPicPr>
+        <p:blipFill>
+          <a:blip r:embed="rId3"/>
+          <a:srcRect l="119"/>
+          <a:stretch>
+            <a:fillRect/>
+          </a:stretch>
+        </p:blipFill>
+        <p:spPr>
+          <a:xfrm>
+            <a:off x="1107890" y="0"/>
+            <a:ext cx="9988122" cy="6858000"/>
+          </a:xfrm>
+          <a:prstGeom prst="rect">
+            <a:avLst/>
+          </a:prstGeom>
+        </p:spPr>
+      </p:pic>
+      <p:sp>
+        <p:nvSpPr>
+          <p:cNvPr id="7" name="Rectangle 6">
+            <a:extLst>
+              <a:ext uri="{FF2B5EF4-FFF2-40B4-BE49-F238E27FC236}">
+                <a16:creationId xmlns:a16="http://schemas.microsoft.com/office/drawing/2014/main" id="{7A08FA56-6667-2FEB-DFC0-5795598FD922}"/>
+              </a:ext>
+            </a:extLst>
+          </p:cNvPr>
+          <p:cNvSpPr/>
+          <p:nvPr/>
+        </p:nvSpPr>
+        <p:spPr>
+          <a:xfrm>
+            <a:off x="1095987" y="-9435"/>
+            <a:ext cx="10000023" cy="369332"/>
+          </a:xfrm>
+          <a:prstGeom prst="rect">
+            <a:avLst/>
+          </a:prstGeom>
+          <a:noFill/>
+          <a:ln w="38100">
+            <a:solidFill>
+              <a:srgbClr val="FF0000"/>
+            </a:solidFill>
+          </a:ln>
+        </p:spPr>
+        <p:style>
+          <a:lnRef idx="2">
+            <a:schemeClr val="accent1">
+              <a:shade val="15000"/>
+            </a:schemeClr>
+          </a:lnRef>
+          <a:fillRef idx="1">
+            <a:schemeClr val="accent1"/>
+          </a:fillRef>
+          <a:effectRef idx="0">
+            <a:schemeClr val="accent1"/>
+          </a:effectRef>
+          <a:fontRef idx="minor">
+            <a:schemeClr val="lt1"/>
+          </a:fontRef>
+        </p:style>
+        <p:txBody>
+          <a:bodyPr rtlCol="0" anchor="ctr"/>
+          <a:lstStyle/>
+          <a:p>
+            <a:pPr algn="ctr"/>
+            <a:endParaRPr lang="en-US">
+              <a:ln w="0"/>
+              <a:solidFill>
+                <a:schemeClr val="tx1"/>
+              </a:solidFill>
+              <a:effectLst>
+                <a:outerShdw blurRad="38100" dist="19050" dir="2700000" algn="tl" rotWithShape="0">
+                  <a:schemeClr val="dk1">
+                    <a:alpha val="40000"/>
+                  </a:schemeClr>
+                </a:outerShdw>
+              </a:effectLst>
+            </a:endParaRPr>
+          </a:p>
+        </p:txBody>
+      </p:sp>
+      <p:sp>
+        <p:nvSpPr>
+          <p:cNvPr id="8" name="TextBox 7">
+            <a:extLst>
+              <a:ext uri="{FF2B5EF4-FFF2-40B4-BE49-F238E27FC236}">
+                <a16:creationId xmlns:a16="http://schemas.microsoft.com/office/drawing/2014/main" id="{9B1E6C77-DB95-5CB9-F5BE-10B04E4B3331}"/>
+              </a:ext>
+            </a:extLst>
+          </p:cNvPr>
+          <p:cNvSpPr txBox="1"/>
+          <p:nvPr/>
+        </p:nvSpPr>
+        <p:spPr>
+          <a:xfrm>
+            <a:off x="799792" y="16586"/>
+            <a:ext cx="308098" cy="369332"/>
+          </a:xfrm>
+          <a:prstGeom prst="rect">
+            <a:avLst/>
+          </a:prstGeom>
+          <a:noFill/>
+        </p:spPr>
+        <p:txBody>
+          <a:bodyPr wrap="none" rtlCol="0">
+            <a:spAutoFit/>
+          </a:bodyPr>
+          <a:lstStyle/>
+          <a:p>
+            <a:r>
+              <a:rPr lang="en-US" dirty="0">
+                <a:solidFill>
+                  <a:srgbClr val="FF0000"/>
+                </a:solidFill>
+              </a:rPr>
+              <a:t>1</a:t>
+            </a:r>
+          </a:p>
+        </p:txBody>
+      </p:sp>
+      <p:sp>
+        <p:nvSpPr>
+          <p:cNvPr id="9" name="Rectangle 8">
+            <a:extLst>
+              <a:ext uri="{FF2B5EF4-FFF2-40B4-BE49-F238E27FC236}">
+                <a16:creationId xmlns:a16="http://schemas.microsoft.com/office/drawing/2014/main" id="{6D48391C-EA04-C850-11E2-9DD29AEEAAE8}"/>
+              </a:ext>
+            </a:extLst>
+          </p:cNvPr>
+          <p:cNvSpPr/>
+          <p:nvPr/>
+        </p:nvSpPr>
+        <p:spPr>
+          <a:xfrm>
+            <a:off x="4119856" y="-54543"/>
+            <a:ext cx="1743615" cy="535310"/>
+          </a:xfrm>
+          <a:prstGeom prst="rect">
+            <a:avLst/>
+          </a:prstGeom>
+          <a:noFill/>
+          <a:ln w="38100">
+            <a:solidFill>
+              <a:srgbClr val="FF0000"/>
+            </a:solidFill>
+          </a:ln>
+        </p:spPr>
+        <p:style>
+          <a:lnRef idx="2">
+            <a:schemeClr val="accent1">
+              <a:shade val="15000"/>
+            </a:schemeClr>
+          </a:lnRef>
+          <a:fillRef idx="1">
+            <a:schemeClr val="accent1"/>
+          </a:fillRef>
+          <a:effectRef idx="0">
+            <a:schemeClr val="accent1"/>
+          </a:effectRef>
+          <a:fontRef idx="minor">
+            <a:schemeClr val="lt1"/>
+          </a:fontRef>
+        </p:style>
+        <p:txBody>
+          <a:bodyPr rtlCol="0" anchor="ctr"/>
+          <a:lstStyle/>
+          <a:p>
+            <a:pPr algn="ctr"/>
+            <a:endParaRPr lang="en-US">
+              <a:ln w="0"/>
+              <a:solidFill>
+                <a:schemeClr val="tx1"/>
+              </a:solidFill>
+              <a:effectLst>
+                <a:outerShdw blurRad="38100" dist="19050" dir="2700000" algn="tl" rotWithShape="0">
+                  <a:schemeClr val="dk1">
+                    <a:alpha val="40000"/>
+                  </a:schemeClr>
+                </a:outerShdw>
+              </a:effectLst>
+            </a:endParaRPr>
+          </a:p>
+        </p:txBody>
+      </p:sp>
+      <p:sp>
+        <p:nvSpPr>
+          <p:cNvPr id="10" name="TextBox 9">
+            <a:extLst>
+              <a:ext uri="{FF2B5EF4-FFF2-40B4-BE49-F238E27FC236}">
+                <a16:creationId xmlns:a16="http://schemas.microsoft.com/office/drawing/2014/main" id="{79E39D9C-5B4D-15B1-CE5E-940082C00152}"/>
+              </a:ext>
+            </a:extLst>
+          </p:cNvPr>
+          <p:cNvSpPr txBox="1"/>
+          <p:nvPr/>
+        </p:nvSpPr>
+        <p:spPr>
+          <a:xfrm>
+            <a:off x="3811759" y="-9435"/>
+            <a:ext cx="308098" cy="369332"/>
+          </a:xfrm>
+          <a:prstGeom prst="rect">
+            <a:avLst/>
+          </a:prstGeom>
+          <a:noFill/>
+        </p:spPr>
+        <p:txBody>
+          <a:bodyPr wrap="none" rtlCol="0">
+            <a:spAutoFit/>
+          </a:bodyPr>
+          <a:lstStyle/>
+          <a:p>
+            <a:r>
+              <a:rPr lang="en-US" dirty="0">
+                <a:solidFill>
+                  <a:srgbClr val="FF0000"/>
+                </a:solidFill>
+              </a:rPr>
+              <a:t>2</a:t>
+            </a:r>
+          </a:p>
+        </p:txBody>
+      </p:sp>
+      <p:sp>
+        <p:nvSpPr>
+          <p:cNvPr id="11" name="Rectangle 10">
+            <a:extLst>
+              <a:ext uri="{FF2B5EF4-FFF2-40B4-BE49-F238E27FC236}">
+                <a16:creationId xmlns:a16="http://schemas.microsoft.com/office/drawing/2014/main" id="{2833DB43-D41E-B980-2962-A29C8DC3C52A}"/>
+              </a:ext>
+            </a:extLst>
+          </p:cNvPr>
+          <p:cNvSpPr/>
+          <p:nvPr/>
+        </p:nvSpPr>
+        <p:spPr>
+          <a:xfrm>
+            <a:off x="1381869" y="590143"/>
+            <a:ext cx="5292308" cy="805023"/>
+          </a:xfrm>
+          <a:prstGeom prst="rect">
+            <a:avLst/>
+          </a:prstGeom>
+          <a:noFill/>
+          <a:ln w="38100">
+            <a:solidFill>
+              <a:srgbClr val="FF0000"/>
+            </a:solidFill>
+          </a:ln>
+        </p:spPr>
+        <p:style>
+          <a:lnRef idx="2">
+            <a:schemeClr val="accent1">
+              <a:shade val="15000"/>
+            </a:schemeClr>
+          </a:lnRef>
+          <a:fillRef idx="1">
+            <a:schemeClr val="accent1"/>
+          </a:fillRef>
+          <a:effectRef idx="0">
+            <a:schemeClr val="accent1"/>
+          </a:effectRef>
+          <a:fontRef idx="minor">
+            <a:schemeClr val="lt1"/>
+          </a:fontRef>
+        </p:style>
+        <p:txBody>
+          <a:bodyPr rtlCol="0" anchor="ctr"/>
+          <a:lstStyle/>
+          <a:p>
+            <a:pPr algn="ctr"/>
+            <a:endParaRPr lang="en-US">
+              <a:ln w="0"/>
+              <a:solidFill>
+                <a:schemeClr val="tx1"/>
+              </a:solidFill>
+              <a:effectLst>
+                <a:outerShdw blurRad="38100" dist="19050" dir="2700000" algn="tl" rotWithShape="0">
+                  <a:schemeClr val="dk1">
+                    <a:alpha val="40000"/>
+                  </a:schemeClr>
+                </a:outerShdw>
+              </a:effectLst>
+            </a:endParaRPr>
+          </a:p>
+        </p:txBody>
+      </p:sp>
+      <p:sp>
+        <p:nvSpPr>
+          <p:cNvPr id="12" name="TextBox 11">
+            <a:extLst>
+              <a:ext uri="{FF2B5EF4-FFF2-40B4-BE49-F238E27FC236}">
+                <a16:creationId xmlns:a16="http://schemas.microsoft.com/office/drawing/2014/main" id="{FC04C220-DD23-CC83-B1D2-AB1922EBBA7F}"/>
+              </a:ext>
+            </a:extLst>
+          </p:cNvPr>
+          <p:cNvSpPr txBox="1"/>
+          <p:nvPr/>
+        </p:nvSpPr>
+        <p:spPr>
+          <a:xfrm>
+            <a:off x="799792" y="702462"/>
+            <a:ext cx="308098" cy="369332"/>
+          </a:xfrm>
+          <a:prstGeom prst="rect">
+            <a:avLst/>
+          </a:prstGeom>
+          <a:noFill/>
+        </p:spPr>
+        <p:txBody>
+          <a:bodyPr wrap="none" rtlCol="0">
+            <a:spAutoFit/>
+          </a:bodyPr>
+          <a:lstStyle/>
+          <a:p>
+            <a:r>
+              <a:rPr lang="en-US" dirty="0">
+                <a:solidFill>
+                  <a:srgbClr val="FF0000"/>
+                </a:solidFill>
+              </a:rPr>
+              <a:t>3</a:t>
+            </a:r>
+          </a:p>
+        </p:txBody>
+      </p:sp>
+      <p:sp>
+        <p:nvSpPr>
+          <p:cNvPr id="13" name="Rectangle 12">
+            <a:extLst>
+              <a:ext uri="{FF2B5EF4-FFF2-40B4-BE49-F238E27FC236}">
+                <a16:creationId xmlns:a16="http://schemas.microsoft.com/office/drawing/2014/main" id="{C108EFD0-0B82-6469-1709-FA5655D787C6}"/>
+              </a:ext>
+            </a:extLst>
+          </p:cNvPr>
+          <p:cNvSpPr/>
+          <p:nvPr/>
+        </p:nvSpPr>
+        <p:spPr>
+          <a:xfrm>
+            <a:off x="1399439" y="1489212"/>
+            <a:ext cx="5274738" cy="4987002"/>
+          </a:xfrm>
+          <a:prstGeom prst="rect">
+            <a:avLst/>
+          </a:prstGeom>
+          <a:noFill/>
+          <a:ln w="38100">
+            <a:solidFill>
+              <a:srgbClr val="FF0000"/>
+            </a:solidFill>
+          </a:ln>
+        </p:spPr>
+        <p:style>
+          <a:lnRef idx="2">
+            <a:schemeClr val="accent1">
+              <a:shade val="15000"/>
+            </a:schemeClr>
+          </a:lnRef>
+          <a:fillRef idx="1">
+            <a:schemeClr val="accent1"/>
+          </a:fillRef>
+          <a:effectRef idx="0">
+            <a:schemeClr val="accent1"/>
+          </a:effectRef>
+          <a:fontRef idx="minor">
+            <a:schemeClr val="lt1"/>
+          </a:fontRef>
+        </p:style>
+        <p:txBody>
+          <a:bodyPr rtlCol="0" anchor="ctr"/>
+          <a:lstStyle/>
+          <a:p>
+            <a:pPr algn="ctr"/>
+            <a:endParaRPr lang="en-US">
+              <a:ln w="0"/>
+              <a:solidFill>
+                <a:schemeClr val="tx1"/>
+              </a:solidFill>
+              <a:effectLst>
+                <a:outerShdw blurRad="38100" dist="19050" dir="2700000" algn="tl" rotWithShape="0">
+                  <a:schemeClr val="dk1">
+                    <a:alpha val="40000"/>
+                  </a:schemeClr>
+                </a:outerShdw>
+              </a:effectLst>
+            </a:endParaRPr>
+          </a:p>
+        </p:txBody>
+      </p:sp>
+      <p:sp>
+        <p:nvSpPr>
+          <p:cNvPr id="14" name="TextBox 13">
+            <a:extLst>
+              <a:ext uri="{FF2B5EF4-FFF2-40B4-BE49-F238E27FC236}">
+                <a16:creationId xmlns:a16="http://schemas.microsoft.com/office/drawing/2014/main" id="{A846B7CF-E7D2-BC5C-2705-E663D974A7E2}"/>
+              </a:ext>
+            </a:extLst>
+          </p:cNvPr>
+          <p:cNvSpPr txBox="1"/>
+          <p:nvPr/>
+        </p:nvSpPr>
+        <p:spPr>
+          <a:xfrm>
+            <a:off x="793841" y="1489212"/>
+            <a:ext cx="308098" cy="369332"/>
+          </a:xfrm>
+          <a:prstGeom prst="rect">
+            <a:avLst/>
+          </a:prstGeom>
+          <a:noFill/>
+        </p:spPr>
+        <p:txBody>
+          <a:bodyPr wrap="none" rtlCol="0">
+            <a:spAutoFit/>
+          </a:bodyPr>
+          <a:lstStyle/>
+          <a:p>
+            <a:r>
+              <a:rPr lang="en-US" dirty="0">
+                <a:solidFill>
+                  <a:srgbClr val="FF0000"/>
+                </a:solidFill>
+              </a:rPr>
+              <a:t>4</a:t>
+            </a:r>
+          </a:p>
+        </p:txBody>
+      </p:sp>
+      <p:sp>
+        <p:nvSpPr>
+          <p:cNvPr id="15" name="Rectangle 14">
+            <a:extLst>
+              <a:ext uri="{FF2B5EF4-FFF2-40B4-BE49-F238E27FC236}">
+                <a16:creationId xmlns:a16="http://schemas.microsoft.com/office/drawing/2014/main" id="{12D14BB5-5053-B952-61E5-BD8A6FC3A4AD}"/>
+              </a:ext>
+            </a:extLst>
+          </p:cNvPr>
+          <p:cNvSpPr/>
+          <p:nvPr/>
+        </p:nvSpPr>
+        <p:spPr>
+          <a:xfrm>
+            <a:off x="6835250" y="590143"/>
+            <a:ext cx="4019302" cy="1391044"/>
+          </a:xfrm>
+          <a:prstGeom prst="rect">
+            <a:avLst/>
+          </a:prstGeom>
+          <a:noFill/>
+          <a:ln w="38100">
+            <a:solidFill>
+              <a:srgbClr val="FF0000"/>
+            </a:solidFill>
+          </a:ln>
+        </p:spPr>
+        <p:style>
+          <a:lnRef idx="2">
+            <a:schemeClr val="accent1">
+              <a:shade val="15000"/>
+            </a:schemeClr>
+          </a:lnRef>
+          <a:fillRef idx="1">
+            <a:schemeClr val="accent1"/>
+          </a:fillRef>
+          <a:effectRef idx="0">
+            <a:schemeClr val="accent1"/>
+          </a:effectRef>
+          <a:fontRef idx="minor">
+            <a:schemeClr val="lt1"/>
+          </a:fontRef>
+        </p:style>
+        <p:txBody>
+          <a:bodyPr rtlCol="0" anchor="ctr"/>
+          <a:lstStyle/>
+          <a:p>
+            <a:pPr algn="ctr"/>
+            <a:endParaRPr lang="en-US">
+              <a:ln w="0"/>
+              <a:solidFill>
+                <a:schemeClr val="tx1"/>
+              </a:solidFill>
+              <a:effectLst>
+                <a:outerShdw blurRad="38100" dist="19050" dir="2700000" algn="tl" rotWithShape="0">
+                  <a:schemeClr val="dk1">
+                    <a:alpha val="40000"/>
+                  </a:schemeClr>
+                </a:outerShdw>
+              </a:effectLst>
+            </a:endParaRPr>
+          </a:p>
+        </p:txBody>
+      </p:sp>
+      <p:sp>
+        <p:nvSpPr>
+          <p:cNvPr id="16" name="TextBox 15">
+            <a:extLst>
+              <a:ext uri="{FF2B5EF4-FFF2-40B4-BE49-F238E27FC236}">
+                <a16:creationId xmlns:a16="http://schemas.microsoft.com/office/drawing/2014/main" id="{98610F23-443B-34BB-F719-A7433A6FF245}"/>
+              </a:ext>
+            </a:extLst>
+          </p:cNvPr>
+          <p:cNvSpPr txBox="1"/>
+          <p:nvPr/>
+        </p:nvSpPr>
+        <p:spPr>
+          <a:xfrm>
+            <a:off x="10787912" y="480767"/>
+            <a:ext cx="308098" cy="369332"/>
+          </a:xfrm>
+          <a:prstGeom prst="rect">
+            <a:avLst/>
+          </a:prstGeom>
+          <a:noFill/>
+        </p:spPr>
+        <p:txBody>
+          <a:bodyPr wrap="none" rtlCol="0">
+            <a:spAutoFit/>
+          </a:bodyPr>
+          <a:lstStyle/>
+          <a:p>
+            <a:r>
+              <a:rPr lang="en-US" dirty="0">
+                <a:solidFill>
+                  <a:srgbClr val="FF0000"/>
+                </a:solidFill>
+              </a:rPr>
+              <a:t>5</a:t>
+            </a:r>
+          </a:p>
+        </p:txBody>
+      </p:sp>
+      <p:sp>
+        <p:nvSpPr>
+          <p:cNvPr id="17" name="Rectangle 16">
+            <a:extLst>
+              <a:ext uri="{FF2B5EF4-FFF2-40B4-BE49-F238E27FC236}">
+                <a16:creationId xmlns:a16="http://schemas.microsoft.com/office/drawing/2014/main" id="{5710D559-00D9-D4B5-840E-0929DD1D3752}"/>
+              </a:ext>
+            </a:extLst>
+          </p:cNvPr>
+          <p:cNvSpPr/>
+          <p:nvPr/>
+        </p:nvSpPr>
+        <p:spPr>
+          <a:xfrm>
+            <a:off x="6835250" y="2044924"/>
+            <a:ext cx="4019302" cy="4813076"/>
+          </a:xfrm>
+          <a:prstGeom prst="rect">
+            <a:avLst/>
+          </a:prstGeom>
+          <a:noFill/>
+          <a:ln w="38100">
+            <a:solidFill>
+              <a:srgbClr val="FF0000"/>
+            </a:solidFill>
+          </a:ln>
+        </p:spPr>
+        <p:style>
+          <a:lnRef idx="2">
+            <a:schemeClr val="accent1">
+              <a:shade val="15000"/>
+            </a:schemeClr>
+          </a:lnRef>
+          <a:fillRef idx="1">
+            <a:schemeClr val="accent1"/>
+          </a:fillRef>
+          <a:effectRef idx="0">
+            <a:schemeClr val="accent1"/>
+          </a:effectRef>
+          <a:fontRef idx="minor">
+            <a:schemeClr val="lt1"/>
+          </a:fontRef>
+        </p:style>
+        <p:txBody>
+          <a:bodyPr rtlCol="0" anchor="ctr"/>
+          <a:lstStyle/>
+          <a:p>
+            <a:pPr algn="ctr"/>
+            <a:endParaRPr lang="en-US">
+              <a:ln w="0"/>
+              <a:solidFill>
+                <a:schemeClr val="tx1"/>
+              </a:solidFill>
+              <a:effectLst>
+                <a:outerShdw blurRad="38100" dist="19050" dir="2700000" algn="tl" rotWithShape="0">
+                  <a:schemeClr val="dk1">
+                    <a:alpha val="40000"/>
+                  </a:schemeClr>
+                </a:outerShdw>
+              </a:effectLst>
+            </a:endParaRPr>
+          </a:p>
+        </p:txBody>
+      </p:sp>
+      <p:sp>
+        <p:nvSpPr>
+          <p:cNvPr id="18" name="TextBox 17">
+            <a:extLst>
+              <a:ext uri="{FF2B5EF4-FFF2-40B4-BE49-F238E27FC236}">
+                <a16:creationId xmlns:a16="http://schemas.microsoft.com/office/drawing/2014/main" id="{DDAEC382-88AF-0048-E5CD-7007074237EA}"/>
+              </a:ext>
+            </a:extLst>
+          </p:cNvPr>
+          <p:cNvSpPr txBox="1"/>
+          <p:nvPr/>
+        </p:nvSpPr>
+        <p:spPr>
+          <a:xfrm>
+            <a:off x="10787912" y="1990622"/>
+            <a:ext cx="308098" cy="369332"/>
+          </a:xfrm>
+          <a:prstGeom prst="rect">
+            <a:avLst/>
+          </a:prstGeom>
+          <a:noFill/>
+        </p:spPr>
+        <p:txBody>
+          <a:bodyPr wrap="none" rtlCol="0">
+            <a:spAutoFit/>
+          </a:bodyPr>
+          <a:lstStyle/>
+          <a:p>
+            <a:r>
+              <a:rPr lang="en-US" dirty="0">
+                <a:solidFill>
+                  <a:srgbClr val="FF0000"/>
+                </a:solidFill>
+              </a:rPr>
+              <a:t>6</a:t>
+            </a:r>
+          </a:p>
+        </p:txBody>
+      </p:sp>
+    </p:spTree>
+    <p:extLst>
+      <p:ext uri="{BB962C8B-B14F-4D97-AF65-F5344CB8AC3E}">
+        <p14:creationId xmlns:p14="http://schemas.microsoft.com/office/powerpoint/2010/main" val="2030273751"/>
+      </p:ext>
+    </p:extLst>
+  </p:cSld>
+  <p:clrMapOvr>
+    <a:masterClrMapping/>
+  </p:clrMapOvr>
+</p:sld>
+</file>
+
+<file path=ppt/slides/slide7.xml><?xml version="1.0" encoding="utf-8"?>
+<p:sld xmlns:a="http://schemas.openxmlformats.org/drawingml/2006/main" xmlns:r="http://schemas.openxmlformats.org/officeDocument/2006/relationships" xmlns:p="http://schemas.openxmlformats.org/presentationml/2006/main">
+  <p:cSld>
+    <p:spTree>
+      <p:nvGrpSpPr>
+        <p:cNvPr id="1" name="">
+          <a:extLst>
+            <a:ext uri="{FF2B5EF4-FFF2-40B4-BE49-F238E27FC236}">
+              <a16:creationId xmlns:a16="http://schemas.microsoft.com/office/drawing/2014/main" id="{1C7C15F3-1C36-3169-7045-1C0AB65E9E14}"/>
+            </a:ext>
+          </a:extLst>
+        </p:cNvPr>
+        <p:cNvGrpSpPr/>
+        <p:nvPr/>
+      </p:nvGrpSpPr>
+      <p:grpSpPr>
+        <a:xfrm>
+          <a:off x="0" y="0"/>
+          <a:ext cx="0" cy="0"/>
+          <a:chOff x="0" y="0"/>
+          <a:chExt cx="0" cy="0"/>
+        </a:xfrm>
+      </p:grpSpPr>
+      <p:pic>
+        <p:nvPicPr>
+          <p:cNvPr id="2" name="Picture 1">
+            <a:extLst>
+              <a:ext uri="{FF2B5EF4-FFF2-40B4-BE49-F238E27FC236}">
+                <a16:creationId xmlns:a16="http://schemas.microsoft.com/office/drawing/2014/main" id="{D8FB3FAB-8491-3B12-8040-9BE2007B40A2}"/>
+              </a:ext>
+            </a:extLst>
+          </p:cNvPr>
+          <p:cNvPicPr>
+            <a:picLocks noChangeAspect="1"/>
+          </p:cNvPicPr>
+          <p:nvPr/>
+        </p:nvPicPr>
+        <p:blipFill>
+          <a:blip r:embed="rId3"/>
+          <a:srcRect l="119"/>
+          <a:stretch>
+            <a:fillRect/>
+          </a:stretch>
+        </p:blipFill>
+        <p:spPr>
+          <a:xfrm>
+            <a:off x="1107890" y="0"/>
+            <a:ext cx="9988122" cy="6858000"/>
+          </a:xfrm>
+          <a:prstGeom prst="rect">
+            <a:avLst/>
+          </a:prstGeom>
+        </p:spPr>
+      </p:pic>
+      <p:sp>
+        <p:nvSpPr>
+          <p:cNvPr id="9" name="Rectangle 8">
+            <a:extLst>
+              <a:ext uri="{FF2B5EF4-FFF2-40B4-BE49-F238E27FC236}">
+                <a16:creationId xmlns:a16="http://schemas.microsoft.com/office/drawing/2014/main" id="{0ACD48EA-BFF4-77F4-FA55-A99720CB1B88}"/>
+              </a:ext>
+            </a:extLst>
+          </p:cNvPr>
+          <p:cNvSpPr/>
+          <p:nvPr/>
+        </p:nvSpPr>
+        <p:spPr>
+          <a:xfrm>
+            <a:off x="4126258" y="1"/>
+            <a:ext cx="1737214" cy="395926"/>
+          </a:xfrm>
+          <a:prstGeom prst="rect">
+            <a:avLst/>
+          </a:prstGeom>
+          <a:noFill/>
+          <a:ln w="38100">
+            <a:solidFill>
+              <a:srgbClr val="FF0000"/>
+            </a:solidFill>
+          </a:ln>
+        </p:spPr>
+        <p:style>
+          <a:lnRef idx="2">
+            <a:schemeClr val="accent1">
+              <a:shade val="15000"/>
+            </a:schemeClr>
+          </a:lnRef>
+          <a:fillRef idx="1">
+            <a:schemeClr val="accent1"/>
+          </a:fillRef>
+          <a:effectRef idx="0">
+            <a:schemeClr val="accent1"/>
+          </a:effectRef>
+          <a:fontRef idx="minor">
+            <a:schemeClr val="lt1"/>
+          </a:fontRef>
+        </p:style>
+        <p:txBody>
+          <a:bodyPr rtlCol="0" anchor="ctr"/>
+          <a:lstStyle/>
+          <a:p>
+            <a:pPr algn="ctr"/>
+            <a:endParaRPr lang="en-US">
+              <a:ln w="0"/>
+              <a:solidFill>
+                <a:schemeClr val="tx1"/>
+              </a:solidFill>
+              <a:effectLst>
+                <a:outerShdw blurRad="38100" dist="19050" dir="2700000" algn="tl" rotWithShape="0">
+                  <a:schemeClr val="dk1">
+                    <a:alpha val="40000"/>
+                  </a:schemeClr>
+                </a:outerShdw>
+              </a:effectLst>
+            </a:endParaRPr>
+          </a:p>
+        </p:txBody>
+      </p:sp>
+    </p:spTree>
+    <p:extLst>
+      <p:ext uri="{BB962C8B-B14F-4D97-AF65-F5344CB8AC3E}">
+        <p14:creationId xmlns:p14="http://schemas.microsoft.com/office/powerpoint/2010/main" val="2427920272"/>
+      </p:ext>
+    </p:extLst>
+  </p:cSld>
+  <p:clrMapOvr>
+    <a:masterClrMapping/>
+  </p:clrMapOvr>
+</p:sld>
+</file>
+
+<file path=ppt/slides/slide8.xml><?xml version="1.0" encoding="utf-8"?>
+<p:sld xmlns:a="http://schemas.openxmlformats.org/drawingml/2006/main" xmlns:r="http://schemas.openxmlformats.org/officeDocument/2006/relationships" xmlns:p="http://schemas.openxmlformats.org/presentationml/2006/main">
+  <p:cSld>
+    <p:spTree>
+      <p:nvGrpSpPr>
+        <p:cNvPr id="1" name="">
+          <a:extLst>
+            <a:ext uri="{FF2B5EF4-FFF2-40B4-BE49-F238E27FC236}">
+              <a16:creationId xmlns:a16="http://schemas.microsoft.com/office/drawing/2014/main" id="{4699E48C-9048-EDE2-981B-D5B27D232C60}"/>
+            </a:ext>
+          </a:extLst>
+        </p:cNvPr>
+        <p:cNvGrpSpPr/>
+        <p:nvPr/>
+      </p:nvGrpSpPr>
+      <p:grpSpPr>
+        <a:xfrm>
+          <a:off x="0" y="0"/>
+          <a:ext cx="0" cy="0"/>
+          <a:chOff x="0" y="0"/>
+          <a:chExt cx="0" cy="0"/>
+        </a:xfrm>
+      </p:grpSpPr>
+      <p:pic>
+        <p:nvPicPr>
+          <p:cNvPr id="21" name="Picture 20">
+            <a:extLst>
+              <a:ext uri="{FF2B5EF4-FFF2-40B4-BE49-F238E27FC236}">
+                <a16:creationId xmlns:a16="http://schemas.microsoft.com/office/drawing/2014/main" id="{55CE22A6-1A7D-F349-98C5-C377173000C9}"/>
+              </a:ext>
+            </a:extLst>
+          </p:cNvPr>
+          <p:cNvPicPr>
+            <a:picLocks noChangeAspect="1"/>
+          </p:cNvPicPr>
+          <p:nvPr/>
+        </p:nvPicPr>
+        <p:blipFill>
+          <a:blip r:embed="rId3"/>
+          <a:srcRect l="119" b="94615"/>
+          <a:stretch>
+            <a:fillRect/>
+          </a:stretch>
+        </p:blipFill>
+        <p:spPr>
+          <a:xfrm>
+            <a:off x="1107890" y="0"/>
+            <a:ext cx="9988122" cy="369332"/>
+          </a:xfrm>
+          <a:prstGeom prst="rect">
+            <a:avLst/>
+          </a:prstGeom>
+        </p:spPr>
+      </p:pic>
+      <p:sp>
+        <p:nvSpPr>
+          <p:cNvPr id="8" name="TextBox 7">
+            <a:extLst>
+              <a:ext uri="{FF2B5EF4-FFF2-40B4-BE49-F238E27FC236}">
+                <a16:creationId xmlns:a16="http://schemas.microsoft.com/office/drawing/2014/main" id="{1E107447-00AF-0794-5BDB-B5C886C40847}"/>
+              </a:ext>
+            </a:extLst>
+          </p:cNvPr>
+          <p:cNvSpPr txBox="1"/>
+          <p:nvPr/>
+        </p:nvSpPr>
+        <p:spPr>
+          <a:xfrm>
+            <a:off x="1134419" y="369332"/>
+            <a:ext cx="308098" cy="369332"/>
+          </a:xfrm>
+          <a:prstGeom prst="rect">
+            <a:avLst/>
+          </a:prstGeom>
+          <a:noFill/>
+        </p:spPr>
+        <p:txBody>
+          <a:bodyPr wrap="none" rtlCol="0">
+            <a:spAutoFit/>
+          </a:bodyPr>
+          <a:lstStyle/>
+          <a:p>
+            <a:r>
+              <a:rPr lang="en-US" dirty="0">
+                <a:solidFill>
+                  <a:srgbClr val="FF0000"/>
+                </a:solidFill>
+              </a:rPr>
+              <a:t>1</a:t>
+            </a:r>
+          </a:p>
+        </p:txBody>
+      </p:sp>
+      <p:sp>
+        <p:nvSpPr>
+          <p:cNvPr id="10" name="TextBox 9">
+            <a:extLst>
+              <a:ext uri="{FF2B5EF4-FFF2-40B4-BE49-F238E27FC236}">
+                <a16:creationId xmlns:a16="http://schemas.microsoft.com/office/drawing/2014/main" id="{167DA61D-8CB4-5D76-7A06-103433A298DE}"/>
+              </a:ext>
+            </a:extLst>
+          </p:cNvPr>
+          <p:cNvSpPr txBox="1"/>
+          <p:nvPr/>
+        </p:nvSpPr>
+        <p:spPr>
+          <a:xfrm>
+            <a:off x="1888884" y="369332"/>
+            <a:ext cx="308098" cy="369332"/>
+          </a:xfrm>
+          <a:prstGeom prst="rect">
+            <a:avLst/>
+          </a:prstGeom>
+          <a:noFill/>
+        </p:spPr>
+        <p:txBody>
+          <a:bodyPr wrap="none" rtlCol="0">
+            <a:spAutoFit/>
+          </a:bodyPr>
+          <a:lstStyle/>
+          <a:p>
+            <a:r>
+              <a:rPr lang="en-US" dirty="0">
+                <a:solidFill>
+                  <a:srgbClr val="FF0000"/>
+                </a:solidFill>
+              </a:rPr>
+              <a:t>2</a:t>
+            </a:r>
+          </a:p>
+        </p:txBody>
+      </p:sp>
+      <p:sp>
+        <p:nvSpPr>
+          <p:cNvPr id="12" name="TextBox 11">
+            <a:extLst>
+              <a:ext uri="{FF2B5EF4-FFF2-40B4-BE49-F238E27FC236}">
+                <a16:creationId xmlns:a16="http://schemas.microsoft.com/office/drawing/2014/main" id="{60A86629-EEE5-FC0A-0F80-BB58BCCCBBAC}"/>
+              </a:ext>
+            </a:extLst>
+          </p:cNvPr>
+          <p:cNvSpPr txBox="1"/>
+          <p:nvPr/>
+        </p:nvSpPr>
+        <p:spPr>
+          <a:xfrm>
+            <a:off x="4024320" y="355334"/>
+            <a:ext cx="308098" cy="369332"/>
+          </a:xfrm>
+          <a:prstGeom prst="rect">
+            <a:avLst/>
+          </a:prstGeom>
+          <a:noFill/>
+        </p:spPr>
+        <p:txBody>
+          <a:bodyPr wrap="none" rtlCol="0">
+            <a:spAutoFit/>
+          </a:bodyPr>
+          <a:lstStyle/>
+          <a:p>
+            <a:r>
+              <a:rPr lang="en-US" dirty="0">
+                <a:solidFill>
+                  <a:srgbClr val="FF0000"/>
+                </a:solidFill>
+              </a:rPr>
+              <a:t>3</a:t>
+            </a:r>
+          </a:p>
+        </p:txBody>
+      </p:sp>
+      <p:sp>
+        <p:nvSpPr>
+          <p:cNvPr id="14" name="TextBox 13">
+            <a:extLst>
+              <a:ext uri="{FF2B5EF4-FFF2-40B4-BE49-F238E27FC236}">
+                <a16:creationId xmlns:a16="http://schemas.microsoft.com/office/drawing/2014/main" id="{AF8F806A-6581-ADA4-02E1-7E8FF39629F0}"/>
+              </a:ext>
+            </a:extLst>
+          </p:cNvPr>
+          <p:cNvSpPr txBox="1"/>
+          <p:nvPr/>
+        </p:nvSpPr>
+        <p:spPr>
+          <a:xfrm>
+            <a:off x="7579047" y="355334"/>
+            <a:ext cx="308098" cy="369332"/>
+          </a:xfrm>
+          <a:prstGeom prst="rect">
+            <a:avLst/>
+          </a:prstGeom>
+          <a:noFill/>
+        </p:spPr>
+        <p:txBody>
+          <a:bodyPr wrap="none" rtlCol="0">
+            <a:spAutoFit/>
+          </a:bodyPr>
+          <a:lstStyle/>
+          <a:p>
+            <a:r>
+              <a:rPr lang="en-US" dirty="0">
+                <a:solidFill>
+                  <a:srgbClr val="FF0000"/>
+                </a:solidFill>
+              </a:rPr>
+              <a:t>4</a:t>
+            </a:r>
+          </a:p>
+        </p:txBody>
+      </p:sp>
+      <p:sp>
+        <p:nvSpPr>
+          <p:cNvPr id="16" name="TextBox 15">
+            <a:extLst>
+              <a:ext uri="{FF2B5EF4-FFF2-40B4-BE49-F238E27FC236}">
+                <a16:creationId xmlns:a16="http://schemas.microsoft.com/office/drawing/2014/main" id="{BE2F7F57-2BC2-C81B-B04C-65FF5E1E8AEF}"/>
+              </a:ext>
+            </a:extLst>
+          </p:cNvPr>
+          <p:cNvSpPr txBox="1"/>
+          <p:nvPr/>
+        </p:nvSpPr>
+        <p:spPr>
+          <a:xfrm>
+            <a:off x="9213579" y="355334"/>
+            <a:ext cx="308098" cy="369332"/>
+          </a:xfrm>
+          <a:prstGeom prst="rect">
+            <a:avLst/>
+          </a:prstGeom>
+          <a:noFill/>
+        </p:spPr>
+        <p:txBody>
+          <a:bodyPr wrap="none" rtlCol="0">
+            <a:spAutoFit/>
+          </a:bodyPr>
+          <a:lstStyle/>
+          <a:p>
+            <a:r>
+              <a:rPr lang="en-US" dirty="0">
+                <a:solidFill>
+                  <a:srgbClr val="FF0000"/>
+                </a:solidFill>
+              </a:rPr>
+              <a:t>5</a:t>
+            </a:r>
+          </a:p>
+        </p:txBody>
+      </p:sp>
+      <p:sp>
+        <p:nvSpPr>
+          <p:cNvPr id="18" name="TextBox 17">
+            <a:extLst>
+              <a:ext uri="{FF2B5EF4-FFF2-40B4-BE49-F238E27FC236}">
+                <a16:creationId xmlns:a16="http://schemas.microsoft.com/office/drawing/2014/main" id="{5DDFC490-0EB6-E706-0A7A-D4107B4CBEF6}"/>
+              </a:ext>
+            </a:extLst>
+          </p:cNvPr>
+          <p:cNvSpPr txBox="1"/>
+          <p:nvPr/>
+        </p:nvSpPr>
+        <p:spPr>
+          <a:xfrm>
+            <a:off x="9787287" y="369332"/>
+            <a:ext cx="308098" cy="369332"/>
+          </a:xfrm>
+          <a:prstGeom prst="rect">
+            <a:avLst/>
+          </a:prstGeom>
+          <a:noFill/>
+        </p:spPr>
+        <p:txBody>
+          <a:bodyPr wrap="square" rtlCol="0">
+            <a:spAutoFit/>
+          </a:bodyPr>
+          <a:lstStyle/>
+          <a:p>
+            <a:r>
+              <a:rPr lang="en-US" dirty="0">
+                <a:solidFill>
+                  <a:srgbClr val="FF0000"/>
+                </a:solidFill>
+              </a:rPr>
+              <a:t>6</a:t>
+            </a:r>
+          </a:p>
+        </p:txBody>
+      </p:sp>
+      <p:sp>
+        <p:nvSpPr>
+          <p:cNvPr id="3" name="TextBox 2">
+            <a:extLst>
+              <a:ext uri="{FF2B5EF4-FFF2-40B4-BE49-F238E27FC236}">
+                <a16:creationId xmlns:a16="http://schemas.microsoft.com/office/drawing/2014/main" id="{9A8F4913-9D14-11CE-7CD0-FDE51C54D856}"/>
+              </a:ext>
+            </a:extLst>
+          </p:cNvPr>
+          <p:cNvSpPr txBox="1"/>
+          <p:nvPr/>
+        </p:nvSpPr>
+        <p:spPr>
+          <a:xfrm>
+            <a:off x="10239352" y="369332"/>
+            <a:ext cx="308098" cy="369332"/>
+          </a:xfrm>
+          <a:prstGeom prst="rect">
+            <a:avLst/>
+          </a:prstGeom>
+          <a:noFill/>
+        </p:spPr>
+        <p:txBody>
+          <a:bodyPr wrap="square" rtlCol="0">
+            <a:spAutoFit/>
+          </a:bodyPr>
+          <a:lstStyle/>
+          <a:p>
+            <a:r>
+              <a:rPr lang="en-US" dirty="0">
+                <a:solidFill>
+                  <a:srgbClr val="FF0000"/>
+                </a:solidFill>
+              </a:rPr>
+              <a:t>7</a:t>
+            </a:r>
+          </a:p>
+        </p:txBody>
+      </p:sp>
+      <p:sp>
+        <p:nvSpPr>
+          <p:cNvPr id="7" name="Rectangle 6">
+            <a:extLst>
+              <a:ext uri="{FF2B5EF4-FFF2-40B4-BE49-F238E27FC236}">
+                <a16:creationId xmlns:a16="http://schemas.microsoft.com/office/drawing/2014/main" id="{1154C8EF-2181-C5EB-0505-FA6C78C42E85}"/>
+              </a:ext>
+            </a:extLst>
+          </p:cNvPr>
+          <p:cNvSpPr/>
+          <p:nvPr/>
+        </p:nvSpPr>
+        <p:spPr>
+          <a:xfrm>
+            <a:off x="1238048" y="-31334"/>
+            <a:ext cx="508172" cy="432000"/>
+          </a:xfrm>
+          <a:prstGeom prst="rect">
+            <a:avLst/>
+          </a:prstGeom>
+          <a:noFill/>
+          <a:ln w="38100">
+            <a:solidFill>
+              <a:srgbClr val="FF0000"/>
+            </a:solidFill>
+          </a:ln>
+        </p:spPr>
+        <p:style>
+          <a:lnRef idx="2">
+            <a:schemeClr val="accent1">
+              <a:shade val="15000"/>
+            </a:schemeClr>
+          </a:lnRef>
+          <a:fillRef idx="1">
+            <a:schemeClr val="accent1"/>
+          </a:fillRef>
+          <a:effectRef idx="0">
+            <a:schemeClr val="accent1"/>
+          </a:effectRef>
+          <a:fontRef idx="minor">
+            <a:schemeClr val="lt1"/>
+          </a:fontRef>
+        </p:style>
+        <p:txBody>
+          <a:bodyPr rtlCol="0" anchor="ctr"/>
+          <a:lstStyle/>
+          <a:p>
+            <a:pPr algn="ctr"/>
+            <a:endParaRPr lang="en-US">
+              <a:ln w="0"/>
+              <a:solidFill>
+                <a:schemeClr val="tx1"/>
+              </a:solidFill>
+              <a:effectLst>
+                <a:outerShdw blurRad="38100" dist="19050" dir="2700000" algn="tl" rotWithShape="0">
+                  <a:schemeClr val="dk1">
+                    <a:alpha val="40000"/>
+                  </a:schemeClr>
+                </a:outerShdw>
+              </a:effectLst>
+            </a:endParaRPr>
+          </a:p>
+        </p:txBody>
+      </p:sp>
+      <p:sp>
+        <p:nvSpPr>
+          <p:cNvPr id="9" name="Rectangle 8">
+            <a:extLst>
+              <a:ext uri="{FF2B5EF4-FFF2-40B4-BE49-F238E27FC236}">
+                <a16:creationId xmlns:a16="http://schemas.microsoft.com/office/drawing/2014/main" id="{BB20B77C-AB5A-03CB-D8DA-1A5E8F64A150}"/>
+              </a:ext>
+            </a:extLst>
+          </p:cNvPr>
+          <p:cNvSpPr/>
+          <p:nvPr/>
+        </p:nvSpPr>
+        <p:spPr>
+          <a:xfrm>
+            <a:off x="1983918" y="-31334"/>
+            <a:ext cx="434225" cy="442031"/>
+          </a:xfrm>
+          <a:prstGeom prst="rect">
+            <a:avLst/>
+          </a:prstGeom>
+          <a:noFill/>
+          <a:ln w="38100">
+            <a:solidFill>
+              <a:srgbClr val="FF0000"/>
+            </a:solidFill>
+          </a:ln>
+        </p:spPr>
+        <p:style>
+          <a:lnRef idx="2">
+            <a:schemeClr val="accent1">
+              <a:shade val="15000"/>
+            </a:schemeClr>
+          </a:lnRef>
+          <a:fillRef idx="1">
+            <a:schemeClr val="accent1"/>
+          </a:fillRef>
+          <a:effectRef idx="0">
+            <a:schemeClr val="accent1"/>
+          </a:effectRef>
+          <a:fontRef idx="minor">
+            <a:schemeClr val="lt1"/>
+          </a:fontRef>
+        </p:style>
+        <p:txBody>
+          <a:bodyPr rtlCol="0" anchor="ctr"/>
+          <a:lstStyle/>
+          <a:p>
+            <a:pPr algn="ctr"/>
+            <a:endParaRPr lang="en-US" dirty="0">
+              <a:ln w="0"/>
+              <a:solidFill>
+                <a:schemeClr val="tx1"/>
+              </a:solidFill>
+              <a:effectLst>
+                <a:outerShdw blurRad="38100" dist="19050" dir="2700000" algn="tl" rotWithShape="0">
+                  <a:schemeClr val="dk1">
+                    <a:alpha val="40000"/>
+                  </a:schemeClr>
+                </a:outerShdw>
+              </a:effectLst>
+            </a:endParaRPr>
+          </a:p>
+        </p:txBody>
+      </p:sp>
+      <p:sp>
+        <p:nvSpPr>
+          <p:cNvPr id="11" name="Rectangle 10">
+            <a:extLst>
+              <a:ext uri="{FF2B5EF4-FFF2-40B4-BE49-F238E27FC236}">
+                <a16:creationId xmlns:a16="http://schemas.microsoft.com/office/drawing/2014/main" id="{0A6D7683-FE00-C1C6-EE58-D18D58B85268}"/>
+              </a:ext>
+            </a:extLst>
+          </p:cNvPr>
+          <p:cNvSpPr/>
+          <p:nvPr/>
+        </p:nvSpPr>
+        <p:spPr>
+          <a:xfrm>
+            <a:off x="4119354" y="-31334"/>
+            <a:ext cx="1758482" cy="432000"/>
+          </a:xfrm>
+          <a:prstGeom prst="rect">
+            <a:avLst/>
+          </a:prstGeom>
+          <a:noFill/>
+          <a:ln w="38100">
+            <a:solidFill>
+              <a:srgbClr val="FF0000"/>
+            </a:solidFill>
+          </a:ln>
+        </p:spPr>
+        <p:style>
+          <a:lnRef idx="2">
+            <a:schemeClr val="accent1">
+              <a:shade val="15000"/>
+            </a:schemeClr>
+          </a:lnRef>
+          <a:fillRef idx="1">
+            <a:schemeClr val="accent1"/>
+          </a:fillRef>
+          <a:effectRef idx="0">
+            <a:schemeClr val="accent1"/>
+          </a:effectRef>
+          <a:fontRef idx="minor">
+            <a:schemeClr val="lt1"/>
+          </a:fontRef>
+        </p:style>
+        <p:txBody>
+          <a:bodyPr rtlCol="0" anchor="ctr"/>
+          <a:lstStyle/>
+          <a:p>
+            <a:pPr algn="ctr"/>
+            <a:endParaRPr lang="en-US">
+              <a:ln w="0"/>
+              <a:solidFill>
+                <a:schemeClr val="tx1"/>
+              </a:solidFill>
+              <a:effectLst>
+                <a:outerShdw blurRad="38100" dist="19050" dir="2700000" algn="tl" rotWithShape="0">
+                  <a:schemeClr val="dk1">
+                    <a:alpha val="40000"/>
+                  </a:schemeClr>
+                </a:outerShdw>
+              </a:effectLst>
+            </a:endParaRPr>
+          </a:p>
+        </p:txBody>
+      </p:sp>
+      <p:sp>
+        <p:nvSpPr>
+          <p:cNvPr id="13" name="Rectangle 12">
+            <a:extLst>
+              <a:ext uri="{FF2B5EF4-FFF2-40B4-BE49-F238E27FC236}">
+                <a16:creationId xmlns:a16="http://schemas.microsoft.com/office/drawing/2014/main" id="{87F319DB-E90A-F9AB-1273-9B6163824C75}"/>
+              </a:ext>
+            </a:extLst>
+          </p:cNvPr>
+          <p:cNvSpPr/>
+          <p:nvPr/>
+        </p:nvSpPr>
+        <p:spPr>
+          <a:xfrm>
+            <a:off x="7701699" y="-31334"/>
+            <a:ext cx="1430960" cy="432000"/>
+          </a:xfrm>
+          <a:prstGeom prst="rect">
+            <a:avLst/>
+          </a:prstGeom>
+          <a:noFill/>
+          <a:ln w="38100">
+            <a:solidFill>
+              <a:srgbClr val="FF0000"/>
+            </a:solidFill>
+          </a:ln>
+        </p:spPr>
+        <p:style>
+          <a:lnRef idx="2">
+            <a:schemeClr val="accent1">
+              <a:shade val="15000"/>
+            </a:schemeClr>
+          </a:lnRef>
+          <a:fillRef idx="1">
+            <a:schemeClr val="accent1"/>
+          </a:fillRef>
+          <a:effectRef idx="0">
+            <a:schemeClr val="accent1"/>
+          </a:effectRef>
+          <a:fontRef idx="minor">
+            <a:schemeClr val="lt1"/>
+          </a:fontRef>
+        </p:style>
+        <p:txBody>
+          <a:bodyPr rtlCol="0" anchor="ctr"/>
+          <a:lstStyle/>
+          <a:p>
+            <a:pPr algn="ctr"/>
+            <a:endParaRPr lang="en-US">
+              <a:ln w="0"/>
+              <a:solidFill>
+                <a:schemeClr val="tx1"/>
+              </a:solidFill>
+              <a:effectLst>
+                <a:outerShdw blurRad="38100" dist="19050" dir="2700000" algn="tl" rotWithShape="0">
+                  <a:schemeClr val="dk1">
+                    <a:alpha val="40000"/>
+                  </a:schemeClr>
+                </a:outerShdw>
+              </a:effectLst>
+            </a:endParaRPr>
+          </a:p>
+        </p:txBody>
+      </p:sp>
+      <p:sp>
+        <p:nvSpPr>
+          <p:cNvPr id="15" name="Rectangle 14">
+            <a:extLst>
+              <a:ext uri="{FF2B5EF4-FFF2-40B4-BE49-F238E27FC236}">
+                <a16:creationId xmlns:a16="http://schemas.microsoft.com/office/drawing/2014/main" id="{788F1A68-DAEC-8C35-0014-46C58CD04C8A}"/>
+              </a:ext>
+            </a:extLst>
+          </p:cNvPr>
+          <p:cNvSpPr/>
+          <p:nvPr/>
+        </p:nvSpPr>
+        <p:spPr>
+          <a:xfrm>
+            <a:off x="9296273" y="-31334"/>
+            <a:ext cx="471314" cy="432000"/>
+          </a:xfrm>
+          <a:prstGeom prst="rect">
+            <a:avLst/>
+          </a:prstGeom>
+          <a:noFill/>
+          <a:ln w="38100">
+            <a:solidFill>
+              <a:srgbClr val="FF0000"/>
+            </a:solidFill>
+          </a:ln>
+        </p:spPr>
+        <p:style>
+          <a:lnRef idx="2">
+            <a:schemeClr val="accent1">
+              <a:shade val="15000"/>
+            </a:schemeClr>
+          </a:lnRef>
+          <a:fillRef idx="1">
+            <a:schemeClr val="accent1"/>
+          </a:fillRef>
+          <a:effectRef idx="0">
+            <a:schemeClr val="accent1"/>
+          </a:effectRef>
+          <a:fontRef idx="minor">
+            <a:schemeClr val="lt1"/>
+          </a:fontRef>
+        </p:style>
+        <p:txBody>
+          <a:bodyPr rtlCol="0" anchor="ctr"/>
+          <a:lstStyle/>
+          <a:p>
+            <a:pPr algn="ctr"/>
+            <a:endParaRPr lang="en-US">
+              <a:ln w="0"/>
+              <a:solidFill>
+                <a:schemeClr val="tx1"/>
+              </a:solidFill>
+              <a:effectLst>
+                <a:outerShdw blurRad="38100" dist="19050" dir="2700000" algn="tl" rotWithShape="0">
+                  <a:schemeClr val="dk1">
+                    <a:alpha val="40000"/>
+                  </a:schemeClr>
+                </a:outerShdw>
+              </a:effectLst>
+            </a:endParaRPr>
+          </a:p>
+        </p:txBody>
+      </p:sp>
+      <p:sp>
+        <p:nvSpPr>
+          <p:cNvPr id="17" name="Rectangle 16">
+            <a:extLst>
+              <a:ext uri="{FF2B5EF4-FFF2-40B4-BE49-F238E27FC236}">
+                <a16:creationId xmlns:a16="http://schemas.microsoft.com/office/drawing/2014/main" id="{DC3D1C54-23C5-BAF7-DF50-16DF8B60CF66}"/>
+              </a:ext>
+            </a:extLst>
+          </p:cNvPr>
+          <p:cNvSpPr/>
+          <p:nvPr/>
+        </p:nvSpPr>
+        <p:spPr>
+          <a:xfrm>
+            <a:off x="9895817" y="-31334"/>
+            <a:ext cx="286093" cy="432000"/>
+          </a:xfrm>
+          <a:prstGeom prst="rect">
+            <a:avLst/>
+          </a:prstGeom>
+          <a:noFill/>
+          <a:ln w="38100">
+            <a:solidFill>
+              <a:srgbClr val="FF0000"/>
+            </a:solidFill>
+          </a:ln>
+        </p:spPr>
+        <p:style>
+          <a:lnRef idx="2">
+            <a:schemeClr val="accent1">
+              <a:shade val="15000"/>
+            </a:schemeClr>
+          </a:lnRef>
+          <a:fillRef idx="1">
+            <a:schemeClr val="accent1"/>
+          </a:fillRef>
+          <a:effectRef idx="0">
+            <a:schemeClr val="accent1"/>
+          </a:effectRef>
+          <a:fontRef idx="minor">
+            <a:schemeClr val="lt1"/>
+          </a:fontRef>
+        </p:style>
+        <p:txBody>
+          <a:bodyPr rtlCol="0" anchor="ctr"/>
+          <a:lstStyle/>
+          <a:p>
+            <a:pPr algn="ctr"/>
+            <a:endParaRPr lang="en-US">
+              <a:ln w="0"/>
+              <a:solidFill>
+                <a:schemeClr val="tx1"/>
+              </a:solidFill>
+              <a:effectLst>
+                <a:outerShdw blurRad="38100" dist="19050" dir="2700000" algn="tl" rotWithShape="0">
+                  <a:schemeClr val="dk1">
+                    <a:alpha val="40000"/>
+                  </a:schemeClr>
+                </a:outerShdw>
+              </a:effectLst>
+            </a:endParaRPr>
+          </a:p>
+        </p:txBody>
+      </p:sp>
+      <p:sp>
+        <p:nvSpPr>
+          <p:cNvPr id="2" name="Rectangle 1">
+            <a:extLst>
+              <a:ext uri="{FF2B5EF4-FFF2-40B4-BE49-F238E27FC236}">
+                <a16:creationId xmlns:a16="http://schemas.microsoft.com/office/drawing/2014/main" id="{FE3672EF-3DAF-C198-9141-FDF246494426}"/>
+              </a:ext>
+            </a:extLst>
+          </p:cNvPr>
+          <p:cNvSpPr/>
+          <p:nvPr/>
+        </p:nvSpPr>
+        <p:spPr>
+          <a:xfrm>
+            <a:off x="10342086" y="-31334"/>
+            <a:ext cx="286213" cy="432000"/>
+          </a:xfrm>
+          <a:prstGeom prst="rect">
+            <a:avLst/>
+          </a:prstGeom>
+          <a:noFill/>
+          <a:ln w="38100">
+            <a:solidFill>
+              <a:srgbClr val="FF0000"/>
+            </a:solidFill>
+          </a:ln>
+        </p:spPr>
+        <p:style>
+          <a:lnRef idx="2">
+            <a:schemeClr val="accent1">
+              <a:shade val="15000"/>
+            </a:schemeClr>
+          </a:lnRef>
+          <a:fillRef idx="1">
+            <a:schemeClr val="accent1"/>
+          </a:fillRef>
+          <a:effectRef idx="0">
+            <a:schemeClr val="accent1"/>
+          </a:effectRef>
+          <a:fontRef idx="minor">
+            <a:schemeClr val="lt1"/>
+          </a:fontRef>
+        </p:style>
+        <p:txBody>
+          <a:bodyPr rtlCol="0" anchor="ctr"/>
+          <a:lstStyle/>
+          <a:p>
+            <a:pPr algn="ctr"/>
+            <a:endParaRPr lang="en-US">
+              <a:ln w="0"/>
+              <a:solidFill>
+                <a:schemeClr val="tx1"/>
+              </a:solidFill>
+              <a:effectLst>
+                <a:outerShdw blurRad="38100" dist="19050" dir="2700000" algn="tl" rotWithShape="0">
+                  <a:schemeClr val="dk1">
+                    <a:alpha val="40000"/>
+                  </a:schemeClr>
+                </a:outerShdw>
+              </a:effectLst>
+            </a:endParaRPr>
+          </a:p>
+        </p:txBody>
+      </p:sp>
+      <p:sp>
+        <p:nvSpPr>
+          <p:cNvPr id="4" name="Rectangle 3">
+            <a:extLst>
+              <a:ext uri="{FF2B5EF4-FFF2-40B4-BE49-F238E27FC236}">
+                <a16:creationId xmlns:a16="http://schemas.microsoft.com/office/drawing/2014/main" id="{55F31252-F204-60C8-FB1F-4DD70CEEED95}"/>
+              </a:ext>
+            </a:extLst>
+          </p:cNvPr>
+          <p:cNvSpPr/>
+          <p:nvPr/>
+        </p:nvSpPr>
+        <p:spPr>
+          <a:xfrm>
+            <a:off x="10788476" y="-31334"/>
+            <a:ext cx="286213" cy="432000"/>
+          </a:xfrm>
+          <a:prstGeom prst="rect">
+            <a:avLst/>
+          </a:prstGeom>
+          <a:noFill/>
+          <a:ln w="38100">
+            <a:solidFill>
+              <a:srgbClr val="FF0000"/>
+            </a:solidFill>
+          </a:ln>
+        </p:spPr>
+        <p:style>
+          <a:lnRef idx="2">
+            <a:schemeClr val="accent1">
+              <a:shade val="15000"/>
+            </a:schemeClr>
+          </a:lnRef>
+          <a:fillRef idx="1">
+            <a:schemeClr val="accent1"/>
+          </a:fillRef>
+          <a:effectRef idx="0">
+            <a:schemeClr val="accent1"/>
+          </a:effectRef>
+          <a:fontRef idx="minor">
+            <a:schemeClr val="lt1"/>
+          </a:fontRef>
+        </p:style>
+        <p:txBody>
+          <a:bodyPr rtlCol="0" anchor="ctr"/>
+          <a:lstStyle/>
+          <a:p>
+            <a:pPr algn="ctr"/>
+            <a:endParaRPr lang="en-US">
+              <a:ln w="0"/>
+              <a:solidFill>
+                <a:schemeClr val="tx1"/>
+              </a:solidFill>
+              <a:effectLst>
+                <a:outerShdw blurRad="38100" dist="19050" dir="2700000" algn="tl" rotWithShape="0">
+                  <a:schemeClr val="dk1">
+                    <a:alpha val="40000"/>
+                  </a:schemeClr>
+                </a:outerShdw>
+              </a:effectLst>
+            </a:endParaRPr>
+          </a:p>
+        </p:txBody>
+      </p:sp>
+      <p:sp>
+        <p:nvSpPr>
+          <p:cNvPr id="6" name="TextBox 5">
+            <a:extLst>
+              <a:ext uri="{FF2B5EF4-FFF2-40B4-BE49-F238E27FC236}">
+                <a16:creationId xmlns:a16="http://schemas.microsoft.com/office/drawing/2014/main" id="{EB222A99-1A52-EE89-5996-96FF2E6428F0}"/>
+              </a:ext>
+            </a:extLst>
+          </p:cNvPr>
+          <p:cNvSpPr txBox="1"/>
+          <p:nvPr/>
+        </p:nvSpPr>
+        <p:spPr>
+          <a:xfrm>
+            <a:off x="10681207" y="369332"/>
+            <a:ext cx="308098" cy="369332"/>
+          </a:xfrm>
+          <a:prstGeom prst="rect">
+            <a:avLst/>
+          </a:prstGeom>
+          <a:noFill/>
+        </p:spPr>
+        <p:txBody>
+          <a:bodyPr wrap="square" rtlCol="0">
+            <a:spAutoFit/>
+          </a:bodyPr>
+          <a:lstStyle/>
+          <a:p>
+            <a:r>
+              <a:rPr lang="en-US" dirty="0">
+                <a:solidFill>
+                  <a:srgbClr val="FF0000"/>
+                </a:solidFill>
+              </a:rPr>
+              <a:t>8</a:t>
+            </a:r>
+          </a:p>
+        </p:txBody>
+      </p:sp>
+    </p:spTree>
+    <p:extLst>
+      <p:ext uri="{BB962C8B-B14F-4D97-AF65-F5344CB8AC3E}">
+        <p14:creationId xmlns:p14="http://schemas.microsoft.com/office/powerpoint/2010/main" val="1838129098"/>
+      </p:ext>
+    </p:extLst>
+  </p:cSld>
+  <p:clrMapOvr>
+    <a:masterClrMapping/>
+  </p:clrMapOvr>
+</p:sld>
+</file>
+
+<file path=ppt/slides/slide9.xml><?xml version="1.0" encoding="utf-8"?>
+<p:sld xmlns:a="http://schemas.openxmlformats.org/drawingml/2006/main" xmlns:r="http://schemas.openxmlformats.org/officeDocument/2006/relationships" xmlns:p="http://schemas.openxmlformats.org/presentationml/2006/main">
+  <p:cSld>
+    <p:spTree>
+      <p:nvGrpSpPr>
+        <p:cNvPr id="1" name=""/>
+        <p:cNvGrpSpPr/>
+        <p:nvPr/>
+      </p:nvGrpSpPr>
+      <p:grpSpPr>
+        <a:xfrm>
+          <a:off x="0" y="0"/>
+          <a:ext cx="0" cy="0"/>
+          <a:chOff x="0" y="0"/>
+          <a:chExt cx="0" cy="0"/>
+        </a:xfrm>
+      </p:grpSpPr>
+      <p:sp>
+        <p:nvSpPr>
+          <p:cNvPr id="2" name="Title 1">
+            <a:extLst>
+              <a:ext uri="{FF2B5EF4-FFF2-40B4-BE49-F238E27FC236}">
+                <a16:creationId xmlns:a16="http://schemas.microsoft.com/office/drawing/2014/main" id="{568B5E8A-2D36-7A5E-240E-098C63E4B3EA}"/>
+              </a:ext>
+            </a:extLst>
+          </p:cNvPr>
+          <p:cNvSpPr>
+            <a:spLocks noGrp="1"/>
+          </p:cNvSpPr>
+          <p:nvPr>
+            <p:ph type="title"/>
+          </p:nvPr>
+        </p:nvSpPr>
+        <p:spPr/>
+        <p:txBody>
+          <a:bodyPr/>
+          <a:lstStyle/>
+          <a:p>
+            <a:r>
+              <a:rPr lang="en-US" dirty="0"/>
+              <a:t>Projects Page Image	</a:t>
+            </a:r>
+          </a:p>
+        </p:txBody>
+      </p:sp>
+      <p:sp>
+        <p:nvSpPr>
+          <p:cNvPr id="3" name="Content Placeholder 2">
+            <a:extLst>
+              <a:ext uri="{FF2B5EF4-FFF2-40B4-BE49-F238E27FC236}">
+                <a16:creationId xmlns:a16="http://schemas.microsoft.com/office/drawing/2014/main" id="{4FE17AAA-CBA6-29CC-1DC3-631B80968653}"/>
+              </a:ext>
+            </a:extLst>
+          </p:cNvPr>
+          <p:cNvSpPr>
+            <a:spLocks noGrp="1"/>
+          </p:cNvSpPr>
+          <p:nvPr>
+            <p:ph idx="1"/>
+          </p:nvPr>
+        </p:nvSpPr>
+        <p:spPr/>
+        <p:txBody>
+          <a:bodyPr/>
+          <a:lstStyle/>
+          <a:p>
+            <a:r>
+              <a:rPr lang="en-US" dirty="0"/>
+              <a:t>Unmarked: None</a:t>
+            </a:r>
+          </a:p>
+        </p:txBody>
+      </p:sp>
+    </p:spTree>
+    <p:extLst>
+      <p:ext uri="{BB962C8B-B14F-4D97-AF65-F5344CB8AC3E}">
+        <p14:creationId xmlns:p14="http://schemas.microsoft.com/office/powerpoint/2010/main" val="2704037288"/>
       </p:ext>
     </p:extLst>
   </p:cSld>

--- a/images_with_layers.pptx
+++ b/images_with_layers.pptx
@@ -5,7 +5,7 @@
     <p:sldMasterId id="2147483648" r:id="rId1"/>
   </p:sldMasterIdLst>
   <p:notesMasterIdLst>
-    <p:notesMasterId r:id="rId18"/>
+    <p:notesMasterId r:id="rId23"/>
   </p:notesMasterIdLst>
   <p:sldIdLst>
     <p:sldId id="264" r:id="rId2"/>
@@ -22,8 +22,13 @@
     <p:sldId id="271" r:id="rId13"/>
     <p:sldId id="272" r:id="rId14"/>
     <p:sldId id="273" r:id="rId15"/>
-    <p:sldId id="262" r:id="rId16"/>
-    <p:sldId id="260" r:id="rId17"/>
+    <p:sldId id="274" r:id="rId16"/>
+    <p:sldId id="277" r:id="rId17"/>
+    <p:sldId id="275" r:id="rId18"/>
+    <p:sldId id="278" r:id="rId19"/>
+    <p:sldId id="279" r:id="rId20"/>
+    <p:sldId id="262" r:id="rId21"/>
+    <p:sldId id="260" r:id="rId22"/>
   </p:sldIdLst>
   <p:sldSz cx="12192000" cy="6858000"/>
   <p:notesSz cx="6858000" cy="9144000"/>
@@ -161,6 +166,19 @@
           <p14:sldIdLst>
             <p14:sldId id="272"/>
             <p14:sldId id="273"/>
+            <p14:sldId id="274"/>
+          </p14:sldIdLst>
+        </p14:section>
+        <p14:section name="Sample Project Datasets" id="{2E77D04D-14D4-4BED-9FA7-C99A3C7899CF}">
+          <p14:sldIdLst>
+            <p14:sldId id="277"/>
+            <p14:sldId id="275"/>
+          </p14:sldIdLst>
+        </p14:section>
+        <p14:section name="Copy Datasets" id="{D6A12F74-0150-4F00-988C-D9D4A6A78534}">
+          <p14:sldIdLst>
+            <p14:sldId id="278"/>
+            <p14:sldId id="279"/>
           </p14:sldIdLst>
         </p14:section>
         <p14:section name="Dataset Gallery" id="{69866AF7-968C-4F26-9ECA-AA64F6FFB6E8}">
@@ -670,7 +688,7 @@
           <a:p>
             <a:fld id="{E487E608-D9C6-4B3C-A9A4-BEAD08ECA06D}" type="datetimeFigureOut">
               <a:rPr lang="en-US" smtClean="0"/>
-              <a:t>11/17/2025</a:t>
+              <a:t>11/26/2025</a:t>
             </a:fld>
             <a:endParaRPr lang="en-US"/>
           </a:p>
@@ -1557,7 +1575,7 @@
             </a:pPr>
             <a:r>
               <a:rPr lang="en-US" dirty="0"/>
-              <a:t>Marked: docs/</a:t>
+              <a:t>Marked: /docs/</a:t>
             </a:r>
             <a:r>
               <a:rPr lang="en-US" sz="1200" b="0" u="sng" kern="1200" dirty="0">
@@ -1685,7 +1703,7 @@
             </a:pPr>
             <a:r>
               <a:rPr lang="en-US" dirty="0"/>
-              <a:t>Marked: </a:t>
+              <a:t>Marked: /docs</a:t>
             </a:r>
             <a:r>
               <a:rPr lang="en-US" sz="1200" b="0" u="sng" kern="1200" dirty="0">
@@ -1791,9 +1809,253 @@
           <a:bodyPr/>
           <a:lstStyle/>
           <a:p>
+            <a:pPr marL="0" marR="0" lvl="0" indent="0" algn="l" defTabSz="914400" rtl="0" eaLnBrk="1" fontAlgn="auto" latinLnBrk="0" hangingPunct="1">
+              <a:lnSpc>
+                <a:spcPct val="100000"/>
+              </a:lnSpc>
+              <a:spcBef>
+                <a:spcPts val="0"/>
+              </a:spcBef>
+              <a:spcAft>
+                <a:spcPts val="0"/>
+              </a:spcAft>
+              <a:buClrTx/>
+              <a:buSzTx/>
+              <a:buFontTx/>
+              <a:buNone/>
+              <a:tabLst/>
+              <a:defRPr/>
+            </a:pPr>
             <a:r>
               <a:rPr lang="en-US" dirty="0"/>
-              <a:t>Marked:  </a:t>
+              <a:t>Marked: /docs</a:t>
+            </a:r>
+            <a:r>
+              <a:rPr lang="en-US" sz="1200" b="0" u="sng" kern="1200" dirty="0">
+                <a:solidFill>
+                  <a:schemeClr val="tx1"/>
+                </a:solidFill>
+                <a:effectLst/>
+                <a:latin typeface="+mn-lt"/>
+                <a:ea typeface="+mn-ea"/>
+                <a:cs typeface="+mn-cs"/>
+              </a:rPr>
+              <a:t>/studio/assets/projects/sample-datasets-button.jpg</a:t>
+            </a:r>
+            <a:endParaRPr lang="en-US" sz="1200" b="0" kern="1200" dirty="0">
+              <a:solidFill>
+                <a:schemeClr val="tx1"/>
+              </a:solidFill>
+              <a:effectLst/>
+              <a:latin typeface="+mn-lt"/>
+              <a:ea typeface="+mn-ea"/>
+              <a:cs typeface="+mn-cs"/>
+            </a:endParaRPr>
+          </a:p>
+        </p:txBody>
+      </p:sp>
+      <p:sp>
+        <p:nvSpPr>
+          <p:cNvPr id="4" name="Slide Number Placeholder 3"/>
+          <p:cNvSpPr>
+            <a:spLocks noGrp="1"/>
+          </p:cNvSpPr>
+          <p:nvPr>
+            <p:ph type="sldNum" sz="quarter" idx="5"/>
+          </p:nvPr>
+        </p:nvSpPr>
+        <p:spPr/>
+        <p:txBody>
+          <a:bodyPr/>
+          <a:lstStyle/>
+          <a:p>
+            <a:fld id="{874397DF-5812-45E4-B5F0-BF2AEB9BFE48}" type="slidenum">
+              <a:rPr lang="en-US" smtClean="0"/>
+              <a:t>15</a:t>
+            </a:fld>
+            <a:endParaRPr lang="en-US"/>
+          </a:p>
+        </p:txBody>
+      </p:sp>
+    </p:spTree>
+    <p:extLst>
+      <p:ext uri="{BB962C8B-B14F-4D97-AF65-F5344CB8AC3E}">
+        <p14:creationId xmlns:p14="http://schemas.microsoft.com/office/powerpoint/2010/main" val="2261502406"/>
+      </p:ext>
+    </p:extLst>
+  </p:cSld>
+  <p:clrMapOvr>
+    <a:masterClrMapping/>
+  </p:clrMapOvr>
+</p:notes>
+</file>
+
+<file path=ppt/notesSlides/notesSlide8.xml><?xml version="1.0" encoding="utf-8"?>
+<p:notes xmlns:a="http://schemas.openxmlformats.org/drawingml/2006/main" xmlns:r="http://schemas.openxmlformats.org/officeDocument/2006/relationships" xmlns:p="http://schemas.openxmlformats.org/presentationml/2006/main">
+  <p:cSld>
+    <p:spTree>
+      <p:nvGrpSpPr>
+        <p:cNvPr id="1" name=""/>
+        <p:cNvGrpSpPr/>
+        <p:nvPr/>
+      </p:nvGrpSpPr>
+      <p:grpSpPr>
+        <a:xfrm>
+          <a:off x="0" y="0"/>
+          <a:ext cx="0" cy="0"/>
+          <a:chOff x="0" y="0"/>
+          <a:chExt cx="0" cy="0"/>
+        </a:xfrm>
+      </p:grpSpPr>
+      <p:sp>
+        <p:nvSpPr>
+          <p:cNvPr id="2" name="Slide Image Placeholder 1"/>
+          <p:cNvSpPr>
+            <a:spLocks noGrp="1" noRot="1" noChangeAspect="1"/>
+          </p:cNvSpPr>
+          <p:nvPr>
+            <p:ph type="sldImg"/>
+          </p:nvPr>
+        </p:nvSpPr>
+        <p:spPr/>
+      </p:sp>
+      <p:sp>
+        <p:nvSpPr>
+          <p:cNvPr id="3" name="Notes Placeholder 2"/>
+          <p:cNvSpPr>
+            <a:spLocks noGrp="1"/>
+          </p:cNvSpPr>
+          <p:nvPr>
+            <p:ph type="body" idx="1"/>
+          </p:nvPr>
+        </p:nvSpPr>
+        <p:spPr/>
+        <p:txBody>
+          <a:bodyPr/>
+          <a:lstStyle/>
+          <a:p>
+            <a:pPr marL="0" marR="0" lvl="0" indent="0" algn="l" defTabSz="914400" rtl="0" eaLnBrk="1" fontAlgn="auto" latinLnBrk="0" hangingPunct="1">
+              <a:lnSpc>
+                <a:spcPct val="100000"/>
+              </a:lnSpc>
+              <a:spcBef>
+                <a:spcPts val="0"/>
+              </a:spcBef>
+              <a:spcAft>
+                <a:spcPts val="0"/>
+              </a:spcAft>
+              <a:buClrTx/>
+              <a:buSzTx/>
+              <a:buFontTx/>
+              <a:buNone/>
+              <a:tabLst/>
+              <a:defRPr/>
+            </a:pPr>
+            <a:r>
+              <a:rPr lang="en-CA" dirty="0"/>
+              <a:t>Marked: </a:t>
+            </a:r>
+            <a:r>
+              <a:rPr lang="en-US" sz="1200" b="0" kern="1200" dirty="0">
+                <a:solidFill>
+                  <a:schemeClr val="tx1"/>
+                </a:solidFill>
+                <a:effectLst/>
+                <a:latin typeface="+mn-lt"/>
+                <a:ea typeface="+mn-ea"/>
+                <a:cs typeface="+mn-cs"/>
+              </a:rPr>
+              <a:t>/docs/datasets/assets/management/copy-dataset-option.jpg</a:t>
+            </a:r>
+          </a:p>
+          <a:p>
+            <a:endParaRPr lang="en-US" dirty="0"/>
+          </a:p>
+        </p:txBody>
+      </p:sp>
+      <p:sp>
+        <p:nvSpPr>
+          <p:cNvPr id="4" name="Slide Number Placeholder 3"/>
+          <p:cNvSpPr>
+            <a:spLocks noGrp="1"/>
+          </p:cNvSpPr>
+          <p:nvPr>
+            <p:ph type="sldNum" sz="quarter" idx="5"/>
+          </p:nvPr>
+        </p:nvSpPr>
+        <p:spPr/>
+        <p:txBody>
+          <a:bodyPr/>
+          <a:lstStyle/>
+          <a:p>
+            <a:fld id="{874397DF-5812-45E4-B5F0-BF2AEB9BFE48}" type="slidenum">
+              <a:rPr lang="en-US" smtClean="0"/>
+              <a:t>17</a:t>
+            </a:fld>
+            <a:endParaRPr lang="en-US"/>
+          </a:p>
+        </p:txBody>
+      </p:sp>
+    </p:spTree>
+    <p:extLst>
+      <p:ext uri="{BB962C8B-B14F-4D97-AF65-F5344CB8AC3E}">
+        <p14:creationId xmlns:p14="http://schemas.microsoft.com/office/powerpoint/2010/main" val="3564482302"/>
+      </p:ext>
+    </p:extLst>
+  </p:cSld>
+  <p:clrMapOvr>
+    <a:masterClrMapping/>
+  </p:clrMapOvr>
+</p:notes>
+</file>
+
+<file path=ppt/notesSlides/notesSlide9.xml><?xml version="1.0" encoding="utf-8"?>
+<p:notes xmlns:a="http://schemas.openxmlformats.org/drawingml/2006/main" xmlns:r="http://schemas.openxmlformats.org/officeDocument/2006/relationships" xmlns:p="http://schemas.openxmlformats.org/presentationml/2006/main">
+  <p:cSld>
+    <p:spTree>
+      <p:nvGrpSpPr>
+        <p:cNvPr id="1" name=""/>
+        <p:cNvGrpSpPr/>
+        <p:nvPr/>
+      </p:nvGrpSpPr>
+      <p:grpSpPr>
+        <a:xfrm>
+          <a:off x="0" y="0"/>
+          <a:ext cx="0" cy="0"/>
+          <a:chOff x="0" y="0"/>
+          <a:chExt cx="0" cy="0"/>
+        </a:xfrm>
+      </p:grpSpPr>
+      <p:sp>
+        <p:nvSpPr>
+          <p:cNvPr id="2" name="Slide Image Placeholder 1"/>
+          <p:cNvSpPr>
+            <a:spLocks noGrp="1" noRot="1" noChangeAspect="1"/>
+          </p:cNvSpPr>
+          <p:nvPr>
+            <p:ph type="sldImg"/>
+          </p:nvPr>
+        </p:nvSpPr>
+        <p:spPr/>
+      </p:sp>
+      <p:sp>
+        <p:nvSpPr>
+          <p:cNvPr id="3" name="Notes Placeholder 2"/>
+          <p:cNvSpPr>
+            <a:spLocks noGrp="1"/>
+          </p:cNvSpPr>
+          <p:nvPr>
+            <p:ph type="body" idx="1"/>
+          </p:nvPr>
+        </p:nvSpPr>
+        <p:spPr/>
+        <p:txBody>
+          <a:bodyPr/>
+          <a:lstStyle/>
+          <a:p>
+            <a:r>
+              <a:rPr lang="en-US" dirty="0"/>
+              <a:t>Marked:  /</a:t>
             </a:r>
             <a:r>
               <a:rPr lang="en-US" sz="1200" b="0" i="0" kern="1200" dirty="0">
@@ -1828,7 +2090,7 @@
           <a:p>
             <a:fld id="{874397DF-5812-45E4-B5F0-BF2AEB9BFE48}" type="slidenum">
               <a:rPr lang="en-US" smtClean="0"/>
-              <a:t>16</a:t>
+              <a:t>21</a:t>
             </a:fld>
             <a:endParaRPr lang="en-US"/>
           </a:p>
@@ -1994,7 +2256,7 @@
           <a:p>
             <a:fld id="{D241CDF3-A1FB-4215-9C3B-B36887AAFAD2}" type="datetimeFigureOut">
               <a:rPr lang="en-US" smtClean="0"/>
-              <a:t>11/17/2025</a:t>
+              <a:t>11/26/2025</a:t>
             </a:fld>
             <a:endParaRPr lang="en-US"/>
           </a:p>
@@ -2192,7 +2454,7 @@
           <a:p>
             <a:fld id="{D241CDF3-A1FB-4215-9C3B-B36887AAFAD2}" type="datetimeFigureOut">
               <a:rPr lang="en-US" smtClean="0"/>
-              <a:t>11/17/2025</a:t>
+              <a:t>11/26/2025</a:t>
             </a:fld>
             <a:endParaRPr lang="en-US"/>
           </a:p>
@@ -2400,7 +2662,7 @@
           <a:p>
             <a:fld id="{D241CDF3-A1FB-4215-9C3B-B36887AAFAD2}" type="datetimeFigureOut">
               <a:rPr lang="en-US" smtClean="0"/>
-              <a:t>11/17/2025</a:t>
+              <a:t>11/26/2025</a:t>
             </a:fld>
             <a:endParaRPr lang="en-US"/>
           </a:p>
@@ -2598,7 +2860,7 @@
           <a:p>
             <a:fld id="{D241CDF3-A1FB-4215-9C3B-B36887AAFAD2}" type="datetimeFigureOut">
               <a:rPr lang="en-US" smtClean="0"/>
-              <a:t>11/17/2025</a:t>
+              <a:t>11/26/2025</a:t>
             </a:fld>
             <a:endParaRPr lang="en-US"/>
           </a:p>
@@ -2873,7 +3135,7 @@
           <a:p>
             <a:fld id="{D241CDF3-A1FB-4215-9C3B-B36887AAFAD2}" type="datetimeFigureOut">
               <a:rPr lang="en-US" smtClean="0"/>
-              <a:t>11/17/2025</a:t>
+              <a:t>11/26/2025</a:t>
             </a:fld>
             <a:endParaRPr lang="en-US"/>
           </a:p>
@@ -3138,7 +3400,7 @@
           <a:p>
             <a:fld id="{D241CDF3-A1FB-4215-9C3B-B36887AAFAD2}" type="datetimeFigureOut">
               <a:rPr lang="en-US" smtClean="0"/>
-              <a:t>11/17/2025</a:t>
+              <a:t>11/26/2025</a:t>
             </a:fld>
             <a:endParaRPr lang="en-US"/>
           </a:p>
@@ -3550,7 +3812,7 @@
           <a:p>
             <a:fld id="{D241CDF3-A1FB-4215-9C3B-B36887AAFAD2}" type="datetimeFigureOut">
               <a:rPr lang="en-US" smtClean="0"/>
-              <a:t>11/17/2025</a:t>
+              <a:t>11/26/2025</a:t>
             </a:fld>
             <a:endParaRPr lang="en-US"/>
           </a:p>
@@ -3691,7 +3953,7 @@
           <a:p>
             <a:fld id="{D241CDF3-A1FB-4215-9C3B-B36887AAFAD2}" type="datetimeFigureOut">
               <a:rPr lang="en-US" smtClean="0"/>
-              <a:t>11/17/2025</a:t>
+              <a:t>11/26/2025</a:t>
             </a:fld>
             <a:endParaRPr lang="en-US"/>
           </a:p>
@@ -3804,7 +4066,7 @@
           <a:p>
             <a:fld id="{D241CDF3-A1FB-4215-9C3B-B36887AAFAD2}" type="datetimeFigureOut">
               <a:rPr lang="en-US" smtClean="0"/>
-              <a:t>11/17/2025</a:t>
+              <a:t>11/26/2025</a:t>
             </a:fld>
             <a:endParaRPr lang="en-US"/>
           </a:p>
@@ -4115,7 +4377,7 @@
           <a:p>
             <a:fld id="{D241CDF3-A1FB-4215-9C3B-B36887AAFAD2}" type="datetimeFigureOut">
               <a:rPr lang="en-US" smtClean="0"/>
-              <a:t>11/17/2025</a:t>
+              <a:t>11/26/2025</a:t>
             </a:fld>
             <a:endParaRPr lang="en-US"/>
           </a:p>
@@ -4403,7 +4665,7 @@
           <a:p>
             <a:fld id="{D241CDF3-A1FB-4215-9C3B-B36887AAFAD2}" type="datetimeFigureOut">
               <a:rPr lang="en-US" smtClean="0"/>
-              <a:t>11/17/2025</a:t>
+              <a:t>11/26/2025</a:t>
             </a:fld>
             <a:endParaRPr lang="en-US"/>
           </a:p>
@@ -4644,7 +4906,7 @@
           <a:p>
             <a:fld id="{D241CDF3-A1FB-4215-9C3B-B36887AAFAD2}" type="datetimeFigureOut">
               <a:rPr lang="en-US" smtClean="0"/>
-              <a:t>11/17/2025</a:t>
+              <a:t>11/26/2025</a:t>
             </a:fld>
             <a:endParaRPr lang="en-US"/>
           </a:p>
@@ -5827,6 +6089,630 @@
   <p:cSld>
     <p:spTree>
       <p:nvGrpSpPr>
+        <p:cNvPr id="1" name=""/>
+        <p:cNvGrpSpPr/>
+        <p:nvPr/>
+      </p:nvGrpSpPr>
+      <p:grpSpPr>
+        <a:xfrm>
+          <a:off x="0" y="0"/>
+          <a:ext cx="0" cy="0"/>
+          <a:chOff x="0" y="0"/>
+          <a:chExt cx="0" cy="0"/>
+        </a:xfrm>
+      </p:grpSpPr>
+      <p:pic>
+        <p:nvPicPr>
+          <p:cNvPr id="4" name="Picture 3">
+            <a:extLst>
+              <a:ext uri="{FF2B5EF4-FFF2-40B4-BE49-F238E27FC236}">
+                <a16:creationId xmlns:a16="http://schemas.microsoft.com/office/drawing/2014/main" id="{BC15DFB5-2838-BF1E-3183-F8B1D1D3BC70}"/>
+              </a:ext>
+            </a:extLst>
+          </p:cNvPr>
+          <p:cNvPicPr>
+            <a:picLocks noChangeAspect="1"/>
+          </p:cNvPicPr>
+          <p:nvPr/>
+        </p:nvPicPr>
+        <p:blipFill>
+          <a:blip r:embed="rId3"/>
+          <a:stretch>
+            <a:fillRect/>
+          </a:stretch>
+        </p:blipFill>
+        <p:spPr>
+          <a:xfrm>
+            <a:off x="0" y="320444"/>
+            <a:ext cx="12192000" cy="6217112"/>
+          </a:xfrm>
+          <a:prstGeom prst="rect">
+            <a:avLst/>
+          </a:prstGeom>
+        </p:spPr>
+      </p:pic>
+      <p:sp>
+        <p:nvSpPr>
+          <p:cNvPr id="5" name="Rectangle 4">
+            <a:extLst>
+              <a:ext uri="{FF2B5EF4-FFF2-40B4-BE49-F238E27FC236}">
+                <a16:creationId xmlns:a16="http://schemas.microsoft.com/office/drawing/2014/main" id="{FDD68D19-65A5-C778-846D-E65A39B372E6}"/>
+              </a:ext>
+            </a:extLst>
+          </p:cNvPr>
+          <p:cNvSpPr/>
+          <p:nvPr/>
+        </p:nvSpPr>
+        <p:spPr>
+          <a:xfrm>
+            <a:off x="216816" y="2780907"/>
+            <a:ext cx="3723588" cy="575036"/>
+          </a:xfrm>
+          <a:prstGeom prst="rect">
+            <a:avLst/>
+          </a:prstGeom>
+          <a:noFill/>
+          <a:ln w="38100">
+            <a:solidFill>
+              <a:srgbClr val="FF0000"/>
+            </a:solidFill>
+          </a:ln>
+        </p:spPr>
+        <p:style>
+          <a:lnRef idx="2">
+            <a:schemeClr val="accent1">
+              <a:shade val="15000"/>
+            </a:schemeClr>
+          </a:lnRef>
+          <a:fillRef idx="1">
+            <a:schemeClr val="accent1"/>
+          </a:fillRef>
+          <a:effectRef idx="0">
+            <a:schemeClr val="accent1"/>
+          </a:effectRef>
+          <a:fontRef idx="minor">
+            <a:schemeClr val="lt1"/>
+          </a:fontRef>
+        </p:style>
+        <p:txBody>
+          <a:bodyPr rtlCol="0" anchor="ctr"/>
+          <a:lstStyle/>
+          <a:p>
+            <a:pPr algn="ctr"/>
+            <a:endParaRPr lang="en-US">
+              <a:ln w="0"/>
+              <a:solidFill>
+                <a:schemeClr val="tx1"/>
+              </a:solidFill>
+              <a:effectLst>
+                <a:outerShdw blurRad="38100" dist="19050" dir="2700000" algn="tl" rotWithShape="0">
+                  <a:schemeClr val="dk1">
+                    <a:alpha val="40000"/>
+                  </a:schemeClr>
+                </a:outerShdw>
+              </a:effectLst>
+            </a:endParaRPr>
+          </a:p>
+        </p:txBody>
+      </p:sp>
+    </p:spTree>
+    <p:extLst>
+      <p:ext uri="{BB962C8B-B14F-4D97-AF65-F5344CB8AC3E}">
+        <p14:creationId xmlns:p14="http://schemas.microsoft.com/office/powerpoint/2010/main" val="442216524"/>
+      </p:ext>
+    </p:extLst>
+  </p:cSld>
+  <p:clrMapOvr>
+    <a:masterClrMapping/>
+  </p:clrMapOvr>
+</p:sld>
+</file>
+
+<file path=ppt/slides/slide16.xml><?xml version="1.0" encoding="utf-8"?>
+<p:sld xmlns:a="http://schemas.openxmlformats.org/drawingml/2006/main" xmlns:r="http://schemas.openxmlformats.org/officeDocument/2006/relationships" xmlns:p="http://schemas.openxmlformats.org/presentationml/2006/main">
+  <p:cSld>
+    <p:spTree>
+      <p:nvGrpSpPr>
+        <p:cNvPr id="1" name="">
+          <a:extLst>
+            <a:ext uri="{FF2B5EF4-FFF2-40B4-BE49-F238E27FC236}">
+              <a16:creationId xmlns:a16="http://schemas.microsoft.com/office/drawing/2014/main" id="{809CFEE6-0B41-B5AC-A8BC-93751CD53AB3}"/>
+            </a:ext>
+          </a:extLst>
+        </p:cNvPr>
+        <p:cNvGrpSpPr/>
+        <p:nvPr/>
+      </p:nvGrpSpPr>
+      <p:grpSpPr>
+        <a:xfrm>
+          <a:off x="0" y="0"/>
+          <a:ext cx="0" cy="0"/>
+          <a:chOff x="0" y="0"/>
+          <a:chExt cx="0" cy="0"/>
+        </a:xfrm>
+      </p:grpSpPr>
+      <p:sp>
+        <p:nvSpPr>
+          <p:cNvPr id="2" name="Title 1">
+            <a:extLst>
+              <a:ext uri="{FF2B5EF4-FFF2-40B4-BE49-F238E27FC236}">
+                <a16:creationId xmlns:a16="http://schemas.microsoft.com/office/drawing/2014/main" id="{2BF9E2B4-73F0-8F6C-A386-473C27424135}"/>
+              </a:ext>
+            </a:extLst>
+          </p:cNvPr>
+          <p:cNvSpPr>
+            <a:spLocks noGrp="1"/>
+          </p:cNvSpPr>
+          <p:nvPr>
+            <p:ph type="title"/>
+          </p:nvPr>
+        </p:nvSpPr>
+        <p:spPr/>
+        <p:txBody>
+          <a:bodyPr/>
+          <a:lstStyle/>
+          <a:p>
+            <a:r>
+              <a:rPr lang="en-CA" dirty="0"/>
+              <a:t>Sample Project Datasets</a:t>
+            </a:r>
+            <a:endParaRPr lang="en-US" dirty="0"/>
+          </a:p>
+        </p:txBody>
+      </p:sp>
+      <p:sp>
+        <p:nvSpPr>
+          <p:cNvPr id="3" name="Content Placeholder 2">
+            <a:extLst>
+              <a:ext uri="{FF2B5EF4-FFF2-40B4-BE49-F238E27FC236}">
+                <a16:creationId xmlns:a16="http://schemas.microsoft.com/office/drawing/2014/main" id="{9E1A8AAA-9794-E667-0B36-53D3F4BA4D0D}"/>
+              </a:ext>
+            </a:extLst>
+          </p:cNvPr>
+          <p:cNvSpPr>
+            <a:spLocks noGrp="1"/>
+          </p:cNvSpPr>
+          <p:nvPr>
+            <p:ph idx="1"/>
+          </p:nvPr>
+        </p:nvSpPr>
+        <p:spPr/>
+        <p:txBody>
+          <a:bodyPr/>
+          <a:lstStyle/>
+          <a:p>
+            <a:r>
+              <a:rPr lang="en-US" dirty="0"/>
+              <a:t>Unmarked: None</a:t>
+            </a:r>
+          </a:p>
+        </p:txBody>
+      </p:sp>
+    </p:spTree>
+    <p:extLst>
+      <p:ext uri="{BB962C8B-B14F-4D97-AF65-F5344CB8AC3E}">
+        <p14:creationId xmlns:p14="http://schemas.microsoft.com/office/powerpoint/2010/main" val="3360056513"/>
+      </p:ext>
+    </p:extLst>
+  </p:cSld>
+  <p:clrMapOvr>
+    <a:masterClrMapping/>
+  </p:clrMapOvr>
+</p:sld>
+</file>
+
+<file path=ppt/slides/slide17.xml><?xml version="1.0" encoding="utf-8"?>
+<p:sld xmlns:a="http://schemas.openxmlformats.org/drawingml/2006/main" xmlns:r="http://schemas.openxmlformats.org/officeDocument/2006/relationships" xmlns:p="http://schemas.openxmlformats.org/presentationml/2006/main">
+  <p:cSld>
+    <p:spTree>
+      <p:nvGrpSpPr>
+        <p:cNvPr id="1" name=""/>
+        <p:cNvGrpSpPr/>
+        <p:nvPr/>
+      </p:nvGrpSpPr>
+      <p:grpSpPr>
+        <a:xfrm>
+          <a:off x="0" y="0"/>
+          <a:ext cx="0" cy="0"/>
+          <a:chOff x="0" y="0"/>
+          <a:chExt cx="0" cy="0"/>
+        </a:xfrm>
+      </p:grpSpPr>
+      <p:pic>
+        <p:nvPicPr>
+          <p:cNvPr id="5" name="Picture 4">
+            <a:extLst>
+              <a:ext uri="{FF2B5EF4-FFF2-40B4-BE49-F238E27FC236}">
+                <a16:creationId xmlns:a16="http://schemas.microsoft.com/office/drawing/2014/main" id="{815569EA-B53F-91BA-E3B4-87EE7BED1899}"/>
+              </a:ext>
+            </a:extLst>
+          </p:cNvPr>
+          <p:cNvPicPr>
+            <a:picLocks noChangeAspect="1"/>
+          </p:cNvPicPr>
+          <p:nvPr/>
+        </p:nvPicPr>
+        <p:blipFill>
+          <a:blip r:embed="rId3"/>
+          <a:stretch>
+            <a:fillRect/>
+          </a:stretch>
+        </p:blipFill>
+        <p:spPr>
+          <a:xfrm>
+            <a:off x="0" y="145849"/>
+            <a:ext cx="12192000" cy="6566301"/>
+          </a:xfrm>
+          <a:prstGeom prst="rect">
+            <a:avLst/>
+          </a:prstGeom>
+        </p:spPr>
+      </p:pic>
+      <p:sp>
+        <p:nvSpPr>
+          <p:cNvPr id="6" name="Rectangle 5">
+            <a:extLst>
+              <a:ext uri="{FF2B5EF4-FFF2-40B4-BE49-F238E27FC236}">
+                <a16:creationId xmlns:a16="http://schemas.microsoft.com/office/drawing/2014/main" id="{1F8D9B77-C704-652C-0CDB-B7FFA8AA2E83}"/>
+              </a:ext>
+            </a:extLst>
+          </p:cNvPr>
+          <p:cNvSpPr/>
+          <p:nvPr/>
+        </p:nvSpPr>
+        <p:spPr>
+          <a:xfrm>
+            <a:off x="3695308" y="2658359"/>
+            <a:ext cx="1357460" cy="377072"/>
+          </a:xfrm>
+          <a:prstGeom prst="rect">
+            <a:avLst/>
+          </a:prstGeom>
+          <a:noFill/>
+          <a:ln w="38100">
+            <a:solidFill>
+              <a:srgbClr val="FF0000"/>
+            </a:solidFill>
+          </a:ln>
+        </p:spPr>
+        <p:style>
+          <a:lnRef idx="2">
+            <a:schemeClr val="accent1">
+              <a:shade val="15000"/>
+            </a:schemeClr>
+          </a:lnRef>
+          <a:fillRef idx="1">
+            <a:schemeClr val="accent1"/>
+          </a:fillRef>
+          <a:effectRef idx="0">
+            <a:schemeClr val="accent1"/>
+          </a:effectRef>
+          <a:fontRef idx="minor">
+            <a:schemeClr val="lt1"/>
+          </a:fontRef>
+        </p:style>
+        <p:txBody>
+          <a:bodyPr rtlCol="0" anchor="ctr"/>
+          <a:lstStyle/>
+          <a:p>
+            <a:pPr algn="ctr"/>
+            <a:endParaRPr lang="en-US">
+              <a:ln w="0"/>
+              <a:solidFill>
+                <a:schemeClr val="tx1"/>
+              </a:solidFill>
+              <a:effectLst>
+                <a:outerShdw blurRad="38100" dist="19050" dir="2700000" algn="tl" rotWithShape="0">
+                  <a:schemeClr val="dk1">
+                    <a:alpha val="40000"/>
+                  </a:schemeClr>
+                </a:outerShdw>
+              </a:effectLst>
+            </a:endParaRPr>
+          </a:p>
+        </p:txBody>
+      </p:sp>
+    </p:spTree>
+    <p:extLst>
+      <p:ext uri="{BB962C8B-B14F-4D97-AF65-F5344CB8AC3E}">
+        <p14:creationId xmlns:p14="http://schemas.microsoft.com/office/powerpoint/2010/main" val="3653338779"/>
+      </p:ext>
+    </p:extLst>
+  </p:cSld>
+  <p:clrMapOvr>
+    <a:masterClrMapping/>
+  </p:clrMapOvr>
+</p:sld>
+</file>
+
+<file path=ppt/slides/slide18.xml><?xml version="1.0" encoding="utf-8"?>
+<p:sld xmlns:a="http://schemas.openxmlformats.org/drawingml/2006/main" xmlns:r="http://schemas.openxmlformats.org/officeDocument/2006/relationships" xmlns:p="http://schemas.openxmlformats.org/presentationml/2006/main">
+  <p:cSld>
+    <p:spTree>
+      <p:nvGrpSpPr>
+        <p:cNvPr id="1" name="">
+          <a:extLst>
+            <a:ext uri="{FF2B5EF4-FFF2-40B4-BE49-F238E27FC236}">
+              <a16:creationId xmlns:a16="http://schemas.microsoft.com/office/drawing/2014/main" id="{11B0CEE4-C842-147F-93DD-EE4B8EEA0F79}"/>
+            </a:ext>
+          </a:extLst>
+        </p:cNvPr>
+        <p:cNvGrpSpPr/>
+        <p:nvPr/>
+      </p:nvGrpSpPr>
+      <p:grpSpPr>
+        <a:xfrm>
+          <a:off x="0" y="0"/>
+          <a:ext cx="0" cy="0"/>
+          <a:chOff x="0" y="0"/>
+          <a:chExt cx="0" cy="0"/>
+        </a:xfrm>
+      </p:grpSpPr>
+      <p:sp>
+        <p:nvSpPr>
+          <p:cNvPr id="2" name="Title 1">
+            <a:extLst>
+              <a:ext uri="{FF2B5EF4-FFF2-40B4-BE49-F238E27FC236}">
+                <a16:creationId xmlns:a16="http://schemas.microsoft.com/office/drawing/2014/main" id="{555DF414-8003-021F-80E1-998F60EBA808}"/>
+              </a:ext>
+            </a:extLst>
+          </p:cNvPr>
+          <p:cNvSpPr>
+            <a:spLocks noGrp="1"/>
+          </p:cNvSpPr>
+          <p:nvPr>
+            <p:ph type="title"/>
+          </p:nvPr>
+        </p:nvSpPr>
+        <p:spPr/>
+        <p:txBody>
+          <a:bodyPr/>
+          <a:lstStyle/>
+          <a:p>
+            <a:r>
+              <a:rPr lang="en-CA" dirty="0"/>
+              <a:t>Copy Datasets</a:t>
+            </a:r>
+            <a:endParaRPr lang="en-US" dirty="0"/>
+          </a:p>
+        </p:txBody>
+      </p:sp>
+      <p:sp>
+        <p:nvSpPr>
+          <p:cNvPr id="3" name="Content Placeholder 2">
+            <a:extLst>
+              <a:ext uri="{FF2B5EF4-FFF2-40B4-BE49-F238E27FC236}">
+                <a16:creationId xmlns:a16="http://schemas.microsoft.com/office/drawing/2014/main" id="{3E4DE596-7C33-AA10-AB88-B649FA1EA5EE}"/>
+              </a:ext>
+            </a:extLst>
+          </p:cNvPr>
+          <p:cNvSpPr>
+            <a:spLocks noGrp="1"/>
+          </p:cNvSpPr>
+          <p:nvPr>
+            <p:ph idx="1"/>
+          </p:nvPr>
+        </p:nvSpPr>
+        <p:spPr/>
+        <p:txBody>
+          <a:bodyPr/>
+          <a:lstStyle/>
+          <a:p>
+            <a:r>
+              <a:rPr lang="en-US" dirty="0"/>
+              <a:t>Unmarked: None</a:t>
+            </a:r>
+          </a:p>
+        </p:txBody>
+      </p:sp>
+    </p:spTree>
+    <p:extLst>
+      <p:ext uri="{BB962C8B-B14F-4D97-AF65-F5344CB8AC3E}">
+        <p14:creationId xmlns:p14="http://schemas.microsoft.com/office/powerpoint/2010/main" val="3769516698"/>
+      </p:ext>
+    </p:extLst>
+  </p:cSld>
+  <p:clrMapOvr>
+    <a:masterClrMapping/>
+  </p:clrMapOvr>
+</p:sld>
+</file>
+
+<file path=ppt/slides/slide19.xml><?xml version="1.0" encoding="utf-8"?>
+<p:sld xmlns:a="http://schemas.openxmlformats.org/drawingml/2006/main" xmlns:r="http://schemas.openxmlformats.org/officeDocument/2006/relationships" xmlns:p="http://schemas.openxmlformats.org/presentationml/2006/main">
+  <p:cSld>
+    <p:spTree>
+      <p:nvGrpSpPr>
+        <p:cNvPr id="1" name=""/>
+        <p:cNvGrpSpPr/>
+        <p:nvPr/>
+      </p:nvGrpSpPr>
+      <p:grpSpPr>
+        <a:xfrm>
+          <a:off x="0" y="0"/>
+          <a:ext cx="0" cy="0"/>
+          <a:chOff x="0" y="0"/>
+          <a:chExt cx="0" cy="0"/>
+        </a:xfrm>
+      </p:grpSpPr>
+      <p:pic>
+        <p:nvPicPr>
+          <p:cNvPr id="5" name="Picture 4" descr="A screenshot of a computer&#10;&#10;AI-generated content may be incorrect.">
+            <a:extLst>
+              <a:ext uri="{FF2B5EF4-FFF2-40B4-BE49-F238E27FC236}">
+                <a16:creationId xmlns:a16="http://schemas.microsoft.com/office/drawing/2014/main" id="{B77F799D-8C4C-C678-3DA7-9A9EA024C7AF}"/>
+              </a:ext>
+            </a:extLst>
+          </p:cNvPr>
+          <p:cNvPicPr>
+            <a:picLocks noChangeAspect="1"/>
+          </p:cNvPicPr>
+          <p:nvPr/>
+        </p:nvPicPr>
+        <p:blipFill>
+          <a:blip r:embed="rId2">
+            <a:extLst>
+              <a:ext uri="{28A0092B-C50C-407E-A947-70E740481C1C}">
+                <a14:useLocalDpi xmlns:a14="http://schemas.microsoft.com/office/drawing/2010/main" val="0"/>
+              </a:ext>
+            </a:extLst>
+          </a:blip>
+          <a:stretch>
+            <a:fillRect/>
+          </a:stretch>
+        </p:blipFill>
+        <p:spPr>
+          <a:xfrm>
+            <a:off x="2066925" y="1295400"/>
+            <a:ext cx="8058150" cy="4267200"/>
+          </a:xfrm>
+          <a:prstGeom prst="rect">
+            <a:avLst/>
+          </a:prstGeom>
+        </p:spPr>
+      </p:pic>
+      <p:sp>
+        <p:nvSpPr>
+          <p:cNvPr id="6" name="Rectangle 5">
+            <a:extLst>
+              <a:ext uri="{FF2B5EF4-FFF2-40B4-BE49-F238E27FC236}">
+                <a16:creationId xmlns:a16="http://schemas.microsoft.com/office/drawing/2014/main" id="{31C033E4-ED0E-9E53-4D9F-9A89B0ADCAF5}"/>
+              </a:ext>
+            </a:extLst>
+          </p:cNvPr>
+          <p:cNvSpPr/>
+          <p:nvPr/>
+        </p:nvSpPr>
+        <p:spPr>
+          <a:xfrm>
+            <a:off x="9040305" y="5118755"/>
+            <a:ext cx="688157" cy="377072"/>
+          </a:xfrm>
+          <a:prstGeom prst="rect">
+            <a:avLst/>
+          </a:prstGeom>
+          <a:noFill/>
+          <a:ln w="38100">
+            <a:solidFill>
+              <a:srgbClr val="FF0000"/>
+            </a:solidFill>
+          </a:ln>
+        </p:spPr>
+        <p:style>
+          <a:lnRef idx="2">
+            <a:schemeClr val="accent1">
+              <a:shade val="15000"/>
+            </a:schemeClr>
+          </a:lnRef>
+          <a:fillRef idx="1">
+            <a:schemeClr val="accent1"/>
+          </a:fillRef>
+          <a:effectRef idx="0">
+            <a:schemeClr val="accent1"/>
+          </a:effectRef>
+          <a:fontRef idx="minor">
+            <a:schemeClr val="lt1"/>
+          </a:fontRef>
+        </p:style>
+        <p:txBody>
+          <a:bodyPr rtlCol="0" anchor="ctr"/>
+          <a:lstStyle/>
+          <a:p>
+            <a:pPr algn="ctr"/>
+            <a:endParaRPr lang="en-US">
+              <a:ln w="0"/>
+              <a:solidFill>
+                <a:schemeClr val="tx1"/>
+              </a:solidFill>
+              <a:effectLst>
+                <a:outerShdw blurRad="38100" dist="19050" dir="2700000" algn="tl" rotWithShape="0">
+                  <a:schemeClr val="dk1">
+                    <a:alpha val="40000"/>
+                  </a:schemeClr>
+                </a:outerShdw>
+              </a:effectLst>
+            </a:endParaRPr>
+          </a:p>
+        </p:txBody>
+      </p:sp>
+    </p:spTree>
+    <p:extLst>
+      <p:ext uri="{BB962C8B-B14F-4D97-AF65-F5344CB8AC3E}">
+        <p14:creationId xmlns:p14="http://schemas.microsoft.com/office/powerpoint/2010/main" val="804904445"/>
+      </p:ext>
+    </p:extLst>
+  </p:cSld>
+  <p:clrMapOvr>
+    <a:masterClrMapping/>
+  </p:clrMapOvr>
+</p:sld>
+</file>
+
+<file path=ppt/slides/slide2.xml><?xml version="1.0" encoding="utf-8"?>
+<p:sld xmlns:a="http://schemas.openxmlformats.org/drawingml/2006/main" xmlns:r="http://schemas.openxmlformats.org/officeDocument/2006/relationships" xmlns:p="http://schemas.openxmlformats.org/presentationml/2006/main">
+  <p:cSld>
+    <p:spTree>
+      <p:nvGrpSpPr>
+        <p:cNvPr id="1" name=""/>
+        <p:cNvGrpSpPr/>
+        <p:nvPr/>
+      </p:nvGrpSpPr>
+      <p:grpSpPr>
+        <a:xfrm>
+          <a:off x="0" y="0"/>
+          <a:ext cx="0" cy="0"/>
+          <a:chOff x="0" y="0"/>
+          <a:chExt cx="0" cy="0"/>
+        </a:xfrm>
+      </p:grpSpPr>
+      <p:pic>
+        <p:nvPicPr>
+          <p:cNvPr id="5" name="Picture 4">
+            <a:extLst>
+              <a:ext uri="{FF2B5EF4-FFF2-40B4-BE49-F238E27FC236}">
+                <a16:creationId xmlns:a16="http://schemas.microsoft.com/office/drawing/2014/main" id="{B97F010C-709D-B042-411F-8C6D7807055A}"/>
+              </a:ext>
+            </a:extLst>
+          </p:cNvPr>
+          <p:cNvPicPr>
+            <a:picLocks noChangeAspect="1"/>
+          </p:cNvPicPr>
+          <p:nvPr/>
+        </p:nvPicPr>
+        <p:blipFill>
+          <a:blip r:embed="rId2"/>
+          <a:stretch>
+            <a:fillRect/>
+          </a:stretch>
+        </p:blipFill>
+        <p:spPr>
+          <a:xfrm>
+            <a:off x="461176" y="113837"/>
+            <a:ext cx="11269648" cy="6630325"/>
+          </a:xfrm>
+          <a:prstGeom prst="rect">
+            <a:avLst/>
+          </a:prstGeom>
+        </p:spPr>
+      </p:pic>
+    </p:spTree>
+    <p:extLst>
+      <p:ext uri="{BB962C8B-B14F-4D97-AF65-F5344CB8AC3E}">
+        <p14:creationId xmlns:p14="http://schemas.microsoft.com/office/powerpoint/2010/main" val="837334526"/>
+      </p:ext>
+    </p:extLst>
+  </p:cSld>
+  <p:clrMapOvr>
+    <a:masterClrMapping/>
+  </p:clrMapOvr>
+</p:sld>
+</file>
+
+<file path=ppt/slides/slide20.xml><?xml version="1.0" encoding="utf-8"?>
+<p:sld xmlns:a="http://schemas.openxmlformats.org/drawingml/2006/main" xmlns:r="http://schemas.openxmlformats.org/officeDocument/2006/relationships" xmlns:p="http://schemas.openxmlformats.org/presentationml/2006/main">
+  <p:cSld>
+    <p:spTree>
+      <p:nvGrpSpPr>
         <p:cNvPr id="1" name="">
           <a:extLst>
             <a:ext uri="{FF2B5EF4-FFF2-40B4-BE49-F238E27FC236}">
@@ -5920,7 +6806,7 @@
 </p:sld>
 </file>
 
-<file path=ppt/slides/slide16.xml><?xml version="1.0" encoding="utf-8"?>
+<file path=ppt/slides/slide21.xml><?xml version="1.0" encoding="utf-8"?>
 <p:sld xmlns:a="http://schemas.openxmlformats.org/drawingml/2006/main" xmlns:r="http://schemas.openxmlformats.org/officeDocument/2006/relationships" xmlns:p="http://schemas.openxmlformats.org/presentationml/2006/main">
   <p:cSld>
     <p:spTree>
@@ -6393,66 +7279,6 @@
     <p:extLst>
       <p:ext uri="{BB962C8B-B14F-4D97-AF65-F5344CB8AC3E}">
         <p14:creationId xmlns:p14="http://schemas.microsoft.com/office/powerpoint/2010/main" val="2371670190"/>
-      </p:ext>
-    </p:extLst>
-  </p:cSld>
-  <p:clrMapOvr>
-    <a:masterClrMapping/>
-  </p:clrMapOvr>
-</p:sld>
-</file>
-
-<file path=ppt/slides/slide2.xml><?xml version="1.0" encoding="utf-8"?>
-<p:sld xmlns:a="http://schemas.openxmlformats.org/drawingml/2006/main" xmlns:r="http://schemas.openxmlformats.org/officeDocument/2006/relationships" xmlns:p="http://schemas.openxmlformats.org/presentationml/2006/main">
-  <p:cSld>
-    <p:spTree>
-      <p:nvGrpSpPr>
-        <p:cNvPr id="1" name=""/>
-        <p:cNvGrpSpPr/>
-        <p:nvPr/>
-      </p:nvGrpSpPr>
-      <p:grpSpPr>
-        <a:xfrm>
-          <a:off x="0" y="0"/>
-          <a:ext cx="0" cy="0"/>
-          <a:chOff x="0" y="0"/>
-          <a:chExt cx="0" cy="0"/>
-        </a:xfrm>
-      </p:grpSpPr>
-      <p:pic>
-        <p:nvPicPr>
-          <p:cNvPr id="5" name="Picture 4">
-            <a:extLst>
-              <a:ext uri="{FF2B5EF4-FFF2-40B4-BE49-F238E27FC236}">
-                <a16:creationId xmlns:a16="http://schemas.microsoft.com/office/drawing/2014/main" id="{B97F010C-709D-B042-411F-8C6D7807055A}"/>
-              </a:ext>
-            </a:extLst>
-          </p:cNvPr>
-          <p:cNvPicPr>
-            <a:picLocks noChangeAspect="1"/>
-          </p:cNvPicPr>
-          <p:nvPr/>
-        </p:nvPicPr>
-        <p:blipFill>
-          <a:blip r:embed="rId2"/>
-          <a:stretch>
-            <a:fillRect/>
-          </a:stretch>
-        </p:blipFill>
-        <p:spPr>
-          <a:xfrm>
-            <a:off x="461176" y="113837"/>
-            <a:ext cx="11269648" cy="6630325"/>
-          </a:xfrm>
-          <a:prstGeom prst="rect">
-            <a:avLst/>
-          </a:prstGeom>
-        </p:spPr>
-      </p:pic>
-    </p:spTree>
-    <p:extLst>
-      <p:ext uri="{BB962C8B-B14F-4D97-AF65-F5344CB8AC3E}">
-        <p14:creationId xmlns:p14="http://schemas.microsoft.com/office/powerpoint/2010/main" val="837334526"/>
       </p:ext>
     </p:extLst>
   </p:cSld>

--- a/images_with_layers.pptx
+++ b/images_with_layers.pptx
@@ -5,7 +5,7 @@
     <p:sldMasterId id="2147483648" r:id="rId1"/>
   </p:sldMasterIdLst>
   <p:notesMasterIdLst>
-    <p:notesMasterId r:id="rId23"/>
+    <p:notesMasterId r:id="rId26"/>
   </p:notesMasterIdLst>
   <p:sldIdLst>
     <p:sldId id="264" r:id="rId2"/>
@@ -27,8 +27,11 @@
     <p:sldId id="275" r:id="rId18"/>
     <p:sldId id="278" r:id="rId19"/>
     <p:sldId id="279" r:id="rId20"/>
-    <p:sldId id="262" r:id="rId21"/>
-    <p:sldId id="260" r:id="rId22"/>
+    <p:sldId id="280" r:id="rId21"/>
+    <p:sldId id="281" r:id="rId22"/>
+    <p:sldId id="282" r:id="rId23"/>
+    <p:sldId id="262" r:id="rId24"/>
+    <p:sldId id="260" r:id="rId25"/>
   </p:sldIdLst>
   <p:sldSz cx="12192000" cy="6858000"/>
   <p:notesSz cx="6858000" cy="9144000"/>
@@ -179,6 +182,13 @@
           <p14:sldIdLst>
             <p14:sldId id="278"/>
             <p14:sldId id="279"/>
+          </p14:sldIdLst>
+        </p14:section>
+        <p14:section name="Dataset History" id="{A3A0C823-0623-4EE2-B68E-8D6D6B7F2198}">
+          <p14:sldIdLst>
+            <p14:sldId id="280"/>
+            <p14:sldId id="281"/>
+            <p14:sldId id="282"/>
           </p14:sldIdLst>
         </p14:section>
         <p14:section name="Dataset Gallery" id="{69866AF7-968C-4F26-9ECA-AA64F6FFB6E8}">
@@ -688,7 +698,7 @@
           <a:p>
             <a:fld id="{E487E608-D9C6-4B3C-A9A4-BEAD08ECA06D}" type="datetimeFigureOut">
               <a:rPr lang="en-US" smtClean="0"/>
-              <a:t>11/26/2025</a:t>
+              <a:t>3/19/2026</a:t>
             </a:fld>
             <a:endParaRPr lang="en-US"/>
           </a:p>
@@ -2090,7 +2100,7 @@
           <a:p>
             <a:fld id="{874397DF-5812-45E4-B5F0-BF2AEB9BFE48}" type="slidenum">
               <a:rPr lang="en-US" smtClean="0"/>
-              <a:t>21</a:t>
+              <a:t>24</a:t>
             </a:fld>
             <a:endParaRPr lang="en-US"/>
           </a:p>
@@ -2256,7 +2266,7 @@
           <a:p>
             <a:fld id="{D241CDF3-A1FB-4215-9C3B-B36887AAFAD2}" type="datetimeFigureOut">
               <a:rPr lang="en-US" smtClean="0"/>
-              <a:t>11/26/2025</a:t>
+              <a:t>3/19/2026</a:t>
             </a:fld>
             <a:endParaRPr lang="en-US"/>
           </a:p>
@@ -2454,7 +2464,7 @@
           <a:p>
             <a:fld id="{D241CDF3-A1FB-4215-9C3B-B36887AAFAD2}" type="datetimeFigureOut">
               <a:rPr lang="en-US" smtClean="0"/>
-              <a:t>11/26/2025</a:t>
+              <a:t>3/19/2026</a:t>
             </a:fld>
             <a:endParaRPr lang="en-US"/>
           </a:p>
@@ -2662,7 +2672,7 @@
           <a:p>
             <a:fld id="{D241CDF3-A1FB-4215-9C3B-B36887AAFAD2}" type="datetimeFigureOut">
               <a:rPr lang="en-US" smtClean="0"/>
-              <a:t>11/26/2025</a:t>
+              <a:t>3/19/2026</a:t>
             </a:fld>
             <a:endParaRPr lang="en-US"/>
           </a:p>
@@ -2860,7 +2870,7 @@
           <a:p>
             <a:fld id="{D241CDF3-A1FB-4215-9C3B-B36887AAFAD2}" type="datetimeFigureOut">
               <a:rPr lang="en-US" smtClean="0"/>
-              <a:t>11/26/2025</a:t>
+              <a:t>3/19/2026</a:t>
             </a:fld>
             <a:endParaRPr lang="en-US"/>
           </a:p>
@@ -3135,7 +3145,7 @@
           <a:p>
             <a:fld id="{D241CDF3-A1FB-4215-9C3B-B36887AAFAD2}" type="datetimeFigureOut">
               <a:rPr lang="en-US" smtClean="0"/>
-              <a:t>11/26/2025</a:t>
+              <a:t>3/19/2026</a:t>
             </a:fld>
             <a:endParaRPr lang="en-US"/>
           </a:p>
@@ -3400,7 +3410,7 @@
           <a:p>
             <a:fld id="{D241CDF3-A1FB-4215-9C3B-B36887AAFAD2}" type="datetimeFigureOut">
               <a:rPr lang="en-US" smtClean="0"/>
-              <a:t>11/26/2025</a:t>
+              <a:t>3/19/2026</a:t>
             </a:fld>
             <a:endParaRPr lang="en-US"/>
           </a:p>
@@ -3812,7 +3822,7 @@
           <a:p>
             <a:fld id="{D241CDF3-A1FB-4215-9C3B-B36887AAFAD2}" type="datetimeFigureOut">
               <a:rPr lang="en-US" smtClean="0"/>
-              <a:t>11/26/2025</a:t>
+              <a:t>3/19/2026</a:t>
             </a:fld>
             <a:endParaRPr lang="en-US"/>
           </a:p>
@@ -3953,7 +3963,7 @@
           <a:p>
             <a:fld id="{D241CDF3-A1FB-4215-9C3B-B36887AAFAD2}" type="datetimeFigureOut">
               <a:rPr lang="en-US" smtClean="0"/>
-              <a:t>11/26/2025</a:t>
+              <a:t>3/19/2026</a:t>
             </a:fld>
             <a:endParaRPr lang="en-US"/>
           </a:p>
@@ -4066,7 +4076,7 @@
           <a:p>
             <a:fld id="{D241CDF3-A1FB-4215-9C3B-B36887AAFAD2}" type="datetimeFigureOut">
               <a:rPr lang="en-US" smtClean="0"/>
-              <a:t>11/26/2025</a:t>
+              <a:t>3/19/2026</a:t>
             </a:fld>
             <a:endParaRPr lang="en-US"/>
           </a:p>
@@ -4377,7 +4387,7 @@
           <a:p>
             <a:fld id="{D241CDF3-A1FB-4215-9C3B-B36887AAFAD2}" type="datetimeFigureOut">
               <a:rPr lang="en-US" smtClean="0"/>
-              <a:t>11/26/2025</a:t>
+              <a:t>3/19/2026</a:t>
             </a:fld>
             <a:endParaRPr lang="en-US"/>
           </a:p>
@@ -4665,7 +4675,7 @@
           <a:p>
             <a:fld id="{D241CDF3-A1FB-4215-9C3B-B36887AAFAD2}" type="datetimeFigureOut">
               <a:rPr lang="en-US" smtClean="0"/>
-              <a:t>11/26/2025</a:t>
+              <a:t>3/19/2026</a:t>
             </a:fld>
             <a:endParaRPr lang="en-US"/>
           </a:p>
@@ -4906,7 +4916,7 @@
           <a:p>
             <a:fld id="{D241CDF3-A1FB-4215-9C3B-B36887AAFAD2}" type="datetimeFigureOut">
               <a:rPr lang="en-US" smtClean="0"/>
-              <a:t>11/26/2025</a:t>
+              <a:t>3/19/2026</a:t>
             </a:fld>
             <a:endParaRPr lang="en-US"/>
           </a:p>
@@ -6713,6 +6723,340 @@
   <p:cSld>
     <p:spTree>
       <p:nvGrpSpPr>
+        <p:cNvPr id="1" name=""/>
+        <p:cNvGrpSpPr/>
+        <p:nvPr/>
+      </p:nvGrpSpPr>
+      <p:grpSpPr>
+        <a:xfrm>
+          <a:off x="0" y="0"/>
+          <a:ext cx="0" cy="0"/>
+          <a:chOff x="0" y="0"/>
+          <a:chExt cx="0" cy="0"/>
+        </a:xfrm>
+      </p:grpSpPr>
+      <p:sp>
+        <p:nvSpPr>
+          <p:cNvPr id="2" name="Title 1">
+            <a:extLst>
+              <a:ext uri="{FF2B5EF4-FFF2-40B4-BE49-F238E27FC236}">
+                <a16:creationId xmlns:a16="http://schemas.microsoft.com/office/drawing/2014/main" id="{4677D5C4-9CC6-8AF6-DD54-4EF6AFF9CBA6}"/>
+              </a:ext>
+            </a:extLst>
+          </p:cNvPr>
+          <p:cNvSpPr>
+            <a:spLocks noGrp="1"/>
+          </p:cNvSpPr>
+          <p:nvPr>
+            <p:ph type="title"/>
+          </p:nvPr>
+        </p:nvSpPr>
+        <p:spPr/>
+        <p:txBody>
+          <a:bodyPr/>
+          <a:lstStyle/>
+          <a:p>
+            <a:r>
+              <a:rPr lang="en-US" dirty="0"/>
+              <a:t>Dataset History</a:t>
+            </a:r>
+          </a:p>
+        </p:txBody>
+      </p:sp>
+      <p:sp>
+        <p:nvSpPr>
+          <p:cNvPr id="3" name="Content Placeholder 2">
+            <a:extLst>
+              <a:ext uri="{FF2B5EF4-FFF2-40B4-BE49-F238E27FC236}">
+                <a16:creationId xmlns:a16="http://schemas.microsoft.com/office/drawing/2014/main" id="{7853F840-CD8B-1F82-7DF8-F9F3BB1A7118}"/>
+              </a:ext>
+            </a:extLst>
+          </p:cNvPr>
+          <p:cNvSpPr>
+            <a:spLocks noGrp="1"/>
+          </p:cNvSpPr>
+          <p:nvPr>
+            <p:ph idx="1"/>
+          </p:nvPr>
+        </p:nvSpPr>
+        <p:spPr/>
+        <p:txBody>
+          <a:bodyPr/>
+          <a:lstStyle/>
+          <a:p>
+            <a:r>
+              <a:rPr lang="en-US" dirty="0"/>
+              <a:t>Unmarked: None</a:t>
+            </a:r>
+          </a:p>
+        </p:txBody>
+      </p:sp>
+    </p:spTree>
+    <p:extLst>
+      <p:ext uri="{BB962C8B-B14F-4D97-AF65-F5344CB8AC3E}">
+        <p14:creationId xmlns:p14="http://schemas.microsoft.com/office/powerpoint/2010/main" val="1418877214"/>
+      </p:ext>
+    </p:extLst>
+  </p:cSld>
+  <p:clrMapOvr>
+    <a:masterClrMapping/>
+  </p:clrMapOvr>
+</p:sld>
+</file>
+
+<file path=ppt/slides/slide21.xml><?xml version="1.0" encoding="utf-8"?>
+<p:sld xmlns:a="http://schemas.openxmlformats.org/drawingml/2006/main" xmlns:r="http://schemas.openxmlformats.org/officeDocument/2006/relationships" xmlns:p="http://schemas.openxmlformats.org/presentationml/2006/main">
+  <p:cSld>
+    <p:spTree>
+      <p:nvGrpSpPr>
+        <p:cNvPr id="1" name=""/>
+        <p:cNvGrpSpPr/>
+        <p:nvPr/>
+      </p:nvGrpSpPr>
+      <p:grpSpPr>
+        <a:xfrm>
+          <a:off x="0" y="0"/>
+          <a:ext cx="0" cy="0"/>
+          <a:chOff x="0" y="0"/>
+          <a:chExt cx="0" cy="0"/>
+        </a:xfrm>
+      </p:grpSpPr>
+      <p:pic>
+        <p:nvPicPr>
+          <p:cNvPr id="5" name="Picture 4">
+            <a:extLst>
+              <a:ext uri="{FF2B5EF4-FFF2-40B4-BE49-F238E27FC236}">
+                <a16:creationId xmlns:a16="http://schemas.microsoft.com/office/drawing/2014/main" id="{20B84CB2-3872-F5A4-BA84-6FB27BE1CBC3}"/>
+              </a:ext>
+            </a:extLst>
+          </p:cNvPr>
+          <p:cNvPicPr>
+            <a:picLocks noChangeAspect="1"/>
+          </p:cNvPicPr>
+          <p:nvPr/>
+        </p:nvPicPr>
+        <p:blipFill>
+          <a:blip r:embed="rId2"/>
+          <a:stretch>
+            <a:fillRect/>
+          </a:stretch>
+        </p:blipFill>
+        <p:spPr>
+          <a:xfrm>
+            <a:off x="0" y="1546225"/>
+            <a:ext cx="12192000" cy="3765550"/>
+          </a:xfrm>
+          <a:prstGeom prst="rect">
+            <a:avLst/>
+          </a:prstGeom>
+        </p:spPr>
+      </p:pic>
+      <p:sp>
+        <p:nvSpPr>
+          <p:cNvPr id="6" name="Rectangle 5">
+            <a:extLst>
+              <a:ext uri="{FF2B5EF4-FFF2-40B4-BE49-F238E27FC236}">
+                <a16:creationId xmlns:a16="http://schemas.microsoft.com/office/drawing/2014/main" id="{EB711F0D-348B-44FC-7B67-D2B920A1BD40}"/>
+              </a:ext>
+            </a:extLst>
+          </p:cNvPr>
+          <p:cNvSpPr/>
+          <p:nvPr/>
+        </p:nvSpPr>
+        <p:spPr>
+          <a:xfrm>
+            <a:off x="11569148" y="3240464"/>
+            <a:ext cx="345922" cy="317745"/>
+          </a:xfrm>
+          <a:prstGeom prst="rect">
+            <a:avLst/>
+          </a:prstGeom>
+          <a:noFill/>
+          <a:ln w="38100">
+            <a:solidFill>
+              <a:srgbClr val="FF0000"/>
+            </a:solidFill>
+          </a:ln>
+        </p:spPr>
+        <p:style>
+          <a:lnRef idx="2">
+            <a:schemeClr val="accent1">
+              <a:shade val="15000"/>
+            </a:schemeClr>
+          </a:lnRef>
+          <a:fillRef idx="1">
+            <a:schemeClr val="accent1"/>
+          </a:fillRef>
+          <a:effectRef idx="0">
+            <a:schemeClr val="accent1"/>
+          </a:effectRef>
+          <a:fontRef idx="minor">
+            <a:schemeClr val="lt1"/>
+          </a:fontRef>
+        </p:style>
+        <p:txBody>
+          <a:bodyPr rtlCol="0" anchor="ctr"/>
+          <a:lstStyle/>
+          <a:p>
+            <a:pPr algn="ctr"/>
+            <a:endParaRPr lang="en-US">
+              <a:ln w="0"/>
+              <a:solidFill>
+                <a:schemeClr val="tx1"/>
+              </a:solidFill>
+              <a:effectLst>
+                <a:outerShdw blurRad="38100" dist="19050" dir="2700000" algn="tl" rotWithShape="0">
+                  <a:schemeClr val="dk1">
+                    <a:alpha val="40000"/>
+                  </a:schemeClr>
+                </a:outerShdw>
+              </a:effectLst>
+            </a:endParaRPr>
+          </a:p>
+        </p:txBody>
+      </p:sp>
+    </p:spTree>
+    <p:extLst>
+      <p:ext uri="{BB962C8B-B14F-4D97-AF65-F5344CB8AC3E}">
+        <p14:creationId xmlns:p14="http://schemas.microsoft.com/office/powerpoint/2010/main" val="112309044"/>
+      </p:ext>
+    </p:extLst>
+  </p:cSld>
+  <p:clrMapOvr>
+    <a:masterClrMapping/>
+  </p:clrMapOvr>
+</p:sld>
+</file>
+
+<file path=ppt/slides/slide22.xml><?xml version="1.0" encoding="utf-8"?>
+<p:sld xmlns:a="http://schemas.openxmlformats.org/drawingml/2006/main" xmlns:r="http://schemas.openxmlformats.org/officeDocument/2006/relationships" xmlns:p="http://schemas.openxmlformats.org/presentationml/2006/main">
+  <p:cSld>
+    <p:spTree>
+      <p:nvGrpSpPr>
+        <p:cNvPr id="1" name=""/>
+        <p:cNvGrpSpPr/>
+        <p:nvPr/>
+      </p:nvGrpSpPr>
+      <p:grpSpPr>
+        <a:xfrm>
+          <a:off x="0" y="0"/>
+          <a:ext cx="0" cy="0"/>
+          <a:chOff x="0" y="0"/>
+          <a:chExt cx="0" cy="0"/>
+        </a:xfrm>
+      </p:grpSpPr>
+      <p:pic>
+        <p:nvPicPr>
+          <p:cNvPr id="5" name="Picture 4">
+            <a:extLst>
+              <a:ext uri="{FF2B5EF4-FFF2-40B4-BE49-F238E27FC236}">
+                <a16:creationId xmlns:a16="http://schemas.microsoft.com/office/drawing/2014/main" id="{A26D9574-9C18-855F-3E4D-833597A68E46}"/>
+              </a:ext>
+            </a:extLst>
+          </p:cNvPr>
+          <p:cNvPicPr>
+            <a:picLocks noChangeAspect="1"/>
+          </p:cNvPicPr>
+          <p:nvPr/>
+        </p:nvPicPr>
+        <p:blipFill>
+          <a:blip r:embed="rId2"/>
+          <a:stretch>
+            <a:fillRect/>
+          </a:stretch>
+        </p:blipFill>
+        <p:spPr>
+          <a:xfrm>
+            <a:off x="3128548" y="1109339"/>
+            <a:ext cx="5934903" cy="4639322"/>
+          </a:xfrm>
+          <a:prstGeom prst="rect">
+            <a:avLst/>
+          </a:prstGeom>
+        </p:spPr>
+      </p:pic>
+      <p:sp>
+        <p:nvSpPr>
+          <p:cNvPr id="6" name="Rectangle 5">
+            <a:extLst>
+              <a:ext uri="{FF2B5EF4-FFF2-40B4-BE49-F238E27FC236}">
+                <a16:creationId xmlns:a16="http://schemas.microsoft.com/office/drawing/2014/main" id="{6045A54F-0EDF-9B04-A80C-05D95E748D22}"/>
+              </a:ext>
+            </a:extLst>
+          </p:cNvPr>
+          <p:cNvSpPr/>
+          <p:nvPr/>
+        </p:nvSpPr>
+        <p:spPr>
+          <a:xfrm>
+            <a:off x="7613373" y="5109020"/>
+            <a:ext cx="1272209" cy="496650"/>
+          </a:xfrm>
+          <a:prstGeom prst="rect">
+            <a:avLst/>
+          </a:prstGeom>
+          <a:noFill/>
+          <a:ln w="38100">
+            <a:solidFill>
+              <a:srgbClr val="FF0000"/>
+            </a:solidFill>
+          </a:ln>
+        </p:spPr>
+        <p:style>
+          <a:lnRef idx="2">
+            <a:schemeClr val="accent1">
+              <a:shade val="15000"/>
+            </a:schemeClr>
+          </a:lnRef>
+          <a:fillRef idx="1">
+            <a:schemeClr val="accent1"/>
+          </a:fillRef>
+          <a:effectRef idx="0">
+            <a:schemeClr val="accent1"/>
+          </a:effectRef>
+          <a:fontRef idx="minor">
+            <a:schemeClr val="lt1"/>
+          </a:fontRef>
+        </p:style>
+        <p:txBody>
+          <a:bodyPr rtlCol="0" anchor="ctr"/>
+          <a:lstStyle/>
+          <a:p>
+            <a:pPr algn="ctr"/>
+            <a:endParaRPr lang="en-US">
+              <a:ln w="0"/>
+              <a:solidFill>
+                <a:schemeClr val="tx1"/>
+              </a:solidFill>
+              <a:effectLst>
+                <a:outerShdw blurRad="38100" dist="19050" dir="2700000" algn="tl" rotWithShape="0">
+                  <a:schemeClr val="dk1">
+                    <a:alpha val="40000"/>
+                  </a:schemeClr>
+                </a:outerShdw>
+              </a:effectLst>
+            </a:endParaRPr>
+          </a:p>
+        </p:txBody>
+      </p:sp>
+    </p:spTree>
+    <p:extLst>
+      <p:ext uri="{BB962C8B-B14F-4D97-AF65-F5344CB8AC3E}">
+        <p14:creationId xmlns:p14="http://schemas.microsoft.com/office/powerpoint/2010/main" val="222030758"/>
+      </p:ext>
+    </p:extLst>
+  </p:cSld>
+  <p:clrMapOvr>
+    <a:masterClrMapping/>
+  </p:clrMapOvr>
+</p:sld>
+</file>
+
+<file path=ppt/slides/slide23.xml><?xml version="1.0" encoding="utf-8"?>
+<p:sld xmlns:a="http://schemas.openxmlformats.org/drawingml/2006/main" xmlns:r="http://schemas.openxmlformats.org/officeDocument/2006/relationships" xmlns:p="http://schemas.openxmlformats.org/presentationml/2006/main">
+  <p:cSld>
+    <p:spTree>
+      <p:nvGrpSpPr>
         <p:cNvPr id="1" name="">
           <a:extLst>
             <a:ext uri="{FF2B5EF4-FFF2-40B4-BE49-F238E27FC236}">
@@ -6806,7 +7150,7 @@
 </p:sld>
 </file>
 
-<file path=ppt/slides/slide21.xml><?xml version="1.0" encoding="utf-8"?>
+<file path=ppt/slides/slide24.xml><?xml version="1.0" encoding="utf-8"?>
 <p:sld xmlns:a="http://schemas.openxmlformats.org/drawingml/2006/main" xmlns:r="http://schemas.openxmlformats.org/officeDocument/2006/relationships" xmlns:p="http://schemas.openxmlformats.org/presentationml/2006/main">
   <p:cSld>
     <p:spTree>
